--- a/artifacts/bilim_senligi_presentation.pptx
+++ b/artifacts/bilim_senligi_presentation.pptx
@@ -14,8 +14,6 @@
     <p:sldId id="262" r:id="rId13"/>
     <p:sldId id="263" r:id="rId14"/>
     <p:sldId id="264" r:id="rId15"/>
-    <p:sldId id="265" r:id="rId16"/>
-    <p:sldId id="266" r:id="rId17"/>
   </p:sldIdLst>
   <p:sldSz cx="9144000" cy="6858000" type="screen4x3"/>
   <p:notesSz cx="6858000" cy="9144000"/>
@@ -3094,7 +3092,7 @@
     <p:bg>
       <p:bgPr>
         <a:solidFill>
-          <a:srgbClr val="003366"/>
+          <a:srgbClr val="00193C"/>
         </a:solidFill>
         <a:effectLst/>
       </p:bgPr>
@@ -3108,195 +3106,6 @@
       <p:grpSpPr/>
       <p:sp>
         <p:nvSpPr>
-          <p:cNvPr id="2" name="TextBox 1"/>
-          <p:cNvSpPr txBox="1"/>
-          <p:nvPr/>
-        </p:nvSpPr>
-        <p:spPr>
-          <a:xfrm>
-            <a:off x="731520" y="1371600"/>
-            <a:ext cx="7680960" cy="2286000"/>
-          </a:xfrm>
-          <a:prstGeom prst="rect">
-            <a:avLst/>
-          </a:prstGeom>
-          <a:noFill/>
-        </p:spPr>
-        <p:txBody>
-          <a:bodyPr wrap="square">
-            <a:spAutoFit/>
-          </a:bodyPr>
-          <a:lstStyle/>
-          <a:p>
-            <a:pPr algn="ctr">
-              <a:defRPr sz="2400" b="1">
-                <a:solidFill>
-                  <a:srgbClr val="FFFFFF"/>
-                </a:solidFill>
-                <a:latin typeface="Calibri"/>
-              </a:defRPr>
-            </a:pPr>
-            <a:r>
-              <a:t>Derin Öğrenme ve Büyük Dil Modelleri Entegrasyonu ile</a:t>
-            </a:r>
-          </a:p>
-          <a:p>
-            <a:pPr algn="ctr">
-              <a:defRPr sz="3200" b="1">
-                <a:solidFill>
-                  <a:srgbClr val="FFFFFF"/>
-                </a:solidFill>
-                <a:latin typeface="Calibri"/>
-              </a:defRPr>
-            </a:pPr>
-            <a:r>
-              <a:t>Mikro-Sismik Örüntü Tespiti</a:t>
-            </a:r>
-          </a:p>
-          <a:p>
-            <a:pPr algn="ctr">
-              <a:defRPr sz="2000">
-                <a:solidFill>
-                  <a:srgbClr val="B4C8DC"/>
-                </a:solidFill>
-                <a:latin typeface="Calibri"/>
-              </a:defRPr>
-            </a:pPr>
-            <a:r>
-              <a:t>İnşaat Sektörüne Yönelik Erken Uyarı ve Destek Sistemi</a:t>
-            </a:r>
-          </a:p>
-        </p:txBody>
-      </p:sp>
-      <p:sp>
-        <p:nvSpPr>
-          <p:cNvPr id="3" name="TextBox 2"/>
-          <p:cNvSpPr txBox="1"/>
-          <p:nvPr/>
-        </p:nvSpPr>
-        <p:spPr>
-          <a:xfrm>
-            <a:off x="731520" y="4114800"/>
-            <a:ext cx="7680960" cy="1371600"/>
-          </a:xfrm>
-          <a:prstGeom prst="rect">
-            <a:avLst/>
-          </a:prstGeom>
-          <a:noFill/>
-        </p:spPr>
-        <p:txBody>
-          <a:bodyPr wrap="square">
-            <a:spAutoFit/>
-          </a:bodyPr>
-          <a:lstStyle/>
-          <a:p>
-            <a:pPr algn="ctr">
-              <a:defRPr sz="1600">
-                <a:solidFill>
-                  <a:srgbClr val="C8D2E1"/>
-                </a:solidFill>
-                <a:latin typeface="Calibri"/>
-              </a:defRPr>
-            </a:pPr>
-            <a:r>
-              <a:t>Bertuğ TAŞ, Kadir Emir YÜCEL, Melih TAKYACİ, Emre ÖZDEMİR</a:t>
-            </a:r>
-          </a:p>
-          <a:p>
-            <a:pPr algn="ctr">
-              <a:defRPr sz="1400">
-                <a:solidFill>
-                  <a:srgbClr val="C8D2E1"/>
-                </a:solidFill>
-                <a:latin typeface="Calibri"/>
-              </a:defRPr>
-            </a:pPr>
-            <a:r>
-              <a:t>Danışman: Efendi Nasıboğlu</a:t>
-            </a:r>
-          </a:p>
-          <a:p>
-            <a:pPr algn="ctr">
-              <a:spcBef>
-                <a:spcPts val="600"/>
-              </a:spcBef>
-              <a:defRPr sz="1300">
-                <a:solidFill>
-                  <a:srgbClr val="A0AFC3"/>
-                </a:solidFill>
-                <a:latin typeface="Calibri"/>
-              </a:defRPr>
-            </a:pPr>
-            <a:r>
-              <a:t>Dokuz Eylül Üniversitesi, Fen Fakültesi, Bilgisayar Bilimleri Bölümü</a:t>
-            </a:r>
-          </a:p>
-        </p:txBody>
-      </p:sp>
-      <p:sp>
-        <p:nvSpPr>
-          <p:cNvPr id="4" name="TextBox 3"/>
-          <p:cNvSpPr txBox="1"/>
-          <p:nvPr/>
-        </p:nvSpPr>
-        <p:spPr>
-          <a:xfrm>
-            <a:off x="731520" y="5760720"/>
-            <a:ext cx="7680960" cy="548640"/>
-          </a:xfrm>
-          <a:prstGeom prst="rect">
-            <a:avLst/>
-          </a:prstGeom>
-          <a:noFill/>
-        </p:spPr>
-        <p:txBody>
-          <a:bodyPr wrap="none">
-            <a:spAutoFit/>
-          </a:bodyPr>
-          <a:lstStyle/>
-          <a:p>
-            <a:pPr algn="ctr">
-              <a:defRPr sz="1100">
-                <a:solidFill>
-                  <a:srgbClr val="8CA0B4"/>
-                </a:solidFill>
-                <a:latin typeface="Calibri"/>
-              </a:defRPr>
-            </a:pPr>
-            <a:r>
-              <a:t>III. Ulusal Temel Bilimler Gençlik Sempozyumu ve Bilim Şenliği • 12–13 Mayıs 2026</a:t>
-            </a:r>
-          </a:p>
-        </p:txBody>
-      </p:sp>
-    </p:spTree>
-  </p:cSld>
-  <p:clrMapOvr>
-    <a:masterClrMapping/>
-  </p:clrMapOvr>
-</p:sld>
-</file>
-
-<file path=ppt/slides/slide10.xml><?xml version="1.0" encoding="utf-8"?>
-<p:sld xmlns:a="http://schemas.openxmlformats.org/drawingml/2006/main" xmlns:p="http://schemas.openxmlformats.org/presentationml/2006/main" xmlns:r="http://schemas.openxmlformats.org/officeDocument/2006/relationships">
-  <p:cSld>
-    <p:bg>
-      <p:bgPr>
-        <a:solidFill>
-          <a:srgbClr val="FFFFFF"/>
-        </a:solidFill>
-        <a:effectLst/>
-      </p:bgPr>
-    </p:bg>
-    <p:spTree>
-      <p:nvGrpSpPr>
-        <p:cNvPr id="1" name=""/>
-        <p:cNvGrpSpPr/>
-        <p:nvPr/>
-      </p:nvGrpSpPr>
-      <p:grpSpPr/>
-      <p:sp>
-        <p:nvSpPr>
           <p:cNvPr id="2" name="Rectangle 1"/>
           <p:cNvSpPr/>
           <p:nvPr/>
@@ -3304,13 +3113,13 @@
         <p:spPr>
           <a:xfrm>
             <a:off x="0" y="0"/>
-            <a:ext cx="9144000" cy="1097280"/>
+            <a:ext cx="9144000" cy="73152"/>
           </a:xfrm>
           <a:prstGeom prst="rect">
             <a:avLst/>
           </a:prstGeom>
           <a:solidFill>
-            <a:srgbClr val="003366"/>
+            <a:srgbClr val="C39B2D"/>
           </a:solidFill>
           <a:ln>
             <a:noFill/>
@@ -3331,20 +3140,10 @@
           </a:fontRef>
         </p:style>
         <p:txBody>
-          <a:bodyPr rtlCol="0" anchor="ctr" wrap="square" lIns="457200"/>
-          <a:lstStyle/>
-          <a:p>
-            <a:pPr algn="l">
-              <a:defRPr sz="2800" b="1">
-                <a:solidFill>
-                  <a:srgbClr val="FFFFFF"/>
-                </a:solidFill>
-                <a:latin typeface="Calibri"/>
-              </a:defRPr>
-            </a:pPr>
-            <a:r>
-              <a:t>Kaynaklar</a:t>
-            </a:r>
+          <a:bodyPr rtlCol="0" anchor="ctr"/>
+          <a:lstStyle/>
+          <a:p>
+            <a:pPr algn="ctr"/>
           </a:p>
         </p:txBody>
       </p:sp>
@@ -3356,8 +3155,8 @@
         </p:nvSpPr>
         <p:spPr>
           <a:xfrm>
-            <a:off x="457200" y="1371600"/>
-            <a:ext cx="8229600" cy="4572000"/>
+            <a:off x="731520" y="1463040"/>
+            <a:ext cx="7680960" cy="548640"/>
           </a:xfrm>
           <a:prstGeom prst="rect">
             <a:avLst/>
@@ -3365,192 +3164,35 @@
           <a:noFill/>
         </p:spPr>
         <p:txBody>
-          <a:bodyPr wrap="square">
+          <a:bodyPr wrap="square" anchor="t">
             <a:spAutoFit/>
           </a:bodyPr>
           <a:lstStyle/>
           <a:p>
-            <a:pPr>
-              <a:spcAft>
-                <a:spcPts val="800"/>
-              </a:spcAft>
-              <a:defRPr sz="1300">
-                <a:solidFill>
-                  <a:srgbClr val="333333"/>
-                </a:solidFill>
-                <a:latin typeface="Calibri"/>
-              </a:defRPr>
-            </a:pPr>
-            <a:r>
-              <a:t>[1] Tan, O. (2021). Nat. Hazards Earth Syst. Sci., 21(7), 2059–2073.</a:t>
-            </a:r>
-          </a:p>
-          <a:p>
-            <a:pPr>
-              <a:spcAft>
-                <a:spcPts val="800"/>
-              </a:spcAft>
-              <a:defRPr sz="1300">
-                <a:solidFill>
-                  <a:srgbClr val="333333"/>
-                </a:solidFill>
-                <a:latin typeface="Calibri"/>
-              </a:defRPr>
-            </a:pPr>
-            <a:r>
-              <a:t>[2] Cambaz, M. D. vd. (2021). Seis. Res. Lett., 92(3), 1571–1580.</a:t>
-            </a:r>
-          </a:p>
-          <a:p>
-            <a:pPr>
-              <a:spcAft>
-                <a:spcPts val="800"/>
-              </a:spcAft>
-              <a:defRPr sz="1300">
-                <a:solidFill>
-                  <a:srgbClr val="333333"/>
-                </a:solidFill>
-                <a:latin typeface="Calibri"/>
-              </a:defRPr>
-            </a:pPr>
-            <a:r>
-              <a:t>[3] Woollam, J. vd. (2022). Seis. Res. Lett., 93(3), 1695–1709.</a:t>
-            </a:r>
-          </a:p>
-          <a:p>
-            <a:pPr>
-              <a:spcAft>
-                <a:spcPts val="800"/>
-              </a:spcAft>
-              <a:defRPr sz="1300">
-                <a:solidFill>
-                  <a:srgbClr val="333333"/>
-                </a:solidFill>
-                <a:latin typeface="Calibri"/>
-              </a:defRPr>
-            </a:pPr>
-            <a:r>
-              <a:t>[4] Zhu, W. &amp; Beroza, G. C. (2019). Geophys. J. Int., 216(1), 261–273.</a:t>
-            </a:r>
-          </a:p>
-          <a:p>
-            <a:pPr>
-              <a:spcAft>
-                <a:spcPts val="800"/>
-              </a:spcAft>
-              <a:defRPr sz="1300">
-                <a:solidFill>
-                  <a:srgbClr val="333333"/>
-                </a:solidFill>
-                <a:latin typeface="Calibri"/>
-              </a:defRPr>
-            </a:pPr>
-            <a:r>
-              <a:t>[5] Mousavi, S. M. vd. (2020). Nature Comm., 11, 3952.</a:t>
-            </a:r>
-          </a:p>
-          <a:p>
-            <a:pPr>
-              <a:spcAft>
-                <a:spcPts val="800"/>
-              </a:spcAft>
-              <a:defRPr sz="1300">
-                <a:solidFill>
-                  <a:srgbClr val="333333"/>
-                </a:solidFill>
-                <a:latin typeface="Calibri"/>
-              </a:defRPr>
-            </a:pPr>
-            <a:r>
-              <a:t>[6] Ross, Z. E. vd. (2018). BSSA, 108(5A), 2894–2901.</a:t>
-            </a:r>
-          </a:p>
-          <a:p>
-            <a:pPr>
-              <a:spcAft>
-                <a:spcPts val="800"/>
-              </a:spcAft>
-              <a:defRPr sz="1300">
-                <a:solidFill>
-                  <a:srgbClr val="333333"/>
-                </a:solidFill>
-                <a:latin typeface="Calibri"/>
-              </a:defRPr>
-            </a:pPr>
-            <a:r>
-              <a:t>[7] Ding, M. vd. (2023). Earthquake Science, 36.</a:t>
-            </a:r>
-          </a:p>
-          <a:p>
-            <a:pPr>
-              <a:spcAft>
-                <a:spcPts val="800"/>
-              </a:spcAft>
-              <a:defRPr sz="1300">
-                <a:solidFill>
-                  <a:srgbClr val="333333"/>
-                </a:solidFill>
-                <a:latin typeface="Calibri"/>
-              </a:defRPr>
-            </a:pPr>
-            <a:r>
-              <a:t>[8] Wang, Z. vd. (2025). J. Building Eng., 103, 112189.</a:t>
-            </a:r>
-          </a:p>
-          <a:p>
-            <a:pPr>
-              <a:spcAft>
-                <a:spcPts val="800"/>
-              </a:spcAft>
-              <a:defRPr sz="1300">
-                <a:solidFill>
-                  <a:srgbClr val="333333"/>
-                </a:solidFill>
-                <a:latin typeface="Calibri"/>
-              </a:defRPr>
-            </a:pPr>
-            <a:r>
-              <a:t>[9] Mousavi, S. M. vd. (2025). Geophys. J. Int., 240(2), 1281–1294.</a:t>
-            </a:r>
-          </a:p>
-        </p:txBody>
-      </p:sp>
-    </p:spTree>
-  </p:cSld>
-  <p:clrMapOvr>
-    <a:masterClrMapping/>
-  </p:clrMapOvr>
-</p:sld>
-</file>
-
-<file path=ppt/slides/slide11.xml><?xml version="1.0" encoding="utf-8"?>
-<p:sld xmlns:a="http://schemas.openxmlformats.org/drawingml/2006/main" xmlns:p="http://schemas.openxmlformats.org/presentationml/2006/main" xmlns:r="http://schemas.openxmlformats.org/officeDocument/2006/relationships">
-  <p:cSld>
-    <p:bg>
-      <p:bgPr>
-        <a:solidFill>
-          <a:srgbClr val="003366"/>
-        </a:solidFill>
-        <a:effectLst/>
-      </p:bgPr>
-    </p:bg>
-    <p:spTree>
-      <p:nvGrpSpPr>
-        <p:cNvPr id="1" name=""/>
-        <p:cNvGrpSpPr/>
-        <p:nvPr/>
-      </p:nvGrpSpPr>
-      <p:grpSpPr/>
-      <p:sp>
-        <p:nvSpPr>
-          <p:cNvPr id="2" name="TextBox 1"/>
+            <a:pPr algn="ctr">
+              <a:defRPr sz="2000" b="0" i="0">
+                <a:solidFill>
+                  <a:srgbClr val="AABED7"/>
+                </a:solidFill>
+                <a:latin typeface="Calibri Light"/>
+              </a:defRPr>
+            </a:pPr>
+            <a:r>
+              <a:t>Derin Öğrenme ve Yerel LLM Entegrasyonu ile</a:t>
+            </a:r>
+          </a:p>
+        </p:txBody>
+      </p:sp>
+      <p:sp>
+        <p:nvSpPr>
+          <p:cNvPr id="4" name="TextBox 3"/>
           <p:cNvSpPr txBox="1"/>
           <p:nvPr/>
         </p:nvSpPr>
         <p:spPr>
           <a:xfrm>
-            <a:off x="914400" y="2286000"/>
-            <a:ext cx="7315200" cy="1828800"/>
+            <a:off x="731520" y="2011680"/>
+            <a:ext cx="7680960" cy="731520"/>
           </a:xfrm>
           <a:prstGeom prst="rect">
             <a:avLst/>
@@ -3558,51 +3200,35 @@
           <a:noFill/>
         </p:spPr>
         <p:txBody>
-          <a:bodyPr wrap="square">
+          <a:bodyPr wrap="square" anchor="t">
             <a:spAutoFit/>
           </a:bodyPr>
           <a:lstStyle/>
           <a:p>
             <a:pPr algn="ctr">
-              <a:defRPr sz="4000" b="1">
+              <a:defRPr sz="3400" b="1" i="0">
                 <a:solidFill>
                   <a:srgbClr val="FFFFFF"/>
                 </a:solidFill>
-                <a:latin typeface="Calibri"/>
-              </a:defRPr>
-            </a:pPr>
-            <a:r>
-              <a:t>Teşekkürler</a:t>
-            </a:r>
-          </a:p>
-          <a:p>
-            <a:pPr algn="ctr">
-              <a:spcBef>
-                <a:spcPts val="2000"/>
-              </a:spcBef>
-              <a:defRPr sz="2000">
-                <a:solidFill>
-                  <a:srgbClr val="B4C8DC"/>
-                </a:solidFill>
-                <a:latin typeface="Calibri"/>
-              </a:defRPr>
-            </a:pPr>
-            <a:r>
-              <a:t>Sorularınızı memnuniyetle yanıtlarız.</a:t>
-            </a:r>
-          </a:p>
-        </p:txBody>
-      </p:sp>
-      <p:sp>
-        <p:nvSpPr>
-          <p:cNvPr id="3" name="TextBox 2"/>
+                <a:latin typeface="Calibri Light"/>
+              </a:defRPr>
+            </a:pPr>
+            <a:r>
+              <a:t>Mikro-Sismik Karar Destek Sistemi</a:t>
+            </a:r>
+          </a:p>
+        </p:txBody>
+      </p:sp>
+      <p:sp>
+        <p:nvSpPr>
+          <p:cNvPr id="5" name="TextBox 4"/>
           <p:cNvSpPr txBox="1"/>
           <p:nvPr/>
         </p:nvSpPr>
         <p:spPr>
           <a:xfrm>
-            <a:off x="914400" y="5029200"/>
-            <a:ext cx="7315200" cy="914400"/>
+            <a:off x="731520" y="2743200"/>
+            <a:ext cx="7680960" cy="457200"/>
           </a:xfrm>
           <a:prstGeom prst="rect">
             <a:avLst/>
@@ -3610,34 +3236,208 @@
           <a:noFill/>
         </p:spPr>
         <p:txBody>
-          <a:bodyPr wrap="square">
+          <a:bodyPr wrap="square" anchor="t">
             <a:spAutoFit/>
           </a:bodyPr>
           <a:lstStyle/>
           <a:p>
             <a:pPr algn="ctr">
-              <a:defRPr sz="1400">
-                <a:solidFill>
-                  <a:srgbClr val="A0AFC3"/>
-                </a:solidFill>
-                <a:latin typeface="Calibri"/>
-              </a:defRPr>
-            </a:pPr>
-            <a:r>
-              <a:t>bertugtaas@gmail.com</a:t>
-            </a:r>
-          </a:p>
+              <a:defRPr sz="1400" b="0" i="1">
+                <a:solidFill>
+                  <a:srgbClr val="96AAC8"/>
+                </a:solidFill>
+                <a:latin typeface="Calibri"/>
+              </a:defRPr>
+            </a:pPr>
+            <a:r>
+              <a:t>Veri Kıtlığı Koşullarında Hibrit Tespit Mimarisi ve Hava Boşluklu Yönetmelik Yorumlama</a:t>
+            </a:r>
+          </a:p>
+        </p:txBody>
+      </p:sp>
+      <p:sp>
+        <p:nvSpPr>
+          <p:cNvPr id="6" name="Rectangle 5"/>
+          <p:cNvSpPr/>
+          <p:nvPr/>
+        </p:nvSpPr>
+        <p:spPr>
+          <a:xfrm>
+            <a:off x="3200400" y="3383280"/>
+            <a:ext cx="2743200" cy="18288"/>
+          </a:xfrm>
+          <a:prstGeom prst="rect">
+            <a:avLst/>
+          </a:prstGeom>
+          <a:solidFill>
+            <a:srgbClr val="C39B2D"/>
+          </a:solidFill>
+          <a:ln>
+            <a:noFill/>
+          </a:ln>
+        </p:spPr>
+        <p:style>
+          <a:lnRef idx="1">
+            <a:schemeClr val="accent1"/>
+          </a:lnRef>
+          <a:fillRef idx="3">
+            <a:schemeClr val="accent1"/>
+          </a:fillRef>
+          <a:effectRef idx="2">
+            <a:schemeClr val="accent1"/>
+          </a:effectRef>
+          <a:fontRef idx="minor">
+            <a:schemeClr val="lt1"/>
+          </a:fontRef>
+        </p:style>
+        <p:txBody>
+          <a:bodyPr rtlCol="0" anchor="ctr"/>
+          <a:lstStyle/>
+          <a:p>
+            <a:pPr algn="ctr"/>
+          </a:p>
+        </p:txBody>
+      </p:sp>
+      <p:sp>
+        <p:nvSpPr>
+          <p:cNvPr id="7" name="TextBox 6"/>
+          <p:cNvSpPr txBox="1"/>
+          <p:nvPr/>
+        </p:nvSpPr>
+        <p:spPr>
+          <a:xfrm>
+            <a:off x="731520" y="3840480"/>
+            <a:ext cx="7680960" cy="457200"/>
+          </a:xfrm>
+          <a:prstGeom prst="rect">
+            <a:avLst/>
+          </a:prstGeom>
+          <a:noFill/>
+        </p:spPr>
+        <p:txBody>
+          <a:bodyPr wrap="square" anchor="t">
+            <a:spAutoFit/>
+          </a:bodyPr>
+          <a:lstStyle/>
           <a:p>
             <a:pPr algn="ctr">
-              <a:defRPr sz="1200">
-                <a:solidFill>
-                  <a:srgbClr val="8CA0B4"/>
-                </a:solidFill>
-                <a:latin typeface="Calibri"/>
-              </a:defRPr>
-            </a:pPr>
-            <a:r>
-              <a:t>Dokuz Eylül Üniversitesi • Bilgisayar Bilimleri Bölümü • 2026</a:t>
+              <a:defRPr sz="1500" b="0" i="0">
+                <a:solidFill>
+                  <a:srgbClr val="C8D2E1"/>
+                </a:solidFill>
+                <a:latin typeface="Calibri"/>
+              </a:defRPr>
+            </a:pPr>
+            <a:r>
+              <a:t>Bertuğ TAŞ  •  Kadir Emir YÜCEL  •  Melih TAKYACİ  •  Emre ÖZDEMİR</a:t>
+            </a:r>
+          </a:p>
+        </p:txBody>
+      </p:sp>
+      <p:sp>
+        <p:nvSpPr>
+          <p:cNvPr id="8" name="TextBox 7"/>
+          <p:cNvSpPr txBox="1"/>
+          <p:nvPr/>
+        </p:nvSpPr>
+        <p:spPr>
+          <a:xfrm>
+            <a:off x="731520" y="4297680"/>
+            <a:ext cx="7680960" cy="365760"/>
+          </a:xfrm>
+          <a:prstGeom prst="rect">
+            <a:avLst/>
+          </a:prstGeom>
+          <a:noFill/>
+        </p:spPr>
+        <p:txBody>
+          <a:bodyPr wrap="square" anchor="t">
+            <a:spAutoFit/>
+          </a:bodyPr>
+          <a:lstStyle/>
+          <a:p>
+            <a:pPr algn="ctr">
+              <a:defRPr sz="1300" b="0" i="0">
+                <a:solidFill>
+                  <a:srgbClr val="AAB9CD"/>
+                </a:solidFill>
+                <a:latin typeface="Calibri"/>
+              </a:defRPr>
+            </a:pPr>
+            <a:r>
+              <a:t>Danışman: Efendi NASIBOĞLU</a:t>
+            </a:r>
+          </a:p>
+        </p:txBody>
+      </p:sp>
+      <p:sp>
+        <p:nvSpPr>
+          <p:cNvPr id="9" name="TextBox 8"/>
+          <p:cNvSpPr txBox="1"/>
+          <p:nvPr/>
+        </p:nvSpPr>
+        <p:spPr>
+          <a:xfrm>
+            <a:off x="731520" y="4846320"/>
+            <a:ext cx="7680960" cy="365760"/>
+          </a:xfrm>
+          <a:prstGeom prst="rect">
+            <a:avLst/>
+          </a:prstGeom>
+          <a:noFill/>
+        </p:spPr>
+        <p:txBody>
+          <a:bodyPr wrap="square" anchor="t">
+            <a:spAutoFit/>
+          </a:bodyPr>
+          <a:lstStyle/>
+          <a:p>
+            <a:pPr algn="ctr">
+              <a:defRPr sz="1200" b="0" i="0">
+                <a:solidFill>
+                  <a:srgbClr val="8296B4"/>
+                </a:solidFill>
+                <a:latin typeface="Calibri"/>
+              </a:defRPr>
+            </a:pPr>
+            <a:r>
+              <a:t>Dokuz Eylül Üniversitesi • Fen Fakültesi • Bilgisayar Bilimleri Bölümü</a:t>
+            </a:r>
+          </a:p>
+        </p:txBody>
+      </p:sp>
+      <p:sp>
+        <p:nvSpPr>
+          <p:cNvPr id="10" name="TextBox 9"/>
+          <p:cNvSpPr txBox="1"/>
+          <p:nvPr/>
+        </p:nvSpPr>
+        <p:spPr>
+          <a:xfrm>
+            <a:off x="731520" y="5943600"/>
+            <a:ext cx="7680960" cy="365760"/>
+          </a:xfrm>
+          <a:prstGeom prst="rect">
+            <a:avLst/>
+          </a:prstGeom>
+          <a:noFill/>
+        </p:spPr>
+        <p:txBody>
+          <a:bodyPr wrap="square" anchor="t">
+            <a:spAutoFit/>
+          </a:bodyPr>
+          <a:lstStyle/>
+          <a:p>
+            <a:pPr algn="ctr">
+              <a:defRPr sz="1000" b="0" i="0">
+                <a:solidFill>
+                  <a:srgbClr val="6E82A0"/>
+                </a:solidFill>
+                <a:latin typeface="Calibri"/>
+              </a:defRPr>
+            </a:pPr>
+            <a:r>
+              <a:t>III. Ulusal Temel Bilimler Gençlik Sempozyumu ve Bilim Şenliği • Mayıs 2026</a:t>
             </a:r>
           </a:p>
         </p:txBody>
@@ -3656,7 +3456,7 @@
     <p:bg>
       <p:bgPr>
         <a:solidFill>
-          <a:srgbClr val="FFFFFF"/>
+          <a:srgbClr val="F8FAFC"/>
         </a:solidFill>
         <a:effectLst/>
       </p:bgPr>
@@ -3677,13 +3477,13 @@
         <p:spPr>
           <a:xfrm>
             <a:off x="0" y="0"/>
-            <a:ext cx="9144000" cy="1097280"/>
+            <a:ext cx="9144000" cy="1188720"/>
           </a:xfrm>
           <a:prstGeom prst="rect">
             <a:avLst/>
           </a:prstGeom>
           <a:solidFill>
-            <a:srgbClr val="003366"/>
+            <a:srgbClr val="002855"/>
           </a:solidFill>
           <a:ln>
             <a:noFill/>
@@ -3704,33 +3504,66 @@
           </a:fontRef>
         </p:style>
         <p:txBody>
-          <a:bodyPr rtlCol="0" anchor="ctr" wrap="square" lIns="457200"/>
-          <a:lstStyle/>
-          <a:p>
-            <a:pPr algn="l">
-              <a:defRPr sz="2800" b="1">
-                <a:solidFill>
-                  <a:srgbClr val="FFFFFF"/>
-                </a:solidFill>
-                <a:latin typeface="Calibri"/>
-              </a:defRPr>
-            </a:pPr>
-            <a:r>
-              <a:t>Problem: Sismik Katalog Boşluğu</a:t>
-            </a:r>
-          </a:p>
-        </p:txBody>
-      </p:sp>
-      <p:sp>
-        <p:nvSpPr>
-          <p:cNvPr id="3" name="TextBox 2"/>
+          <a:bodyPr rtlCol="0" anchor="ctr"/>
+          <a:lstStyle/>
+          <a:p>
+            <a:pPr algn="ctr"/>
+          </a:p>
+        </p:txBody>
+      </p:sp>
+      <p:sp>
+        <p:nvSpPr>
+          <p:cNvPr id="3" name="Rectangle 2"/>
+          <p:cNvSpPr/>
+          <p:nvPr/>
+        </p:nvSpPr>
+        <p:spPr>
+          <a:xfrm>
+            <a:off x="0" y="1188720"/>
+            <a:ext cx="9144000" cy="54864"/>
+          </a:xfrm>
+          <a:prstGeom prst="rect">
+            <a:avLst/>
+          </a:prstGeom>
+          <a:solidFill>
+            <a:srgbClr val="C39B2D"/>
+          </a:solidFill>
+          <a:ln>
+            <a:noFill/>
+          </a:ln>
+        </p:spPr>
+        <p:style>
+          <a:lnRef idx="1">
+            <a:schemeClr val="accent1"/>
+          </a:lnRef>
+          <a:fillRef idx="3">
+            <a:schemeClr val="accent1"/>
+          </a:fillRef>
+          <a:effectRef idx="2">
+            <a:schemeClr val="accent1"/>
+          </a:effectRef>
+          <a:fontRef idx="minor">
+            <a:schemeClr val="lt1"/>
+          </a:fontRef>
+        </p:style>
+        <p:txBody>
+          <a:bodyPr rtlCol="0" anchor="ctr"/>
+          <a:lstStyle/>
+          <a:p>
+            <a:pPr algn="ctr"/>
+          </a:p>
+        </p:txBody>
+      </p:sp>
+      <p:sp>
+        <p:nvSpPr>
+          <p:cNvPr id="4" name="TextBox 3"/>
           <p:cNvSpPr txBox="1"/>
           <p:nvPr/>
         </p:nvSpPr>
         <p:spPr>
           <a:xfrm>
-            <a:off x="457200" y="1371600"/>
-            <a:ext cx="8229600" cy="4572000"/>
+            <a:off x="548640" y="137160"/>
+            <a:ext cx="8229600" cy="731520"/>
           </a:xfrm>
           <a:prstGeom prst="rect">
             <a:avLst/>
@@ -3738,204 +3571,34 @@
           <a:noFill/>
         </p:spPr>
         <p:txBody>
-          <a:bodyPr wrap="square">
+          <a:bodyPr wrap="square" anchor="t">
             <a:spAutoFit/>
           </a:bodyPr>
           <a:lstStyle/>
           <a:p>
-            <a:pPr>
-              <a:spcAft>
-                <a:spcPts val="800"/>
-              </a:spcAft>
-              <a:defRPr sz="1800">
-                <a:solidFill>
-                  <a:srgbClr val="333333"/>
-                </a:solidFill>
-                <a:latin typeface="Calibri"/>
-              </a:defRPr>
-            </a:pPr>
-            <a:r>
-              <a:t>Türkiye ulusal sismik kataloglarının tamlık eşiği:</a:t>
-            </a:r>
-          </a:p>
-          <a:p>
-            <a:pPr lvl="1">
-              <a:spcAft>
-                <a:spcPts val="800"/>
-              </a:spcAft>
-              <a:defRPr sz="1600">
-                <a:solidFill>
-                  <a:srgbClr val="666666"/>
-                </a:solidFill>
-                <a:latin typeface="Calibri"/>
-              </a:defRPr>
-            </a:pPr>
-            <a:r>
-              <a:t>Mc ≈ 2.7  (Tan, 2021)</a:t>
-            </a:r>
-          </a:p>
-          <a:p>
-            <a:pPr>
-              <a:spcAft>
-                <a:spcPts val="800"/>
-              </a:spcAft>
-              <a:defRPr sz="1800">
-                <a:solidFill>
-                  <a:srgbClr val="333333"/>
-                </a:solidFill>
-                <a:latin typeface="Calibri"/>
-              </a:defRPr>
-            </a:pPr>
-          </a:p>
-          <a:p>
-            <a:pPr>
-              <a:spcAft>
-                <a:spcPts val="800"/>
-              </a:spcAft>
-              <a:defRPr sz="1800">
-                <a:solidFill>
-                  <a:srgbClr val="333333"/>
-                </a:solidFill>
-                <a:latin typeface="Calibri"/>
-              </a:defRPr>
-            </a:pPr>
-            <a:r>
-              <a:t>Bu eşiğin altındaki mikro-sismik olaylar mevcut rutin</a:t>
-            </a:r>
-          </a:p>
-          <a:p>
-            <a:pPr>
-              <a:spcAft>
-                <a:spcPts val="800"/>
-              </a:spcAft>
-              <a:defRPr sz="1800">
-                <a:solidFill>
-                  <a:srgbClr val="333333"/>
-                </a:solidFill>
-                <a:latin typeface="Calibri"/>
-              </a:defRPr>
-            </a:pPr>
-            <a:r>
-              <a:t>kayıt altyapısına büyük ölçüde yansımamaktadır.</a:t>
-            </a:r>
-          </a:p>
-          <a:p>
-            <a:pPr>
-              <a:spcAft>
-                <a:spcPts val="800"/>
-              </a:spcAft>
-              <a:defRPr sz="1800">
-                <a:solidFill>
-                  <a:srgbClr val="333333"/>
-                </a:solidFill>
-                <a:latin typeface="Calibri"/>
-              </a:defRPr>
-            </a:pPr>
-          </a:p>
-          <a:p>
-            <a:pPr>
-              <a:spcAft>
-                <a:spcPts val="800"/>
-              </a:spcAft>
-              <a:defRPr sz="1800">
-                <a:solidFill>
-                  <a:srgbClr val="333333"/>
-                </a:solidFill>
-                <a:latin typeface="Calibri"/>
-              </a:defRPr>
-            </a:pPr>
-            <a:r>
-              <a:t>Bilimsel değer:</a:t>
-            </a:r>
-          </a:p>
-          <a:p>
-            <a:pPr lvl="1">
-              <a:spcAft>
-                <a:spcPts val="800"/>
-              </a:spcAft>
-              <a:defRPr sz="1600">
-                <a:solidFill>
-                  <a:srgbClr val="666666"/>
-                </a:solidFill>
-                <a:latin typeface="Calibri"/>
-              </a:defRPr>
-            </a:pPr>
-            <a:r>
-              <a:t>Fay geometrisinin yüksek çözünürlüklü haritalanması</a:t>
-            </a:r>
-          </a:p>
-          <a:p>
-            <a:pPr lvl="1">
-              <a:spcAft>
-                <a:spcPts val="800"/>
-              </a:spcAft>
-              <a:defRPr sz="1600">
-                <a:solidFill>
-                  <a:srgbClr val="666666"/>
-                </a:solidFill>
-                <a:latin typeface="Calibri"/>
-              </a:defRPr>
-            </a:pPr>
-            <a:r>
-              <a:t>Bölgesel stres dağılımının belirlenmesi</a:t>
-            </a:r>
-          </a:p>
-          <a:p>
-            <a:pPr>
-              <a:spcAft>
-                <a:spcPts val="800"/>
-              </a:spcAft>
-              <a:defRPr sz="1800">
-                <a:solidFill>
-                  <a:srgbClr val="333333"/>
-                </a:solidFill>
-                <a:latin typeface="Calibri"/>
-              </a:defRPr>
-            </a:pPr>
-          </a:p>
-          <a:p>
-            <a:pPr>
-              <a:spcAft>
-                <a:spcPts val="800"/>
-              </a:spcAft>
-              <a:defRPr sz="1800">
-                <a:solidFill>
-                  <a:srgbClr val="333333"/>
-                </a:solidFill>
-                <a:latin typeface="Calibri"/>
-              </a:defRPr>
-            </a:pPr>
-            <a:r>
-              <a:t>Önemli not: Bu olayların deprem öngörüsüyle</a:t>
-            </a:r>
-          </a:p>
-          <a:p>
-            <a:pPr>
-              <a:spcAft>
-                <a:spcPts val="800"/>
-              </a:spcAft>
-              <a:defRPr sz="1800">
-                <a:solidFill>
-                  <a:srgbClr val="333333"/>
-                </a:solidFill>
-                <a:latin typeface="Calibri"/>
-              </a:defRPr>
-            </a:pPr>
-            <a:r>
-              <a:t>doğrudan bir ilişkisi YOKTUR.</a:t>
-            </a:r>
-          </a:p>
-        </p:txBody>
-      </p:sp>
-      <p:sp>
-        <p:nvSpPr>
-          <p:cNvPr id="4" name="TextBox 3"/>
+            <a:pPr algn="l">
+              <a:defRPr sz="2600" b="1" i="0">
+                <a:solidFill>
+                  <a:srgbClr val="FFFFFF"/>
+                </a:solidFill>
+                <a:latin typeface="Calibri Light"/>
+              </a:defRPr>
+            </a:pPr>
+            <a:r>
+              <a:t>Problem: Sismik Veri Boşluğu</a:t>
+            </a:r>
+          </a:p>
+        </p:txBody>
+      </p:sp>
+      <p:sp>
+        <p:nvSpPr>
+          <p:cNvPr id="5" name="TextBox 4"/>
           <p:cNvSpPr txBox="1"/>
           <p:nvPr/>
         </p:nvSpPr>
         <p:spPr>
           <a:xfrm>
-            <a:off x="457200" y="6217920"/>
+            <a:off x="548640" y="731520"/>
             <a:ext cx="8229600" cy="365760"/>
           </a:xfrm>
           <a:prstGeom prst="rect">
@@ -3944,21 +3607,265 @@
           <a:noFill/>
         </p:spPr>
         <p:txBody>
-          <a:bodyPr wrap="none">
+          <a:bodyPr wrap="square" anchor="t">
             <a:spAutoFit/>
           </a:bodyPr>
           <a:lstStyle/>
           <a:p>
-            <a:pPr>
-              <a:defRPr sz="1000" i="1">
-                <a:solidFill>
-                  <a:srgbClr val="666666"/>
-                </a:solidFill>
-                <a:latin typeface="Calibri"/>
-              </a:defRPr>
-            </a:pPr>
-            <a:r>
-              <a:t>Kaynak: Tan, O. (2021). Natural Hazards and Earth System Sciences, 21(7), 2059–2073.</a:t>
+            <a:pPr algn="l">
+              <a:defRPr sz="1300" b="0" i="1">
+                <a:solidFill>
+                  <a:srgbClr val="B4C3D7"/>
+                </a:solidFill>
+                <a:latin typeface="Calibri"/>
+              </a:defRPr>
+            </a:pPr>
+            <a:r>
+              <a:t>Türkiye'nin M&lt;2.0 mikro-sismik olayları neden görünmez?</a:t>
+            </a:r>
+          </a:p>
+        </p:txBody>
+      </p:sp>
+      <p:sp>
+        <p:nvSpPr>
+          <p:cNvPr id="6" name="TextBox 5"/>
+          <p:cNvSpPr txBox="1"/>
+          <p:nvPr/>
+        </p:nvSpPr>
+        <p:spPr>
+          <a:xfrm>
+            <a:off x="548640" y="1371600"/>
+            <a:ext cx="8046720" cy="5029200"/>
+          </a:xfrm>
+          <a:prstGeom prst="rect">
+            <a:avLst/>
+          </a:prstGeom>
+          <a:noFill/>
+        </p:spPr>
+        <p:txBody>
+          <a:bodyPr wrap="square">
+            <a:spAutoFit/>
+          </a:bodyPr>
+          <a:lstStyle/>
+          <a:p>
+            <a:pPr>
+              <a:spcBef>
+                <a:spcPts val="0"/>
+              </a:spcBef>
+              <a:spcAft>
+                <a:spcPts val="600"/>
+              </a:spcAft>
+              <a:defRPr sz="1800" b="1" i="0">
+                <a:solidFill>
+                  <a:srgbClr val="002855"/>
+                </a:solidFill>
+                <a:latin typeface="Calibri"/>
+              </a:defRPr>
+            </a:pPr>
+            <a:r>
+              <a:t>Katalog Tamlık Eşiği</a:t>
+            </a:r>
+          </a:p>
+          <a:p>
+            <a:pPr>
+              <a:spcAft>
+                <a:spcPts val="600"/>
+              </a:spcAft>
+              <a:defRPr sz="1500">
+                <a:solidFill>
+                  <a:srgbClr val="23232D"/>
+                </a:solidFill>
+                <a:latin typeface="Calibri"/>
+              </a:defRPr>
+            </a:pPr>
+            <a:r>
+              <a:t>Türkiye ulusal sismik katalogları: Mc ≈ 2.7 (Tan, 2021)</a:t>
+            </a:r>
+          </a:p>
+          <a:p>
+            <a:pPr>
+              <a:spcAft>
+                <a:spcPts val="600"/>
+              </a:spcAft>
+              <a:defRPr sz="1500">
+                <a:solidFill>
+                  <a:srgbClr val="23232D"/>
+                </a:solidFill>
+                <a:latin typeface="Calibri"/>
+              </a:defRPr>
+            </a:pPr>
+            <a:r>
+              <a:t>M &lt; 2.0 olaylar rutin kayıt altyapısına yansımıyor</a:t>
+            </a:r>
+          </a:p>
+          <a:p>
+            <a:pPr>
+              <a:spcAft>
+                <a:spcPts val="600"/>
+              </a:spcAft>
+              <a:defRPr sz="800"/>
+            </a:pPr>
+          </a:p>
+          <a:p>
+            <a:pPr>
+              <a:spcBef>
+                <a:spcPts val="0"/>
+              </a:spcBef>
+              <a:spcAft>
+                <a:spcPts val="600"/>
+              </a:spcAft>
+              <a:defRPr sz="1800" b="1" i="0">
+                <a:solidFill>
+                  <a:srgbClr val="B43232"/>
+                </a:solidFill>
+                <a:latin typeface="Calibri"/>
+              </a:defRPr>
+            </a:pPr>
+            <a:r>
+              <a:t>Bizim Gerçekliğimiz: Veri Kıtlığı</a:t>
+            </a:r>
+          </a:p>
+          <a:p>
+            <a:pPr>
+              <a:spcAft>
+                <a:spcPts val="600"/>
+              </a:spcAft>
+              <a:defRPr sz="1500">
+                <a:solidFill>
+                  <a:srgbClr val="23232D"/>
+                </a:solidFill>
+                <a:latin typeface="Calibri"/>
+              </a:defRPr>
+            </a:pPr>
+            <a:r>
+              <a:t>Sadece ~80 bağımsız deprem olayı (2 istasyon)</a:t>
+            </a:r>
+          </a:p>
+          <a:p>
+            <a:pPr>
+              <a:spcAft>
+                <a:spcPts val="600"/>
+              </a:spcAft>
+              <a:defRPr sz="1500">
+                <a:solidFill>
+                  <a:srgbClr val="23232D"/>
+                </a:solidFill>
+                <a:latin typeface="Calibri"/>
+              </a:defRPr>
+            </a:pPr>
+            <a:r>
+              <a:t>Klasik derin öğrenme (binlerce etiketli örnek gerektirir) burada çöker</a:t>
+            </a:r>
+          </a:p>
+          <a:p>
+            <a:pPr>
+              <a:spcAft>
+                <a:spcPts val="600"/>
+              </a:spcAft>
+              <a:defRPr sz="800"/>
+            </a:pPr>
+          </a:p>
+          <a:p>
+            <a:pPr>
+              <a:spcBef>
+                <a:spcPts val="0"/>
+              </a:spcBef>
+              <a:spcAft>
+                <a:spcPts val="600"/>
+              </a:spcAft>
+              <a:defRPr sz="1800" b="1" i="0">
+                <a:solidFill>
+                  <a:srgbClr val="B43232"/>
+                </a:solidFill>
+                <a:latin typeface="Calibri"/>
+              </a:defRPr>
+            </a:pPr>
+            <a:r>
+              <a:t>Keşfettiğimiz Ek Sorun: İstasyon Kimlik Sızıntısı</a:t>
+            </a:r>
+          </a:p>
+          <a:p>
+            <a:pPr>
+              <a:spcAft>
+                <a:spcPts val="600"/>
+              </a:spcAft>
+              <a:defRPr sz="1500">
+                <a:solidFill>
+                  <a:srgbClr val="23232D"/>
+                </a:solidFill>
+                <a:latin typeface="Calibri"/>
+              </a:defRPr>
+            </a:pPr>
+            <a:r>
+              <a:t>GPD modeli hangi istasyonun kaydettiğini %84.8 doğrulukla tahmin ediyor</a:t>
+            </a:r>
+          </a:p>
+          <a:p>
+            <a:pPr>
+              <a:spcAft>
+                <a:spcPts val="600"/>
+              </a:spcAft>
+              <a:defRPr sz="1500">
+                <a:solidFill>
+                  <a:srgbClr val="23232D"/>
+                </a:solidFill>
+                <a:latin typeface="Calibri"/>
+              </a:defRPr>
+            </a:pPr>
+            <a:r>
+              <a:t>Aynı deprem, iki farklı istasyonda %30.7 farklı sınıflandırma alıyor</a:t>
+            </a:r>
+          </a:p>
+          <a:p>
+            <a:pPr>
+              <a:spcAft>
+                <a:spcPts val="600"/>
+              </a:spcAft>
+              <a:defRPr sz="1500">
+                <a:solidFill>
+                  <a:srgbClr val="23232D"/>
+                </a:solidFill>
+                <a:latin typeface="Calibri"/>
+              </a:defRPr>
+            </a:pPr>
+            <a:r>
+              <a:t>Bu, SeisBench makalelerinde belgelenmemiş bir gerçek-dünya sorunu</a:t>
+            </a:r>
+          </a:p>
+        </p:txBody>
+      </p:sp>
+      <p:sp>
+        <p:nvSpPr>
+          <p:cNvPr id="7" name="TextBox 6"/>
+          <p:cNvSpPr txBox="1"/>
+          <p:nvPr/>
+        </p:nvSpPr>
+        <p:spPr>
+          <a:xfrm>
+            <a:off x="457200" y="6400800"/>
+            <a:ext cx="8229600" cy="274320"/>
+          </a:xfrm>
+          <a:prstGeom prst="rect">
+            <a:avLst/>
+          </a:prstGeom>
+          <a:noFill/>
+        </p:spPr>
+        <p:txBody>
+          <a:bodyPr wrap="square" anchor="t">
+            <a:spAutoFit/>
+          </a:bodyPr>
+          <a:lstStyle/>
+          <a:p>
+            <a:pPr algn="l">
+              <a:defRPr sz="900" b="0" i="1">
+                <a:solidFill>
+                  <a:srgbClr val="5A5F69"/>
+                </a:solidFill>
+                <a:latin typeface="Calibri"/>
+              </a:defRPr>
+            </a:pPr>
+            <a:r>
+              <a:t>Bilimsel değer: Fay geometrisi haritalama. NOT: Deprem öngörüsüyle doğrudan ilişki YOKTUR.</a:t>
             </a:r>
           </a:p>
         </p:txBody>
@@ -3977,7 +3884,7 @@
     <p:bg>
       <p:bgPr>
         <a:solidFill>
-          <a:srgbClr val="FFFFFF"/>
+          <a:srgbClr val="F8FAFC"/>
         </a:solidFill>
         <a:effectLst/>
       </p:bgPr>
@@ -3998,13 +3905,13 @@
         <p:spPr>
           <a:xfrm>
             <a:off x="0" y="0"/>
-            <a:ext cx="9144000" cy="1097280"/>
+            <a:ext cx="9144000" cy="1188720"/>
           </a:xfrm>
           <a:prstGeom prst="rect">
             <a:avLst/>
           </a:prstGeom>
           <a:solidFill>
-            <a:srgbClr val="003366"/>
+            <a:srgbClr val="002855"/>
           </a:solidFill>
           <a:ln>
             <a:noFill/>
@@ -4025,44 +3932,32 @@
           </a:fontRef>
         </p:style>
         <p:txBody>
-          <a:bodyPr rtlCol="0" anchor="ctr" wrap="square" lIns="457200"/>
-          <a:lstStyle/>
-          <a:p>
-            <a:pPr algn="l">
-              <a:defRPr sz="2800" b="1">
-                <a:solidFill>
-                  <a:srgbClr val="FFFFFF"/>
-                </a:solidFill>
-                <a:latin typeface="Calibri"/>
-              </a:defRPr>
-            </a:pPr>
-            <a:r>
-              <a:t>Önerilen Sistem Mimarisi: İki Katmanlı Yapı</a:t>
-            </a:r>
-          </a:p>
-        </p:txBody>
-      </p:sp>
-      <p:sp>
-        <p:nvSpPr>
-          <p:cNvPr id="3" name="Rounded Rectangle 2"/>
+          <a:bodyPr rtlCol="0" anchor="ctr"/>
+          <a:lstStyle/>
+          <a:p>
+            <a:pPr algn="ctr"/>
+          </a:p>
+        </p:txBody>
+      </p:sp>
+      <p:sp>
+        <p:nvSpPr>
+          <p:cNvPr id="3" name="Rectangle 2"/>
           <p:cNvSpPr/>
           <p:nvPr/>
         </p:nvSpPr>
         <p:spPr>
           <a:xfrm>
-            <a:off x="457200" y="1645920"/>
-            <a:ext cx="3931920" cy="4114800"/>
-          </a:xfrm>
-          <a:prstGeom prst="roundRect">
+            <a:off x="0" y="1188720"/>
+            <a:ext cx="9144000" cy="54864"/>
+          </a:xfrm>
+          <a:prstGeom prst="rect">
             <a:avLst/>
           </a:prstGeom>
           <a:solidFill>
-            <a:srgbClr val="E6F0FA"/>
+            <a:srgbClr val="C39B2D"/>
           </a:solidFill>
-          <a:ln w="19050">
-            <a:solidFill>
-              <a:srgbClr val="0066B2"/>
-            </a:solidFill>
+          <a:ln>
+            <a:noFill/>
           </a:ln>
         </p:spPr>
         <p:style>
@@ -4080,139 +3975,105 @@
           </a:fontRef>
         </p:style>
         <p:txBody>
-          <a:bodyPr rtlCol="0" anchor="ctr" wrap="square" lIns="182880" tIns="182880"/>
-          <a:lstStyle/>
-          <a:p>
-            <a:pPr algn="ctr">
-              <a:defRPr sz="1400" b="1">
-                <a:solidFill>
-                  <a:srgbClr val="0066B2"/>
-                </a:solidFill>
-                <a:latin typeface="Calibri"/>
-              </a:defRPr>
-            </a:pPr>
-            <a:r>
-              <a:t>KATMAN 1</a:t>
-            </a:r>
-          </a:p>
-          <a:p>
-            <a:pPr>
-              <a:spcAft>
-                <a:spcPts val="1200"/>
-              </a:spcAft>
-              <a:defRPr sz="1600" b="1">
-                <a:solidFill>
-                  <a:srgbClr val="003366"/>
-                </a:solidFill>
-                <a:latin typeface="Calibri"/>
-              </a:defRPr>
-            </a:pPr>
-            <a:r>
-              <a:t>Derin Öğrenme Tespit Katmanı</a:t>
-            </a:r>
-          </a:p>
-          <a:p>
-            <a:pPr>
-              <a:spcAft>
-                <a:spcPts val="400"/>
-              </a:spcAft>
-              <a:defRPr sz="1300">
-                <a:solidFill>
-                  <a:srgbClr val="333333"/>
-                </a:solidFill>
-                <a:latin typeface="Calibri"/>
-              </a:defRPr>
-            </a:pPr>
-            <a:r>
-              <a:t>• KOERI dalga formu verileri</a:t>
-            </a:r>
-          </a:p>
-          <a:p>
-            <a:pPr>
-              <a:spcAft>
-                <a:spcPts val="400"/>
-              </a:spcAft>
-              <a:defRPr sz="1300">
-                <a:solidFill>
-                  <a:srgbClr val="333333"/>
-                </a:solidFill>
-                <a:latin typeface="Calibri"/>
-              </a:defRPr>
-            </a:pPr>
-            <a:r>
-              <a:t>• SeisBench çerçevesi</a:t>
-            </a:r>
-          </a:p>
-          <a:p>
-            <a:pPr>
-              <a:spcAft>
-                <a:spcPts val="400"/>
-              </a:spcAft>
-              <a:defRPr sz="1300">
-                <a:solidFill>
-                  <a:srgbClr val="333333"/>
-                </a:solidFill>
-                <a:latin typeface="Calibri"/>
-              </a:defRPr>
-            </a:pPr>
-            <a:r>
-              <a:t>• PhaseNet • EQTransformer • GPD</a:t>
-            </a:r>
-          </a:p>
-          <a:p>
-            <a:pPr>
-              <a:spcAft>
-                <a:spcPts val="400"/>
-              </a:spcAft>
-              <a:defRPr sz="1300">
-                <a:solidFill>
-                  <a:srgbClr val="333333"/>
-                </a:solidFill>
-                <a:latin typeface="Calibri"/>
-              </a:defRPr>
-            </a:pPr>
-            <a:r>
-              <a:t>• Türkiye verisine ince-ayar</a:t>
-            </a:r>
-          </a:p>
-          <a:p>
-            <a:pPr>
-              <a:spcAft>
-                <a:spcPts val="400"/>
-              </a:spcAft>
-              <a:defRPr sz="1300">
-                <a:solidFill>
-                  <a:srgbClr val="333333"/>
-                </a:solidFill>
-                <a:latin typeface="Calibri"/>
-              </a:defRPr>
-            </a:pPr>
-            <a:r>
-              <a:t>• M&lt;2.0 recall + faz belirleme</a:t>
-            </a:r>
-          </a:p>
-        </p:txBody>
-      </p:sp>
-      <p:sp>
-        <p:nvSpPr>
-          <p:cNvPr id="4" name="Rounded Rectangle 3"/>
+          <a:bodyPr rtlCol="0" anchor="ctr"/>
+          <a:lstStyle/>
+          <a:p>
+            <a:pPr algn="ctr"/>
+          </a:p>
+        </p:txBody>
+      </p:sp>
+      <p:sp>
+        <p:nvSpPr>
+          <p:cNvPr id="4" name="TextBox 3"/>
+          <p:cNvSpPr txBox="1"/>
+          <p:nvPr/>
+        </p:nvSpPr>
+        <p:spPr>
+          <a:xfrm>
+            <a:off x="548640" y="137160"/>
+            <a:ext cx="8229600" cy="731520"/>
+          </a:xfrm>
+          <a:prstGeom prst="rect">
+            <a:avLst/>
+          </a:prstGeom>
+          <a:noFill/>
+        </p:spPr>
+        <p:txBody>
+          <a:bodyPr wrap="square" anchor="t">
+            <a:spAutoFit/>
+          </a:bodyPr>
+          <a:lstStyle/>
+          <a:p>
+            <a:pPr algn="l">
+              <a:defRPr sz="2600" b="1" i="0">
+                <a:solidFill>
+                  <a:srgbClr val="FFFFFF"/>
+                </a:solidFill>
+                <a:latin typeface="Calibri Light"/>
+              </a:defRPr>
+            </a:pPr>
+            <a:r>
+              <a:t>Mühendislik Dönüşümü</a:t>
+            </a:r>
+          </a:p>
+        </p:txBody>
+      </p:sp>
+      <p:sp>
+        <p:nvSpPr>
+          <p:cNvPr id="5" name="TextBox 4"/>
+          <p:cNvSpPr txBox="1"/>
+          <p:nvPr/>
+        </p:nvSpPr>
+        <p:spPr>
+          <a:xfrm>
+            <a:off x="548640" y="731520"/>
+            <a:ext cx="8229600" cy="365760"/>
+          </a:xfrm>
+          <a:prstGeom prst="rect">
+            <a:avLst/>
+          </a:prstGeom>
+          <a:noFill/>
+        </p:spPr>
+        <p:txBody>
+          <a:bodyPr wrap="square" anchor="t">
+            <a:spAutoFit/>
+          </a:bodyPr>
+          <a:lstStyle/>
+          <a:p>
+            <a:pPr algn="l">
+              <a:defRPr sz="1300" b="0" i="1">
+                <a:solidFill>
+                  <a:srgbClr val="B4C3D7"/>
+                </a:solidFill>
+                <a:latin typeface="Calibri"/>
+              </a:defRPr>
+            </a:pPr>
+            <a:r>
+              <a:t>Naif plan çöktü → Daha güçlü bir mimari doğdu</a:t>
+            </a:r>
+          </a:p>
+        </p:txBody>
+      </p:sp>
+      <p:sp>
+        <p:nvSpPr>
+          <p:cNvPr id="6" name="Rounded Rectangle 5"/>
           <p:cNvSpPr/>
           <p:nvPr/>
         </p:nvSpPr>
         <p:spPr>
           <a:xfrm>
-            <a:off x="4754880" y="1645920"/>
-            <a:ext cx="3931920" cy="4114800"/>
+            <a:off x="365760" y="1463040"/>
+            <a:ext cx="4023360" cy="4754880"/>
           </a:xfrm>
           <a:prstGeom prst="roundRect">
             <a:avLst/>
           </a:prstGeom>
           <a:solidFill>
-            <a:srgbClr val="FAF5E6"/>
+            <a:srgbClr val="FFF0F0"/>
           </a:solidFill>
           <a:ln w="19050">
             <a:solidFill>
-              <a:srgbClr val="B48C32"/>
+              <a:srgbClr val="B43232"/>
             </a:solidFill>
           </a:ln>
         </p:spPr>
@@ -4231,138 +4092,155 @@
           </a:fontRef>
         </p:style>
         <p:txBody>
-          <a:bodyPr rtlCol="0" anchor="ctr" wrap="square" lIns="182880" tIns="182880"/>
+          <a:bodyPr rtlCol="0" anchor="ctr" wrap="square" lIns="182880" tIns="137160"/>
           <a:lstStyle/>
           <a:p>
             <a:pPr algn="ctr">
               <a:defRPr sz="1400" b="1">
                 <a:solidFill>
-                  <a:srgbClr val="B48C32"/>
-                </a:solidFill>
-                <a:latin typeface="Calibri"/>
-              </a:defRPr>
-            </a:pPr>
-            <a:r>
-              <a:t>KATMAN 2</a:t>
-            </a:r>
-          </a:p>
-          <a:p>
-            <a:pPr>
-              <a:spcAft>
-                <a:spcPts val="1200"/>
-              </a:spcAft>
-              <a:defRPr sz="1600" b="1">
-                <a:solidFill>
-                  <a:srgbClr val="003366"/>
-                </a:solidFill>
-                <a:latin typeface="Calibri"/>
-              </a:defRPr>
-            </a:pPr>
-            <a:r>
-              <a:t>LLM Karar Destek Katmanı</a:t>
-            </a:r>
-          </a:p>
-          <a:p>
-            <a:pPr>
-              <a:spcAft>
-                <a:spcPts val="400"/>
-              </a:spcAft>
-              <a:defRPr sz="1300">
-                <a:solidFill>
-                  <a:srgbClr val="333333"/>
-                </a:solidFill>
-                <a:latin typeface="Calibri"/>
-              </a:defRPr>
-            </a:pPr>
-            <a:r>
-              <a:t>• Olay meta-verileri (konum, M, derinlik)</a:t>
-            </a:r>
-          </a:p>
-          <a:p>
-            <a:pPr>
-              <a:spcAft>
-                <a:spcPts val="400"/>
-              </a:spcAft>
-              <a:defRPr sz="1300">
-                <a:solidFill>
-                  <a:srgbClr val="333333"/>
-                </a:solidFill>
-                <a:latin typeface="Calibri"/>
-              </a:defRPr>
-            </a:pPr>
-            <a:r>
-              <a:t>• TBDY-2018 hükümleri</a:t>
-            </a:r>
-          </a:p>
-          <a:p>
-            <a:pPr>
-              <a:spcAft>
-                <a:spcPts val="400"/>
-              </a:spcAft>
-              <a:defRPr sz="1300">
-                <a:solidFill>
-                  <a:srgbClr val="333333"/>
-                </a:solidFill>
-                <a:latin typeface="Calibri"/>
-              </a:defRPr>
-            </a:pPr>
-            <a:r>
-              <a:t>• Zemin sınıfı bilgileri</a:t>
-            </a:r>
-          </a:p>
-          <a:p>
-            <a:pPr>
-              <a:spcAft>
-                <a:spcPts val="400"/>
-              </a:spcAft>
-              <a:defRPr sz="1300">
-                <a:solidFill>
-                  <a:srgbClr val="333333"/>
-                </a:solidFill>
-                <a:latin typeface="Calibri"/>
-              </a:defRPr>
-            </a:pPr>
-            <a:r>
-              <a:t>• RAG mimarisi</a:t>
-            </a:r>
-          </a:p>
-          <a:p>
-            <a:pPr>
-              <a:spcAft>
-                <a:spcPts val="400"/>
-              </a:spcAft>
-              <a:defRPr sz="1300">
-                <a:solidFill>
-                  <a:srgbClr val="333333"/>
-                </a:solidFill>
-                <a:latin typeface="Calibri"/>
-              </a:defRPr>
-            </a:pPr>
-            <a:r>
-              <a:t>• Yönetmelik-duyarlı raporlama</a:t>
-            </a:r>
-          </a:p>
-        </p:txBody>
-      </p:sp>
-      <p:sp>
-        <p:nvSpPr>
-          <p:cNvPr id="5" name="Right Arrow 4"/>
+                  <a:srgbClr val="B43232"/>
+                </a:solidFill>
+                <a:latin typeface="Calibri"/>
+              </a:defRPr>
+            </a:pPr>
+            <a:r>
+              <a:t>BAŞARISIZ OLAN PLAN</a:t>
+            </a:r>
+          </a:p>
+          <a:p>
+            <a:pPr>
+              <a:defRPr sz="600" b="0">
+                <a:solidFill>
+                  <a:srgbClr val="23232D"/>
+                </a:solidFill>
+                <a:latin typeface="Calibri"/>
+              </a:defRPr>
+            </a:pPr>
+          </a:p>
+          <a:p>
+            <a:pPr>
+              <a:defRPr sz="1400" b="0">
+                <a:solidFill>
+                  <a:srgbClr val="23232D"/>
+                </a:solidFill>
+                <a:latin typeface="Calibri"/>
+              </a:defRPr>
+            </a:pPr>
+            <a:r>
+              <a:t>"3 modeli ince-ayar yap, karşılaştır"</a:t>
+            </a:r>
+          </a:p>
+          <a:p>
+            <a:pPr>
+              <a:defRPr sz="600" b="0">
+                <a:solidFill>
+                  <a:srgbClr val="23232D"/>
+                </a:solidFill>
+                <a:latin typeface="Calibri"/>
+              </a:defRPr>
+            </a:pPr>
+          </a:p>
+          <a:p>
+            <a:pPr>
+              <a:defRPr sz="1300" b="1">
+                <a:solidFill>
+                  <a:srgbClr val="23232D"/>
+                </a:solidFill>
+                <a:latin typeface="Calibri"/>
+              </a:defRPr>
+            </a:pPr>
+            <a:r>
+              <a:t>Neden çöktü:</a:t>
+            </a:r>
+          </a:p>
+          <a:p>
+            <a:pPr>
+              <a:defRPr sz="1300" b="0">
+                <a:solidFill>
+                  <a:srgbClr val="5A5F69"/>
+                </a:solidFill>
+                <a:latin typeface="Calibri"/>
+              </a:defRPr>
+            </a:pPr>
+            <a:r>
+              <a:t>• 80 olay ile ince-ayar imkansız</a:t>
+            </a:r>
+          </a:p>
+          <a:p>
+            <a:pPr>
+              <a:defRPr sz="1300" b="0">
+                <a:solidFill>
+                  <a:srgbClr val="5A5F69"/>
+                </a:solidFill>
+                <a:latin typeface="Calibri"/>
+              </a:defRPr>
+            </a:pPr>
+            <a:r>
+              <a:t>• EQTransformer binlerce etiket gerektirir</a:t>
+            </a:r>
+          </a:p>
+          <a:p>
+            <a:pPr>
+              <a:defRPr sz="1300" b="0">
+                <a:solidFill>
+                  <a:srgbClr val="5A5F69"/>
+                </a:solidFill>
+                <a:latin typeface="Calibri"/>
+              </a:defRPr>
+            </a:pPr>
+            <a:r>
+              <a:t>• İstasyon bias tüm modelleri bozuyor</a:t>
+            </a:r>
+          </a:p>
+          <a:p>
+            <a:pPr>
+              <a:defRPr sz="1300" b="0">
+                <a:solidFill>
+                  <a:srgbClr val="5A5F69"/>
+                </a:solidFill>
+                <a:latin typeface="Calibri"/>
+              </a:defRPr>
+            </a:pPr>
+            <a:r>
+              <a:t>• GPD faz belirleyici değil, pencere</a:t>
+            </a:r>
+          </a:p>
+          <a:p>
+            <a:pPr>
+              <a:defRPr sz="1300" b="0">
+                <a:solidFill>
+                  <a:srgbClr val="5A5F69"/>
+                </a:solidFill>
+                <a:latin typeface="Calibri"/>
+              </a:defRPr>
+            </a:pPr>
+            <a:r>
+              <a:t>  sınıflandırıcısı (mimari kısıt)</a:t>
+            </a:r>
+          </a:p>
+        </p:txBody>
+      </p:sp>
+      <p:sp>
+        <p:nvSpPr>
+          <p:cNvPr id="7" name="Rounded Rectangle 6"/>
           <p:cNvSpPr/>
           <p:nvPr/>
         </p:nvSpPr>
         <p:spPr>
           <a:xfrm>
-            <a:off x="4160520" y="3474720"/>
-            <a:ext cx="731520" cy="457200"/>
-          </a:xfrm>
-          <a:prstGeom prst="rightArrow">
+            <a:off x="4754880" y="1463040"/>
+            <a:ext cx="4023360" cy="4754880"/>
+          </a:xfrm>
+          <a:prstGeom prst="roundRect">
             <a:avLst/>
           </a:prstGeom>
           <a:solidFill>
-            <a:srgbClr val="666666"/>
+            <a:srgbClr val="EBFAF0"/>
           </a:solidFill>
-          <a:ln>
-            <a:noFill/>
+          <a:ln w="19050">
+            <a:solidFill>
+              <a:srgbClr val="288C50"/>
+            </a:solidFill>
           </a:ln>
         </p:spPr>
         <p:style>
@@ -4380,6 +4258,170 @@
           </a:fontRef>
         </p:style>
         <p:txBody>
+          <a:bodyPr rtlCol="0" anchor="ctr" wrap="square" lIns="182880" tIns="137160"/>
+          <a:lstStyle/>
+          <a:p>
+            <a:pPr algn="ctr">
+              <a:defRPr sz="1400" b="1">
+                <a:solidFill>
+                  <a:srgbClr val="288C50"/>
+                </a:solidFill>
+                <a:latin typeface="Calibri"/>
+              </a:defRPr>
+            </a:pPr>
+            <a:r>
+              <a:t>MÜHENDİSLİK ÇÖZÜMÜ</a:t>
+            </a:r>
+          </a:p>
+          <a:p>
+            <a:pPr>
+              <a:defRPr sz="600" b="0">
+                <a:solidFill>
+                  <a:srgbClr val="23232D"/>
+                </a:solidFill>
+                <a:latin typeface="Calibri"/>
+              </a:defRPr>
+            </a:pPr>
+          </a:p>
+          <a:p>
+            <a:pPr>
+              <a:defRPr sz="1400" b="0">
+                <a:solidFill>
+                  <a:srgbClr val="23232D"/>
+                </a:solidFill>
+                <a:latin typeface="Calibri"/>
+              </a:defRPr>
+            </a:pPr>
+            <a:r>
+              <a:t>Hibrit Mimari (GPD + SVM)</a:t>
+            </a:r>
+          </a:p>
+          <a:p>
+            <a:pPr>
+              <a:defRPr sz="600" b="0">
+                <a:solidFill>
+                  <a:srgbClr val="23232D"/>
+                </a:solidFill>
+                <a:latin typeface="Calibri"/>
+              </a:defRPr>
+            </a:pPr>
+          </a:p>
+          <a:p>
+            <a:pPr>
+              <a:defRPr sz="1300" b="1">
+                <a:solidFill>
+                  <a:srgbClr val="23232D"/>
+                </a:solidFill>
+                <a:latin typeface="Calibri"/>
+              </a:defRPr>
+            </a:pPr>
+            <a:r>
+              <a:t>Neden işe yaradı:</a:t>
+            </a:r>
+          </a:p>
+          <a:p>
+            <a:pPr>
+              <a:defRPr sz="1300" b="0">
+                <a:solidFill>
+                  <a:srgbClr val="5A5F69"/>
+                </a:solidFill>
+                <a:latin typeface="Calibri"/>
+              </a:defRPr>
+            </a:pPr>
+            <a:r>
+              <a:t>• GPD'nin öğrenilmiş özelliklerini çıkar</a:t>
+            </a:r>
+          </a:p>
+          <a:p>
+            <a:pPr>
+              <a:defRPr sz="1300" b="0">
+                <a:solidFill>
+                  <a:srgbClr val="5A5F69"/>
+                </a:solidFill>
+                <a:latin typeface="Calibri"/>
+              </a:defRPr>
+            </a:pPr>
+            <a:r>
+              <a:t>• İstasyon bazlı Z-skoru normalizasyonu</a:t>
+            </a:r>
+          </a:p>
+          <a:p>
+            <a:pPr>
+              <a:defRPr sz="1300" b="0">
+                <a:solidFill>
+                  <a:srgbClr val="5A5F69"/>
+                </a:solidFill>
+                <a:latin typeface="Calibri"/>
+              </a:defRPr>
+            </a:pPr>
+            <a:r>
+              <a:t>  ile bias'ı istatistiksel olarak sıyır</a:t>
+            </a:r>
+          </a:p>
+          <a:p>
+            <a:pPr>
+              <a:defRPr sz="1300" b="0">
+                <a:solidFill>
+                  <a:srgbClr val="5A5F69"/>
+                </a:solidFill>
+                <a:latin typeface="Calibri"/>
+              </a:defRPr>
+            </a:pPr>
+            <a:r>
+              <a:t>• Az veriyle çalışan SVM sınıflandırıcı</a:t>
+            </a:r>
+          </a:p>
+          <a:p>
+            <a:pPr>
+              <a:defRPr sz="1300" b="0">
+                <a:solidFill>
+                  <a:srgbClr val="5A5F69"/>
+                </a:solidFill>
+                <a:latin typeface="Calibri"/>
+              </a:defRPr>
+            </a:pPr>
+            <a:r>
+              <a:t>• Kaskad PhaseNet ile faz belirleme</a:t>
+            </a:r>
+          </a:p>
+        </p:txBody>
+      </p:sp>
+      <p:sp>
+        <p:nvSpPr>
+          <p:cNvPr id="8" name="Right Arrow 7"/>
+          <p:cNvSpPr/>
+          <p:nvPr/>
+        </p:nvSpPr>
+        <p:spPr>
+          <a:xfrm>
+            <a:off x="4114800" y="3566160"/>
+            <a:ext cx="731520" cy="457200"/>
+          </a:xfrm>
+          <a:prstGeom prst="rightArrow">
+            <a:avLst/>
+          </a:prstGeom>
+          <a:solidFill>
+            <a:srgbClr val="002855"/>
+          </a:solidFill>
+          <a:ln>
+            <a:noFill/>
+          </a:ln>
+        </p:spPr>
+        <p:style>
+          <a:lnRef idx="1">
+            <a:schemeClr val="accent1"/>
+          </a:lnRef>
+          <a:fillRef idx="3">
+            <a:schemeClr val="accent1"/>
+          </a:fillRef>
+          <a:effectRef idx="2">
+            <a:schemeClr val="accent1"/>
+          </a:effectRef>
+          <a:fontRef idx="minor">
+            <a:schemeClr val="lt1"/>
+          </a:fontRef>
+        </p:style>
+        <p:txBody>
           <a:bodyPr rtlCol="0" anchor="ctr"/>
           <a:lstStyle/>
           <a:p>
@@ -4389,14 +4431,14 @@
       </p:sp>
       <p:sp>
         <p:nvSpPr>
-          <p:cNvPr id="6" name="TextBox 5"/>
+          <p:cNvPr id="9" name="TextBox 8"/>
           <p:cNvSpPr txBox="1"/>
           <p:nvPr/>
         </p:nvSpPr>
         <p:spPr>
           <a:xfrm>
-            <a:off x="457200" y="6217920"/>
-            <a:ext cx="8229600" cy="365760"/>
+            <a:off x="457200" y="6400800"/>
+            <a:ext cx="8229600" cy="274320"/>
           </a:xfrm>
           <a:prstGeom prst="rect">
             <a:avLst/>
@@ -4404,21 +4446,21 @@
           <a:noFill/>
         </p:spPr>
         <p:txBody>
-          <a:bodyPr wrap="none">
+          <a:bodyPr wrap="square" anchor="t">
             <a:spAutoFit/>
           </a:bodyPr>
           <a:lstStyle/>
           <a:p>
-            <a:pPr>
-              <a:defRPr sz="1000" i="1">
-                <a:solidFill>
-                  <a:srgbClr val="666666"/>
-                </a:solidFill>
-                <a:latin typeface="Calibri"/>
-              </a:defRPr>
-            </a:pPr>
-            <a:r>
-              <a:t>Özgün katkı: Bu iki katmanı tek pipeline içinde birleştiren ilk entegre mimari önerisi (Türkiye bağlamında)</a:t>
+            <a:pPr algn="l">
+              <a:defRPr sz="900" b="0" i="1">
+                <a:solidFill>
+                  <a:srgbClr val="5A5F69"/>
+                </a:solidFill>
+                <a:latin typeface="Calibri"/>
+              </a:defRPr>
+            </a:pPr>
+            <a:r>
+              <a:t>"Başarısızlıklar makaledir" — problemler çözülmüş olarak belgelenmiştir.</a:t>
             </a:r>
           </a:p>
         </p:txBody>
@@ -4437,7 +4479,7 @@
     <p:bg>
       <p:bgPr>
         <a:solidFill>
-          <a:srgbClr val="FFFFFF"/>
+          <a:srgbClr val="F8FAFC"/>
         </a:solidFill>
         <a:effectLst/>
       </p:bgPr>
@@ -4458,13 +4500,13 @@
         <p:spPr>
           <a:xfrm>
             <a:off x="0" y="0"/>
-            <a:ext cx="9144000" cy="1097280"/>
+            <a:ext cx="9144000" cy="1188720"/>
           </a:xfrm>
           <a:prstGeom prst="rect">
             <a:avLst/>
           </a:prstGeom>
           <a:solidFill>
-            <a:srgbClr val="003366"/>
+            <a:srgbClr val="002855"/>
           </a:solidFill>
           <a:ln>
             <a:noFill/>
@@ -4485,33 +4527,66 @@
           </a:fontRef>
         </p:style>
         <p:txBody>
-          <a:bodyPr rtlCol="0" anchor="ctr" wrap="square" lIns="457200"/>
-          <a:lstStyle/>
-          <a:p>
-            <a:pPr algn="l">
-              <a:defRPr sz="2800" b="1">
-                <a:solidFill>
-                  <a:srgbClr val="FFFFFF"/>
-                </a:solidFill>
-                <a:latin typeface="Calibri"/>
-              </a:defRPr>
-            </a:pPr>
-            <a:r>
-              <a:t>Katman 1: Derin Öğrenme Modelleri</a:t>
-            </a:r>
-          </a:p>
-        </p:txBody>
-      </p:sp>
-      <p:sp>
-        <p:nvSpPr>
-          <p:cNvPr id="3" name="TextBox 2"/>
+          <a:bodyPr rtlCol="0" anchor="ctr"/>
+          <a:lstStyle/>
+          <a:p>
+            <a:pPr algn="ctr"/>
+          </a:p>
+        </p:txBody>
+      </p:sp>
+      <p:sp>
+        <p:nvSpPr>
+          <p:cNvPr id="3" name="Rectangle 2"/>
+          <p:cNvSpPr/>
+          <p:nvPr/>
+        </p:nvSpPr>
+        <p:spPr>
+          <a:xfrm>
+            <a:off x="0" y="1188720"/>
+            <a:ext cx="9144000" cy="54864"/>
+          </a:xfrm>
+          <a:prstGeom prst="rect">
+            <a:avLst/>
+          </a:prstGeom>
+          <a:solidFill>
+            <a:srgbClr val="C39B2D"/>
+          </a:solidFill>
+          <a:ln>
+            <a:noFill/>
+          </a:ln>
+        </p:spPr>
+        <p:style>
+          <a:lnRef idx="1">
+            <a:schemeClr val="accent1"/>
+          </a:lnRef>
+          <a:fillRef idx="3">
+            <a:schemeClr val="accent1"/>
+          </a:fillRef>
+          <a:effectRef idx="2">
+            <a:schemeClr val="accent1"/>
+          </a:effectRef>
+          <a:fontRef idx="minor">
+            <a:schemeClr val="lt1"/>
+          </a:fontRef>
+        </p:style>
+        <p:txBody>
+          <a:bodyPr rtlCol="0" anchor="ctr"/>
+          <a:lstStyle/>
+          <a:p>
+            <a:pPr algn="ctr"/>
+          </a:p>
+        </p:txBody>
+      </p:sp>
+      <p:sp>
+        <p:nvSpPr>
+          <p:cNvPr id="4" name="TextBox 3"/>
           <p:cNvSpPr txBox="1"/>
           <p:nvPr/>
         </p:nvSpPr>
         <p:spPr>
           <a:xfrm>
-            <a:off x="457200" y="1371600"/>
-            <a:ext cx="8229600" cy="4572000"/>
+            <a:off x="548640" y="137160"/>
+            <a:ext cx="8229600" cy="731520"/>
           </a:xfrm>
           <a:prstGeom prst="rect">
             <a:avLst/>
@@ -4519,207 +4594,34 @@
           <a:noFill/>
         </p:spPr>
         <p:txBody>
-          <a:bodyPr wrap="square">
+          <a:bodyPr wrap="square" anchor="t">
             <a:spAutoFit/>
           </a:bodyPr>
           <a:lstStyle/>
           <a:p>
-            <a:pPr>
-              <a:spcAft>
-                <a:spcPts val="800"/>
-              </a:spcAft>
-              <a:defRPr sz="1800">
-                <a:solidFill>
-                  <a:srgbClr val="333333"/>
-                </a:solidFill>
-                <a:latin typeface="Calibri"/>
-              </a:defRPr>
-            </a:pPr>
-            <a:r>
-              <a:t>Kullanılacak modeller (SeisBench üzerinden):</a:t>
-            </a:r>
-          </a:p>
-          <a:p>
-            <a:pPr>
-              <a:spcAft>
-                <a:spcPts val="800"/>
-              </a:spcAft>
-              <a:defRPr sz="1800">
-                <a:solidFill>
-                  <a:srgbClr val="333333"/>
-                </a:solidFill>
-                <a:latin typeface="Calibri"/>
-              </a:defRPr>
-            </a:pPr>
-          </a:p>
-          <a:p>
-            <a:pPr lvl="1">
-              <a:spcAft>
-                <a:spcPts val="800"/>
-              </a:spcAft>
-              <a:defRPr sz="1600">
-                <a:solidFill>
-                  <a:srgbClr val="666666"/>
-                </a:solidFill>
-                <a:latin typeface="Calibri"/>
-              </a:defRPr>
-            </a:pPr>
-            <a:r>
-              <a:t>GPD (Ross vd., 2018)</a:t>
-            </a:r>
-          </a:p>
-          <a:p>
-            <a:pPr lvl="2">
-              <a:spcAft>
-                <a:spcPts val="800"/>
-              </a:spcAft>
-              <a:defRPr sz="1600">
-                <a:solidFill>
-                  <a:srgbClr val="666666"/>
-                </a:solidFill>
-                <a:latin typeface="Calibri"/>
-              </a:defRPr>
-            </a:pPr>
-            <a:r>
-              <a:t>Genelleştirilmiş sismik faz tespiti</a:t>
-            </a:r>
-          </a:p>
-          <a:p>
-            <a:pPr lvl="1">
-              <a:spcAft>
-                <a:spcPts val="800"/>
-              </a:spcAft>
-              <a:defRPr sz="1600">
-                <a:solidFill>
-                  <a:srgbClr val="666666"/>
-                </a:solidFill>
-                <a:latin typeface="Calibri"/>
-              </a:defRPr>
-            </a:pPr>
-            <a:r>
-              <a:t>PhaseNet (Zhu &amp; Beroza, 2019)</a:t>
-            </a:r>
-          </a:p>
-          <a:p>
-            <a:pPr lvl="2">
-              <a:spcAft>
-                <a:spcPts val="800"/>
-              </a:spcAft>
-              <a:defRPr sz="1600">
-                <a:solidFill>
-                  <a:srgbClr val="666666"/>
-                </a:solidFill>
-                <a:latin typeface="Calibri"/>
-              </a:defRPr>
-            </a:pPr>
-            <a:r>
-              <a:t>P ve S fazlarının varış zamanlarının otomatik belirlenmesi</a:t>
-            </a:r>
-          </a:p>
-          <a:p>
-            <a:pPr lvl="1">
-              <a:spcAft>
-                <a:spcPts val="800"/>
-              </a:spcAft>
-              <a:defRPr sz="1600">
-                <a:solidFill>
-                  <a:srgbClr val="666666"/>
-                </a:solidFill>
-                <a:latin typeface="Calibri"/>
-              </a:defRPr>
-            </a:pPr>
-            <a:r>
-              <a:t>EQTransformer (Mousavi vd., 2020)</a:t>
-            </a:r>
-          </a:p>
-          <a:p>
-            <a:pPr lvl="2">
-              <a:spcAft>
-                <a:spcPts val="800"/>
-              </a:spcAft>
-              <a:defRPr sz="1600">
-                <a:solidFill>
-                  <a:srgbClr val="666666"/>
-                </a:solidFill>
-                <a:latin typeface="Calibri"/>
-              </a:defRPr>
-            </a:pPr>
-            <a:r>
-              <a:t>Eş zamanlı deprem tespiti ve faz belirleme (dikkat mekanizmalı)</a:t>
-            </a:r>
-          </a:p>
-          <a:p>
-            <a:pPr>
-              <a:spcAft>
-                <a:spcPts val="800"/>
-              </a:spcAft>
-              <a:defRPr sz="1800">
-                <a:solidFill>
-                  <a:srgbClr val="333333"/>
-                </a:solidFill>
-                <a:latin typeface="Calibri"/>
-              </a:defRPr>
-            </a:pPr>
-          </a:p>
-          <a:p>
-            <a:pPr>
-              <a:spcAft>
-                <a:spcPts val="800"/>
-              </a:spcAft>
-              <a:defRPr sz="1800">
-                <a:solidFill>
-                  <a:srgbClr val="333333"/>
-                </a:solidFill>
-                <a:latin typeface="Calibri"/>
-              </a:defRPr>
-            </a:pPr>
-            <a:r>
-              <a:t>Yöntem:</a:t>
-            </a:r>
-          </a:p>
-          <a:p>
-            <a:pPr lvl="1">
-              <a:spcAft>
-                <a:spcPts val="800"/>
-              </a:spcAft>
-              <a:defRPr sz="1600">
-                <a:solidFill>
-                  <a:srgbClr val="666666"/>
-                </a:solidFill>
-                <a:latin typeface="Calibri"/>
-              </a:defRPr>
-            </a:pPr>
-            <a:r>
-              <a:t>Her üç model Türkiye verisine özgü ince-ayar ile eğitilecektir</a:t>
-            </a:r>
-          </a:p>
-          <a:p>
-            <a:pPr lvl="1">
-              <a:spcAft>
-                <a:spcPts val="800"/>
-              </a:spcAft>
-              <a:defRPr sz="1600">
-                <a:solidFill>
-                  <a:srgbClr val="666666"/>
-                </a:solidFill>
-                <a:latin typeface="Calibri"/>
-              </a:defRPr>
-            </a:pPr>
-            <a:r>
-              <a:t>Performansları aynı değerlendirme çerçevesinde karşılaştırılacaktır</a:t>
-            </a:r>
-          </a:p>
-        </p:txBody>
-      </p:sp>
-      <p:sp>
-        <p:nvSpPr>
-          <p:cNvPr id="4" name="TextBox 3"/>
+            <a:pPr algn="l">
+              <a:defRPr sz="2600" b="1" i="0">
+                <a:solidFill>
+                  <a:srgbClr val="FFFFFF"/>
+                </a:solidFill>
+                <a:latin typeface="Calibri Light"/>
+              </a:defRPr>
+            </a:pPr>
+            <a:r>
+              <a:t>Katman 1: Hibrit Tespit Mimarisi</a:t>
+            </a:r>
+          </a:p>
+        </p:txBody>
+      </p:sp>
+      <p:sp>
+        <p:nvSpPr>
+          <p:cNvPr id="5" name="TextBox 4"/>
           <p:cNvSpPr txBox="1"/>
           <p:nvPr/>
         </p:nvSpPr>
         <p:spPr>
           <a:xfrm>
-            <a:off x="457200" y="6217920"/>
+            <a:off x="548640" y="731520"/>
             <a:ext cx="8229600" cy="365760"/>
           </a:xfrm>
           <a:prstGeom prst="rect">
@@ -4728,21 +4630,490 @@
           <a:noFill/>
         </p:spPr>
         <p:txBody>
-          <a:bodyPr wrap="none">
+          <a:bodyPr wrap="square" anchor="t">
             <a:spAutoFit/>
           </a:bodyPr>
           <a:lstStyle/>
           <a:p>
-            <a:pPr>
-              <a:defRPr sz="1000" i="1">
-                <a:solidFill>
-                  <a:srgbClr val="666666"/>
-                </a:solidFill>
-                <a:latin typeface="Calibri"/>
-              </a:defRPr>
-            </a:pPr>
-            <a:r>
-              <a:t>Framework: Woollam vd. (2022). SeisBench—A toolbox for ML in seismology. Seis. Res. Lett., 93(3)</a:t>
+            <a:pPr algn="l">
+              <a:defRPr sz="1300" b="0" i="1">
+                <a:solidFill>
+                  <a:srgbClr val="B4C3D7"/>
+                </a:solidFill>
+                <a:latin typeface="Calibri"/>
+              </a:defRPr>
+            </a:pPr>
+            <a:r>
+              <a:t>GPD özellikleri → Z-skoru normalizasyonu → PCA → SVM (RBF)</a:t>
+            </a:r>
+          </a:p>
+        </p:txBody>
+      </p:sp>
+      <p:sp>
+        <p:nvSpPr>
+          <p:cNvPr id="6" name="TextBox 5"/>
+          <p:cNvSpPr txBox="1"/>
+          <p:nvPr/>
+        </p:nvSpPr>
+        <p:spPr>
+          <a:xfrm>
+            <a:off x="548640" y="1371600"/>
+            <a:ext cx="5303520" cy="5029200"/>
+          </a:xfrm>
+          <a:prstGeom prst="rect">
+            <a:avLst/>
+          </a:prstGeom>
+          <a:noFill/>
+        </p:spPr>
+        <p:txBody>
+          <a:bodyPr wrap="square">
+            <a:spAutoFit/>
+          </a:bodyPr>
+          <a:lstStyle/>
+          <a:p>
+            <a:pPr>
+              <a:spcBef>
+                <a:spcPts val="0"/>
+              </a:spcBef>
+              <a:spcAft>
+                <a:spcPts val="600"/>
+              </a:spcAft>
+              <a:defRPr sz="1600" b="1" i="0">
+                <a:solidFill>
+                  <a:srgbClr val="002855"/>
+                </a:solidFill>
+                <a:latin typeface="Calibri"/>
+              </a:defRPr>
+            </a:pPr>
+            <a:r>
+              <a:t>Pipeline Akışı:</a:t>
+            </a:r>
+          </a:p>
+          <a:p>
+            <a:pPr>
+              <a:spcAft>
+                <a:spcPts val="600"/>
+              </a:spcAft>
+              <a:defRPr sz="1400">
+                <a:solidFill>
+                  <a:srgbClr val="23232D"/>
+                </a:solidFill>
+                <a:latin typeface="Calibri"/>
+              </a:defRPr>
+            </a:pPr>
+            <a:r>
+              <a:t>Ham Dalga Formu (3-bileşen, 100 Hz, 60s pencere)</a:t>
+            </a:r>
+          </a:p>
+          <a:p>
+            <a:pPr>
+              <a:spcAft>
+                <a:spcPts val="600"/>
+              </a:spcAft>
+              <a:defRPr sz="1400">
+                <a:solidFill>
+                  <a:srgbClr val="23232D"/>
+                </a:solidFill>
+                <a:latin typeface="Calibri"/>
+              </a:defRPr>
+            </a:pPr>
+            <a:r>
+              <a:t>  → GPD Dondurulmuş Katmanlar → 200-boyutlu latent temsil</a:t>
+            </a:r>
+          </a:p>
+          <a:p>
+            <a:pPr>
+              <a:spcAft>
+                <a:spcPts val="600"/>
+              </a:spcAft>
+              <a:defRPr sz="1400">
+                <a:solidFill>
+                  <a:srgbClr val="23232D"/>
+                </a:solidFill>
+                <a:latin typeface="Calibri"/>
+              </a:defRPr>
+            </a:pPr>
+            <a:r>
+              <a:t>  → İstasyon Bazlı Z-Skoru Normalizasyonu (bias eliminasyonu)</a:t>
+            </a:r>
+          </a:p>
+          <a:p>
+            <a:pPr>
+              <a:spcAft>
+                <a:spcPts val="600"/>
+              </a:spcAft>
+              <a:defRPr sz="1400">
+                <a:solidFill>
+                  <a:srgbClr val="23232D"/>
+                </a:solidFill>
+                <a:latin typeface="Calibri"/>
+              </a:defRPr>
+            </a:pPr>
+            <a:r>
+              <a:t>  → PCA (75 bileşen, %95.6 varyans açıklanır)</a:t>
+            </a:r>
+          </a:p>
+          <a:p>
+            <a:pPr>
+              <a:spcAft>
+                <a:spcPts val="600"/>
+              </a:spcAft>
+              <a:defRPr sz="1400">
+                <a:solidFill>
+                  <a:srgbClr val="23232D"/>
+                </a:solidFill>
+                <a:latin typeface="Calibri"/>
+              </a:defRPr>
+            </a:pPr>
+            <a:r>
+              <a:t>  → SVM (RBF çekirdeği, C=20)</a:t>
+            </a:r>
+          </a:p>
+          <a:p>
+            <a:pPr>
+              <a:spcAft>
+                <a:spcPts val="600"/>
+              </a:spcAft>
+              <a:defRPr sz="1400">
+                <a:solidFill>
+                  <a:srgbClr val="23232D"/>
+                </a:solidFill>
+                <a:latin typeface="Calibri"/>
+              </a:defRPr>
+            </a:pPr>
+            <a:r>
+              <a:t>  → Olay / Gürültü kararı</a:t>
+            </a:r>
+          </a:p>
+          <a:p>
+            <a:pPr>
+              <a:spcAft>
+                <a:spcPts val="600"/>
+              </a:spcAft>
+              <a:defRPr sz="800"/>
+            </a:pPr>
+          </a:p>
+          <a:p>
+            <a:pPr>
+              <a:spcBef>
+                <a:spcPts val="0"/>
+              </a:spcBef>
+              <a:spcAft>
+                <a:spcPts val="600"/>
+              </a:spcAft>
+              <a:defRPr sz="1600" b="1" i="0">
+                <a:solidFill>
+                  <a:srgbClr val="002855"/>
+                </a:solidFill>
+                <a:latin typeface="Calibri"/>
+              </a:defRPr>
+            </a:pPr>
+            <a:r>
+              <a:t>Neden bu mimari?</a:t>
+            </a:r>
+          </a:p>
+          <a:p>
+            <a:pPr>
+              <a:spcAft>
+                <a:spcPts val="600"/>
+              </a:spcAft>
+              <a:defRPr sz="1400">
+                <a:solidFill>
+                  <a:srgbClr val="23232D"/>
+                </a:solidFill>
+                <a:latin typeface="Calibri"/>
+              </a:defRPr>
+            </a:pPr>
+            <a:r>
+              <a:t>• GPD'nin konvolüsyon katmanları zaten sismik paternleri öğrenmiş</a:t>
+            </a:r>
+          </a:p>
+          <a:p>
+            <a:pPr>
+              <a:spcAft>
+                <a:spcPts val="600"/>
+              </a:spcAft>
+              <a:defRPr sz="1400">
+                <a:solidFill>
+                  <a:srgbClr val="23232D"/>
+                </a:solidFill>
+                <a:latin typeface="Calibri"/>
+              </a:defRPr>
+            </a:pPr>
+            <a:r>
+              <a:t>• Ama üst katmanlar istasyon kimliğini de kodluyor (%84.8)</a:t>
+            </a:r>
+          </a:p>
+          <a:p>
+            <a:pPr>
+              <a:spcAft>
+                <a:spcPts val="600"/>
+              </a:spcAft>
+              <a:defRPr sz="1400">
+                <a:solidFill>
+                  <a:srgbClr val="23232D"/>
+                </a:solidFill>
+                <a:latin typeface="Calibri"/>
+              </a:defRPr>
+            </a:pPr>
+            <a:r>
+              <a:t>• Z-skoru bu bias'ı istatistiksel olarak temizliyor</a:t>
+            </a:r>
+          </a:p>
+          <a:p>
+            <a:pPr>
+              <a:spcAft>
+                <a:spcPts val="600"/>
+              </a:spcAft>
+              <a:defRPr sz="1400">
+                <a:solidFill>
+                  <a:srgbClr val="23232D"/>
+                </a:solidFill>
+                <a:latin typeface="Calibri"/>
+              </a:defRPr>
+            </a:pPr>
+            <a:r>
+              <a:t>• SVM sadece 80 örnekle bile etkili (kernel trick)</a:t>
+            </a:r>
+          </a:p>
+        </p:txBody>
+      </p:sp>
+      <p:sp>
+        <p:nvSpPr>
+          <p:cNvPr id="7" name="Rounded Rectangle 6"/>
+          <p:cNvSpPr/>
+          <p:nvPr/>
+        </p:nvSpPr>
+        <p:spPr>
+          <a:xfrm>
+            <a:off x="6400800" y="1645920"/>
+            <a:ext cx="2377440" cy="1280160"/>
+          </a:xfrm>
+          <a:prstGeom prst="roundRect">
+            <a:avLst/>
+          </a:prstGeom>
+          <a:solidFill>
+            <a:srgbClr val="0F1E37"/>
+          </a:solidFill>
+          <a:ln w="19050">
+            <a:solidFill>
+              <a:srgbClr val="C39B2D"/>
+            </a:solidFill>
+          </a:ln>
+        </p:spPr>
+        <p:style>
+          <a:lnRef idx="1">
+            <a:schemeClr val="accent1"/>
+          </a:lnRef>
+          <a:fillRef idx="3">
+            <a:schemeClr val="accent1"/>
+          </a:fillRef>
+          <a:effectRef idx="2">
+            <a:schemeClr val="accent1"/>
+          </a:effectRef>
+          <a:fontRef idx="minor">
+            <a:schemeClr val="lt1"/>
+          </a:fontRef>
+        </p:style>
+        <p:txBody>
+          <a:bodyPr rtlCol="0" anchor="ctr" lIns="137160"/>
+          <a:lstStyle/>
+          <a:p>
+            <a:pPr algn="ctr">
+              <a:defRPr sz="2800" b="1">
+                <a:solidFill>
+                  <a:srgbClr val="C39B2D"/>
+                </a:solidFill>
+                <a:latin typeface="Calibri Light"/>
+              </a:defRPr>
+            </a:pPr>
+            <a:r>
+              <a:t>98.3%</a:t>
+            </a:r>
+          </a:p>
+          <a:p>
+            <a:pPr algn="ctr">
+              <a:defRPr sz="1100">
+                <a:solidFill>
+                  <a:srgbClr val="C8CDD7"/>
+                </a:solidFill>
+                <a:latin typeface="Calibri"/>
+              </a:defRPr>
+            </a:pPr>
+            <a:r>
+              <a:t>Gürültü Reddi (TNR)</a:t>
+            </a:r>
+          </a:p>
+        </p:txBody>
+      </p:sp>
+      <p:sp>
+        <p:nvSpPr>
+          <p:cNvPr id="8" name="Rounded Rectangle 7"/>
+          <p:cNvSpPr/>
+          <p:nvPr/>
+        </p:nvSpPr>
+        <p:spPr>
+          <a:xfrm>
+            <a:off x="6400800" y="3200400"/>
+            <a:ext cx="2377440" cy="1280160"/>
+          </a:xfrm>
+          <a:prstGeom prst="roundRect">
+            <a:avLst/>
+          </a:prstGeom>
+          <a:solidFill>
+            <a:srgbClr val="0F1E37"/>
+          </a:solidFill>
+          <a:ln w="19050">
+            <a:solidFill>
+              <a:srgbClr val="C39B2D"/>
+            </a:solidFill>
+          </a:ln>
+        </p:spPr>
+        <p:style>
+          <a:lnRef idx="1">
+            <a:schemeClr val="accent1"/>
+          </a:lnRef>
+          <a:fillRef idx="3">
+            <a:schemeClr val="accent1"/>
+          </a:fillRef>
+          <a:effectRef idx="2">
+            <a:schemeClr val="accent1"/>
+          </a:effectRef>
+          <a:fontRef idx="minor">
+            <a:schemeClr val="lt1"/>
+          </a:fontRef>
+        </p:style>
+        <p:txBody>
+          <a:bodyPr rtlCol="0" anchor="ctr" lIns="137160"/>
+          <a:lstStyle/>
+          <a:p>
+            <a:pPr algn="ctr">
+              <a:defRPr sz="2800" b="1">
+                <a:solidFill>
+                  <a:srgbClr val="C39B2D"/>
+                </a:solidFill>
+                <a:latin typeface="Calibri Light"/>
+              </a:defRPr>
+            </a:pPr>
+            <a:r>
+              <a:t>58.6%</a:t>
+            </a:r>
+          </a:p>
+          <a:p>
+            <a:pPr algn="ctr">
+              <a:defRPr sz="1100">
+                <a:solidFill>
+                  <a:srgbClr val="C8CDD7"/>
+                </a:solidFill>
+                <a:latin typeface="Calibri"/>
+              </a:defRPr>
+            </a:pPr>
+            <a:r>
+              <a:t>M&lt;2.0 Recall</a:t>
+            </a:r>
+          </a:p>
+        </p:txBody>
+      </p:sp>
+      <p:sp>
+        <p:nvSpPr>
+          <p:cNvPr id="9" name="Rounded Rectangle 8"/>
+          <p:cNvSpPr/>
+          <p:nvPr/>
+        </p:nvSpPr>
+        <p:spPr>
+          <a:xfrm>
+            <a:off x="6400800" y="4754880"/>
+            <a:ext cx="2377440" cy="1280160"/>
+          </a:xfrm>
+          <a:prstGeom prst="roundRect">
+            <a:avLst/>
+          </a:prstGeom>
+          <a:solidFill>
+            <a:srgbClr val="0F1E37"/>
+          </a:solidFill>
+          <a:ln w="19050">
+            <a:solidFill>
+              <a:srgbClr val="C39B2D"/>
+            </a:solidFill>
+          </a:ln>
+        </p:spPr>
+        <p:style>
+          <a:lnRef idx="1">
+            <a:schemeClr val="accent1"/>
+          </a:lnRef>
+          <a:fillRef idx="3">
+            <a:schemeClr val="accent1"/>
+          </a:fillRef>
+          <a:effectRef idx="2">
+            <a:schemeClr val="accent1"/>
+          </a:effectRef>
+          <a:fontRef idx="minor">
+            <a:schemeClr val="lt1"/>
+          </a:fontRef>
+        </p:style>
+        <p:txBody>
+          <a:bodyPr rtlCol="0" anchor="ctr" lIns="137160"/>
+          <a:lstStyle/>
+          <a:p>
+            <a:pPr algn="ctr">
+              <a:defRPr sz="2800" b="1">
+                <a:solidFill>
+                  <a:srgbClr val="C39B2D"/>
+                </a:solidFill>
+                <a:latin typeface="Calibri Light"/>
+              </a:defRPr>
+            </a:pPr>
+            <a:r>
+              <a:t>~80</a:t>
+            </a:r>
+          </a:p>
+          <a:p>
+            <a:pPr algn="ctr">
+              <a:defRPr sz="1100">
+                <a:solidFill>
+                  <a:srgbClr val="C8CDD7"/>
+                </a:solidFill>
+                <a:latin typeface="Calibri"/>
+              </a:defRPr>
+            </a:pPr>
+            <a:r>
+              <a:t>Eğitim Olayı</a:t>
+            </a:r>
+          </a:p>
+        </p:txBody>
+      </p:sp>
+      <p:sp>
+        <p:nvSpPr>
+          <p:cNvPr id="10" name="TextBox 9"/>
+          <p:cNvSpPr txBox="1"/>
+          <p:nvPr/>
+        </p:nvSpPr>
+        <p:spPr>
+          <a:xfrm>
+            <a:off x="457200" y="6400800"/>
+            <a:ext cx="8229600" cy="274320"/>
+          </a:xfrm>
+          <a:prstGeom prst="rect">
+            <a:avLst/>
+          </a:prstGeom>
+          <a:noFill/>
+        </p:spPr>
+        <p:txBody>
+          <a:bodyPr wrap="square" anchor="t">
+            <a:spAutoFit/>
+          </a:bodyPr>
+          <a:lstStyle/>
+          <a:p>
+            <a:pPr algn="l">
+              <a:defRPr sz="900" b="0" i="1">
+                <a:solidFill>
+                  <a:srgbClr val="5A5F69"/>
+                </a:solidFill>
+                <a:latin typeface="Calibri"/>
+              </a:defRPr>
+            </a:pPr>
+            <a:r>
+              <a:t>Metrikler: artifacts/evaluation_metrics.json — bağımsız doğrulama seti üzerinde</a:t>
             </a:r>
           </a:p>
         </p:txBody>
@@ -4761,7 +5132,7 @@
     <p:bg>
       <p:bgPr>
         <a:solidFill>
-          <a:srgbClr val="FFFFFF"/>
+          <a:srgbClr val="F8FAFC"/>
         </a:solidFill>
         <a:effectLst/>
       </p:bgPr>
@@ -4782,13 +5153,13 @@
         <p:spPr>
           <a:xfrm>
             <a:off x="0" y="0"/>
-            <a:ext cx="9144000" cy="1097280"/>
+            <a:ext cx="9144000" cy="1188720"/>
           </a:xfrm>
           <a:prstGeom prst="rect">
             <a:avLst/>
           </a:prstGeom>
           <a:solidFill>
-            <a:srgbClr val="003366"/>
+            <a:srgbClr val="002855"/>
           </a:solidFill>
           <a:ln>
             <a:noFill/>
@@ -4809,33 +5180,66 @@
           </a:fontRef>
         </p:style>
         <p:txBody>
-          <a:bodyPr rtlCol="0" anchor="ctr" wrap="square" lIns="457200"/>
-          <a:lstStyle/>
-          <a:p>
-            <a:pPr algn="l">
-              <a:defRPr sz="2800" b="1">
-                <a:solidFill>
-                  <a:srgbClr val="FFFFFF"/>
-                </a:solidFill>
-                <a:latin typeface="Calibri"/>
-              </a:defRPr>
-            </a:pPr>
-            <a:r>
-              <a:t>Veri Seti: 2023 Kahramanmaraş Artçı Sarsıntı Dizisi</a:t>
-            </a:r>
-          </a:p>
-        </p:txBody>
-      </p:sp>
-      <p:sp>
-        <p:nvSpPr>
-          <p:cNvPr id="3" name="TextBox 2"/>
+          <a:bodyPr rtlCol="0" anchor="ctr"/>
+          <a:lstStyle/>
+          <a:p>
+            <a:pPr algn="ctr"/>
+          </a:p>
+        </p:txBody>
+      </p:sp>
+      <p:sp>
+        <p:nvSpPr>
+          <p:cNvPr id="3" name="Rectangle 2"/>
+          <p:cNvSpPr/>
+          <p:nvPr/>
+        </p:nvSpPr>
+        <p:spPr>
+          <a:xfrm>
+            <a:off x="0" y="1188720"/>
+            <a:ext cx="9144000" cy="54864"/>
+          </a:xfrm>
+          <a:prstGeom prst="rect">
+            <a:avLst/>
+          </a:prstGeom>
+          <a:solidFill>
+            <a:srgbClr val="C39B2D"/>
+          </a:solidFill>
+          <a:ln>
+            <a:noFill/>
+          </a:ln>
+        </p:spPr>
+        <p:style>
+          <a:lnRef idx="1">
+            <a:schemeClr val="accent1"/>
+          </a:lnRef>
+          <a:fillRef idx="3">
+            <a:schemeClr val="accent1"/>
+          </a:fillRef>
+          <a:effectRef idx="2">
+            <a:schemeClr val="accent1"/>
+          </a:effectRef>
+          <a:fontRef idx="minor">
+            <a:schemeClr val="lt1"/>
+          </a:fontRef>
+        </p:style>
+        <p:txBody>
+          <a:bodyPr rtlCol="0" anchor="ctr"/>
+          <a:lstStyle/>
+          <a:p>
+            <a:pPr algn="ctr"/>
+          </a:p>
+        </p:txBody>
+      </p:sp>
+      <p:sp>
+        <p:nvSpPr>
+          <p:cNvPr id="4" name="TextBox 3"/>
           <p:cNvSpPr txBox="1"/>
           <p:nvPr/>
         </p:nvSpPr>
         <p:spPr>
           <a:xfrm>
-            <a:off x="457200" y="1371600"/>
-            <a:ext cx="8229600" cy="4572000"/>
+            <a:off x="548640" y="137160"/>
+            <a:ext cx="8229600" cy="731520"/>
           </a:xfrm>
           <a:prstGeom prst="rect">
             <a:avLst/>
@@ -4843,191 +5247,34 @@
           <a:noFill/>
         </p:spPr>
         <p:txBody>
-          <a:bodyPr wrap="square">
+          <a:bodyPr wrap="square" anchor="t">
             <a:spAutoFit/>
           </a:bodyPr>
           <a:lstStyle/>
           <a:p>
-            <a:pPr>
-              <a:spcAft>
-                <a:spcPts val="800"/>
-              </a:spcAft>
-              <a:defRPr sz="1800">
-                <a:solidFill>
-                  <a:srgbClr val="333333"/>
-                </a:solidFill>
-                <a:latin typeface="Calibri"/>
-              </a:defRPr>
-            </a:pPr>
-            <a:r>
-              <a:t>Veri kaynağı: KOERI sismik ağı (Cambaz vd., 2021)</a:t>
-            </a:r>
-          </a:p>
-          <a:p>
-            <a:pPr>
-              <a:spcAft>
-                <a:spcPts val="800"/>
-              </a:spcAft>
-              <a:defRPr sz="1800">
-                <a:solidFill>
-                  <a:srgbClr val="333333"/>
-                </a:solidFill>
-                <a:latin typeface="Calibri"/>
-              </a:defRPr>
-            </a:pPr>
-          </a:p>
-          <a:p>
-            <a:pPr>
-              <a:spcAft>
-                <a:spcPts val="800"/>
-              </a:spcAft>
-              <a:defRPr sz="1800">
-                <a:solidFill>
-                  <a:srgbClr val="333333"/>
-                </a:solidFill>
-                <a:latin typeface="Calibri"/>
-              </a:defRPr>
-            </a:pPr>
-            <a:r>
-              <a:t>Neden bu veri seti?</a:t>
-            </a:r>
-          </a:p>
-          <a:p>
-            <a:pPr lvl="1">
-              <a:spcAft>
-                <a:spcPts val="800"/>
-              </a:spcAft>
-              <a:defRPr sz="1600">
-                <a:solidFill>
-                  <a:srgbClr val="666666"/>
-                </a:solidFill>
-                <a:latin typeface="Calibri"/>
-              </a:defRPr>
-            </a:pPr>
-            <a:r>
-              <a:t>Veri zenginliği: Yoğun artçı sarsıntı aktivitesi</a:t>
-            </a:r>
-          </a:p>
-          <a:p>
-            <a:pPr lvl="1">
-              <a:spcAft>
-                <a:spcPts val="800"/>
-              </a:spcAft>
-              <a:defRPr sz="1600">
-                <a:solidFill>
-                  <a:srgbClr val="666666"/>
-                </a:solidFill>
-                <a:latin typeface="Calibri"/>
-              </a:defRPr>
-            </a:pPr>
-            <a:r>
-              <a:t>Güncellik: 2023 yılı verileri</a:t>
-            </a:r>
-          </a:p>
-          <a:p>
-            <a:pPr lvl="1">
-              <a:spcAft>
-                <a:spcPts val="800"/>
-              </a:spcAft>
-              <a:defRPr sz="1600">
-                <a:solidFill>
-                  <a:srgbClr val="666666"/>
-                </a:solidFill>
-                <a:latin typeface="Calibri"/>
-              </a:defRPr>
-            </a:pPr>
-            <a:r>
-              <a:t>Geniş magnıtüd aralığı: M&lt;1.0 — M&gt;5.0</a:t>
-            </a:r>
-          </a:p>
-          <a:p>
-            <a:pPr>
-              <a:spcAft>
-                <a:spcPts val="800"/>
-              </a:spcAft>
-              <a:defRPr sz="1800">
-                <a:solidFill>
-                  <a:srgbClr val="333333"/>
-                </a:solidFill>
-                <a:latin typeface="Calibri"/>
-              </a:defRPr>
-            </a:pPr>
-          </a:p>
-          <a:p>
-            <a:pPr>
-              <a:spcAft>
-                <a:spcPts val="800"/>
-              </a:spcAft>
-              <a:defRPr sz="1800">
-                <a:solidFill>
-                  <a:srgbClr val="333333"/>
-                </a:solidFill>
-                <a:latin typeface="Calibri"/>
-              </a:defRPr>
-            </a:pPr>
-            <a:r>
-              <a:t>Erişim yöntemi:</a:t>
-            </a:r>
-          </a:p>
-          <a:p>
-            <a:pPr lvl="1">
-              <a:spcAft>
-                <a:spcPts val="800"/>
-              </a:spcAft>
-              <a:defRPr sz="1600">
-                <a:solidFill>
-                  <a:srgbClr val="666666"/>
-                </a:solidFill>
-                <a:latin typeface="Calibri"/>
-              </a:defRPr>
-            </a:pPr>
-            <a:r>
-              <a:t>FDSN web servisleri (EIDA/KOERI düğümü)</a:t>
-            </a:r>
-          </a:p>
-          <a:p>
-            <a:pPr lvl="1">
-              <a:spcAft>
-                <a:spcPts val="800"/>
-              </a:spcAft>
-              <a:defRPr sz="1600">
-                <a:solidFill>
-                  <a:srgbClr val="666666"/>
-                </a:solidFill>
-                <a:latin typeface="Calibri"/>
-              </a:defRPr>
-            </a:pPr>
-            <a:r>
-              <a:t>Ham dalga formu verileri (miniSEED formatı)</a:t>
-            </a:r>
-          </a:p>
-          <a:p>
-            <a:pPr lvl="1">
-              <a:spcAft>
-                <a:spcPts val="800"/>
-              </a:spcAft>
-              <a:defRPr sz="1600">
-                <a:solidFill>
-                  <a:srgbClr val="666666"/>
-                </a:solidFill>
-                <a:latin typeface="Calibri"/>
-              </a:defRPr>
-            </a:pPr>
-            <a:r>
-              <a:t>3 bileşenli (BHZ, BHN, BHE) sismik kayıtlar</a:t>
-            </a:r>
-          </a:p>
-        </p:txBody>
-      </p:sp>
-      <p:sp>
-        <p:nvSpPr>
-          <p:cNvPr id="4" name="TextBox 3"/>
+            <a:pPr algn="l">
+              <a:defRPr sz="2600" b="1" i="0">
+                <a:solidFill>
+                  <a:srgbClr val="FFFFFF"/>
+                </a:solidFill>
+                <a:latin typeface="Calibri Light"/>
+              </a:defRPr>
+            </a:pPr>
+            <a:r>
+              <a:t>Katman 1: Kaskad Faz Belirleme</a:t>
+            </a:r>
+          </a:p>
+        </p:txBody>
+      </p:sp>
+      <p:sp>
+        <p:nvSpPr>
+          <p:cNvPr id="5" name="TextBox 4"/>
           <p:cNvSpPr txBox="1"/>
           <p:nvPr/>
         </p:nvSpPr>
         <p:spPr>
           <a:xfrm>
-            <a:off x="457200" y="6217920"/>
+            <a:off x="548640" y="731520"/>
             <a:ext cx="8229600" cy="365760"/>
           </a:xfrm>
           <a:prstGeom prst="rect">
@@ -5036,21 +5283,485 @@
           <a:noFill/>
         </p:spPr>
         <p:txBody>
-          <a:bodyPr wrap="none">
+          <a:bodyPr wrap="square" anchor="t">
             <a:spAutoFit/>
           </a:bodyPr>
           <a:lstStyle/>
           <a:p>
-            <a:pPr>
-              <a:defRPr sz="1000" i="1">
-                <a:solidFill>
-                  <a:srgbClr val="666666"/>
-                </a:solidFill>
-                <a:latin typeface="Calibri"/>
-              </a:defRPr>
-            </a:pPr>
-            <a:r>
-              <a:t>Kaynak: Ding vd. (2023). Earthquake Science, 36. doi:10.1016/j.eqs.2023.06.002</a:t>
+            <a:pPr algn="l">
+              <a:defRPr sz="1300" b="0" i="1">
+                <a:solidFill>
+                  <a:srgbClr val="B4C3D7"/>
+                </a:solidFill>
+                <a:latin typeface="Calibri"/>
+              </a:defRPr>
+            </a:pPr>
+            <a:r>
+              <a:t>GPD+SVM tetikler → PhaseNet U-Net hassas varış zamanı belirler</a:t>
+            </a:r>
+          </a:p>
+        </p:txBody>
+      </p:sp>
+      <p:sp>
+        <p:nvSpPr>
+          <p:cNvPr id="6" name="TextBox 5"/>
+          <p:cNvSpPr txBox="1"/>
+          <p:nvPr/>
+        </p:nvSpPr>
+        <p:spPr>
+          <a:xfrm>
+            <a:off x="548640" y="1371600"/>
+            <a:ext cx="5486400" cy="5029200"/>
+          </a:xfrm>
+          <a:prstGeom prst="rect">
+            <a:avLst/>
+          </a:prstGeom>
+          <a:noFill/>
+        </p:spPr>
+        <p:txBody>
+          <a:bodyPr wrap="square">
+            <a:spAutoFit/>
+          </a:bodyPr>
+          <a:lstStyle/>
+          <a:p>
+            <a:pPr>
+              <a:spcBef>
+                <a:spcPts val="0"/>
+              </a:spcBef>
+              <a:spcAft>
+                <a:spcPts val="600"/>
+              </a:spcAft>
+              <a:defRPr sz="1600" b="1" i="0">
+                <a:solidFill>
+                  <a:srgbClr val="B43232"/>
+                </a:solidFill>
+                <a:latin typeface="Calibri"/>
+              </a:defRPr>
+            </a:pPr>
+            <a:r>
+              <a:t>Mimari Kısıt (Keşfedilen Sorun):</a:t>
+            </a:r>
+          </a:p>
+          <a:p>
+            <a:pPr>
+              <a:spcAft>
+                <a:spcPts val="600"/>
+              </a:spcAft>
+              <a:defRPr sz="1400">
+                <a:solidFill>
+                  <a:srgbClr val="23232D"/>
+                </a:solidFill>
+                <a:latin typeface="Calibri"/>
+              </a:defRPr>
+            </a:pPr>
+            <a:r>
+              <a:t>GPD bir pencere sınıflandırıcısıdır (4s pencere → "deprem var/yok")</a:t>
+            </a:r>
+          </a:p>
+          <a:p>
+            <a:pPr>
+              <a:spcAft>
+                <a:spcPts val="600"/>
+              </a:spcAft>
+              <a:defRPr sz="1400">
+                <a:solidFill>
+                  <a:srgbClr val="23232D"/>
+                </a:solidFill>
+                <a:latin typeface="Calibri"/>
+              </a:defRPr>
+            </a:pPr>
+            <a:r>
+              <a:t>P-dalgasının hangi örnekte başladığını söyleyemez</a:t>
+            </a:r>
+          </a:p>
+          <a:p>
+            <a:pPr>
+              <a:spcAft>
+                <a:spcPts val="600"/>
+              </a:spcAft>
+              <a:defRPr sz="1400">
+                <a:solidFill>
+                  <a:srgbClr val="23232D"/>
+                </a:solidFill>
+                <a:latin typeface="Calibri"/>
+              </a:defRPr>
+            </a:pPr>
+            <a:r>
+              <a:t>GPD argmax ile faz belirleme: 16.03s MAE (anlamsız)</a:t>
+            </a:r>
+          </a:p>
+          <a:p>
+            <a:pPr>
+              <a:spcAft>
+                <a:spcPts val="600"/>
+              </a:spcAft>
+              <a:defRPr sz="800"/>
+            </a:pPr>
+          </a:p>
+          <a:p>
+            <a:pPr>
+              <a:spcBef>
+                <a:spcPts val="0"/>
+              </a:spcBef>
+              <a:spcAft>
+                <a:spcPts val="600"/>
+              </a:spcAft>
+              <a:defRPr sz="1600" b="1" i="0">
+                <a:solidFill>
+                  <a:srgbClr val="288C50"/>
+                </a:solidFill>
+                <a:latin typeface="Calibri"/>
+              </a:defRPr>
+            </a:pPr>
+            <a:r>
+              <a:t>Çözüm: İki Aşamalı Kaskad</a:t>
+            </a:r>
+          </a:p>
+          <a:p>
+            <a:pPr>
+              <a:spcAft>
+                <a:spcPts val="600"/>
+              </a:spcAft>
+              <a:defRPr sz="1400">
+                <a:solidFill>
+                  <a:srgbClr val="23232D"/>
+                </a:solidFill>
+                <a:latin typeface="Calibri"/>
+              </a:defRPr>
+            </a:pPr>
+            <a:r>
+              <a:t>Aşama 1: GPD+SVM → Olayı tespit et (ucuz, hızlı)</a:t>
+            </a:r>
+          </a:p>
+          <a:p>
+            <a:pPr>
+              <a:spcAft>
+                <a:spcPts val="600"/>
+              </a:spcAft>
+              <a:defRPr sz="1400">
+                <a:solidFill>
+                  <a:srgbClr val="23232D"/>
+                </a:solidFill>
+                <a:latin typeface="Calibri"/>
+              </a:defRPr>
+            </a:pPr>
+            <a:r>
+              <a:t>Aşama 2: PhaseNet U-Net → Yalnızca onaylanan olaylarda</a:t>
+            </a:r>
+          </a:p>
+          <a:p>
+            <a:pPr>
+              <a:spcAft>
+                <a:spcPts val="600"/>
+              </a:spcAft>
+              <a:defRPr sz="1400">
+                <a:solidFill>
+                  <a:srgbClr val="23232D"/>
+                </a:solidFill>
+                <a:latin typeface="Calibri"/>
+              </a:defRPr>
+            </a:pPr>
+            <a:r>
+              <a:t>         örnek düzeyinde P/S varış zamanı belirle</a:t>
+            </a:r>
+          </a:p>
+          <a:p>
+            <a:pPr>
+              <a:spcAft>
+                <a:spcPts val="600"/>
+              </a:spcAft>
+              <a:defRPr sz="800"/>
+            </a:pPr>
+          </a:p>
+          <a:p>
+            <a:pPr>
+              <a:spcBef>
+                <a:spcPts val="0"/>
+              </a:spcBef>
+              <a:spcAft>
+                <a:spcPts val="600"/>
+              </a:spcAft>
+              <a:defRPr sz="1600" b="1" i="0">
+                <a:solidFill>
+                  <a:srgbClr val="002855"/>
+                </a:solidFill>
+                <a:latin typeface="Calibri"/>
+              </a:defRPr>
+            </a:pPr>
+            <a:r>
+              <a:t>İyileşme:</a:t>
+            </a:r>
+          </a:p>
+          <a:p>
+            <a:pPr>
+              <a:spcAft>
+                <a:spcPts val="600"/>
+              </a:spcAft>
+              <a:defRPr sz="1400">
+                <a:solidFill>
+                  <a:srgbClr val="23232D"/>
+                </a:solidFill>
+                <a:latin typeface="Calibri"/>
+              </a:defRPr>
+            </a:pPr>
+            <a:r>
+              <a:t>GPD tek başına:     16.03s MAE  →  mimari olarak anlamsız</a:t>
+            </a:r>
+          </a:p>
+          <a:p>
+            <a:pPr>
+              <a:spcAft>
+                <a:spcPts val="600"/>
+              </a:spcAft>
+              <a:defRPr sz="1400">
+                <a:solidFill>
+                  <a:srgbClr val="23232D"/>
+                </a:solidFill>
+                <a:latin typeface="Calibri"/>
+              </a:defRPr>
+            </a:pPr>
+            <a:r>
+              <a:t>PhaseNet kaskad:     1.52s ortanca AE  →  10× iyileşme</a:t>
+            </a:r>
+          </a:p>
+        </p:txBody>
+      </p:sp>
+      <p:sp>
+        <p:nvSpPr>
+          <p:cNvPr id="7" name="Rounded Rectangle 6"/>
+          <p:cNvSpPr/>
+          <p:nvPr/>
+        </p:nvSpPr>
+        <p:spPr>
+          <a:xfrm>
+            <a:off x="6400800" y="1828800"/>
+            <a:ext cx="2377440" cy="1280160"/>
+          </a:xfrm>
+          <a:prstGeom prst="roundRect">
+            <a:avLst/>
+          </a:prstGeom>
+          <a:solidFill>
+            <a:srgbClr val="0F1E37"/>
+          </a:solidFill>
+          <a:ln w="19050">
+            <a:solidFill>
+              <a:srgbClr val="C39B2D"/>
+            </a:solidFill>
+          </a:ln>
+        </p:spPr>
+        <p:style>
+          <a:lnRef idx="1">
+            <a:schemeClr val="accent1"/>
+          </a:lnRef>
+          <a:fillRef idx="3">
+            <a:schemeClr val="accent1"/>
+          </a:fillRef>
+          <a:effectRef idx="2">
+            <a:schemeClr val="accent1"/>
+          </a:effectRef>
+          <a:fontRef idx="minor">
+            <a:schemeClr val="lt1"/>
+          </a:fontRef>
+        </p:style>
+        <p:txBody>
+          <a:bodyPr rtlCol="0" anchor="ctr" lIns="137160"/>
+          <a:lstStyle/>
+          <a:p>
+            <a:pPr algn="ctr">
+              <a:defRPr sz="2800" b="1">
+                <a:solidFill>
+                  <a:srgbClr val="C39B2D"/>
+                </a:solidFill>
+                <a:latin typeface="Calibri Light"/>
+              </a:defRPr>
+            </a:pPr>
+            <a:r>
+              <a:t>1.52s</a:t>
+            </a:r>
+          </a:p>
+          <a:p>
+            <a:pPr algn="ctr">
+              <a:defRPr sz="1100">
+                <a:solidFill>
+                  <a:srgbClr val="C8CDD7"/>
+                </a:solidFill>
+                <a:latin typeface="Calibri"/>
+              </a:defRPr>
+            </a:pPr>
+            <a:r>
+              <a:t>Ortanca P-Pick AE</a:t>
+            </a:r>
+          </a:p>
+        </p:txBody>
+      </p:sp>
+      <p:sp>
+        <p:nvSpPr>
+          <p:cNvPr id="8" name="Rounded Rectangle 7"/>
+          <p:cNvSpPr/>
+          <p:nvPr/>
+        </p:nvSpPr>
+        <p:spPr>
+          <a:xfrm>
+            <a:off x="6400800" y="3383280"/>
+            <a:ext cx="2377440" cy="1280160"/>
+          </a:xfrm>
+          <a:prstGeom prst="roundRect">
+            <a:avLst/>
+          </a:prstGeom>
+          <a:solidFill>
+            <a:srgbClr val="0F1E37"/>
+          </a:solidFill>
+          <a:ln w="19050">
+            <a:solidFill>
+              <a:srgbClr val="C39B2D"/>
+            </a:solidFill>
+          </a:ln>
+        </p:spPr>
+        <p:style>
+          <a:lnRef idx="1">
+            <a:schemeClr val="accent1"/>
+          </a:lnRef>
+          <a:fillRef idx="3">
+            <a:schemeClr val="accent1"/>
+          </a:fillRef>
+          <a:effectRef idx="2">
+            <a:schemeClr val="accent1"/>
+          </a:effectRef>
+          <a:fontRef idx="minor">
+            <a:schemeClr val="lt1"/>
+          </a:fontRef>
+        </p:style>
+        <p:txBody>
+          <a:bodyPr rtlCol="0" anchor="ctr" lIns="137160"/>
+          <a:lstStyle/>
+          <a:p>
+            <a:pPr algn="ctr">
+              <a:defRPr sz="2800" b="1">
+                <a:solidFill>
+                  <a:srgbClr val="C39B2D"/>
+                </a:solidFill>
+                <a:latin typeface="Calibri Light"/>
+              </a:defRPr>
+            </a:pPr>
+            <a:r>
+              <a:t>10×</a:t>
+            </a:r>
+          </a:p>
+          <a:p>
+            <a:pPr algn="ctr">
+              <a:defRPr sz="1100">
+                <a:solidFill>
+                  <a:srgbClr val="C8CDD7"/>
+                </a:solidFill>
+                <a:latin typeface="Calibri"/>
+              </a:defRPr>
+            </a:pPr>
+            <a:r>
+              <a:t>İyileşme Faktörü</a:t>
+            </a:r>
+          </a:p>
+        </p:txBody>
+      </p:sp>
+      <p:sp>
+        <p:nvSpPr>
+          <p:cNvPr id="9" name="Rounded Rectangle 8"/>
+          <p:cNvSpPr/>
+          <p:nvPr/>
+        </p:nvSpPr>
+        <p:spPr>
+          <a:xfrm>
+            <a:off x="6400800" y="4937760"/>
+            <a:ext cx="2377440" cy="1280160"/>
+          </a:xfrm>
+          <a:prstGeom prst="roundRect">
+            <a:avLst/>
+          </a:prstGeom>
+          <a:solidFill>
+            <a:srgbClr val="0F1E37"/>
+          </a:solidFill>
+          <a:ln w="19050">
+            <a:solidFill>
+              <a:srgbClr val="C39B2D"/>
+            </a:solidFill>
+          </a:ln>
+        </p:spPr>
+        <p:style>
+          <a:lnRef idx="1">
+            <a:schemeClr val="accent1"/>
+          </a:lnRef>
+          <a:fillRef idx="3">
+            <a:schemeClr val="accent1"/>
+          </a:fillRef>
+          <a:effectRef idx="2">
+            <a:schemeClr val="accent1"/>
+          </a:effectRef>
+          <a:fontRef idx="minor">
+            <a:schemeClr val="lt1"/>
+          </a:fontRef>
+        </p:style>
+        <p:txBody>
+          <a:bodyPr rtlCol="0" anchor="ctr" lIns="137160"/>
+          <a:lstStyle/>
+          <a:p>
+            <a:pPr algn="ctr">
+              <a:defRPr sz="2800" b="1">
+                <a:solidFill>
+                  <a:srgbClr val="C8CDD7"/>
+                </a:solidFill>
+                <a:latin typeface="Calibri Light"/>
+              </a:defRPr>
+            </a:pPr>
+            <a:r>
+              <a:t>0.1s</a:t>
+            </a:r>
+          </a:p>
+          <a:p>
+            <a:pPr algn="ctr">
+              <a:defRPr sz="1100">
+                <a:solidFill>
+                  <a:srgbClr val="C8CDD7"/>
+                </a:solidFill>
+                <a:latin typeface="Calibri"/>
+              </a:defRPr>
+            </a:pPr>
+            <a:r>
+              <a:t>Gelecek Hedef</a:t>
+            </a:r>
+          </a:p>
+        </p:txBody>
+      </p:sp>
+      <p:sp>
+        <p:nvSpPr>
+          <p:cNvPr id="10" name="TextBox 9"/>
+          <p:cNvSpPr txBox="1"/>
+          <p:nvPr/>
+        </p:nvSpPr>
+        <p:spPr>
+          <a:xfrm>
+            <a:off x="457200" y="6400800"/>
+            <a:ext cx="8229600" cy="274320"/>
+          </a:xfrm>
+          <a:prstGeom prst="rect">
+            <a:avLst/>
+          </a:prstGeom>
+          <a:noFill/>
+        </p:spPr>
+        <p:txBody>
+          <a:bodyPr wrap="square" anchor="t">
+            <a:spAutoFit/>
+          </a:bodyPr>
+          <a:lstStyle/>
+          <a:p>
+            <a:pPr algn="l">
+              <a:defRPr sz="900" b="0" i="1">
+                <a:solidFill>
+                  <a:srgbClr val="5A5F69"/>
+                </a:solidFill>
+                <a:latin typeface="Calibri"/>
+              </a:defRPr>
+            </a:pPr>
+            <a:r>
+              <a:t>0.1s hedefi: PhaseNet'in Türkiye verisiyle ince-ayarı gerektirir (net gelecek çalışma yolu)</a:t>
             </a:r>
           </a:p>
         </p:txBody>
@@ -5069,7 +5780,7 @@
     <p:bg>
       <p:bgPr>
         <a:solidFill>
-          <a:srgbClr val="FFFFFF"/>
+          <a:srgbClr val="F8FAFC"/>
         </a:solidFill>
         <a:effectLst/>
       </p:bgPr>
@@ -5090,13 +5801,13 @@
         <p:spPr>
           <a:xfrm>
             <a:off x="0" y="0"/>
-            <a:ext cx="9144000" cy="1097280"/>
+            <a:ext cx="9144000" cy="1188720"/>
           </a:xfrm>
           <a:prstGeom prst="rect">
             <a:avLst/>
           </a:prstGeom>
           <a:solidFill>
-            <a:srgbClr val="003366"/>
+            <a:srgbClr val="002855"/>
           </a:solidFill>
           <a:ln>
             <a:noFill/>
@@ -5117,266 +5828,32 @@
           </a:fontRef>
         </p:style>
         <p:txBody>
-          <a:bodyPr rtlCol="0" anchor="ctr" wrap="square" lIns="457200"/>
-          <a:lstStyle/>
-          <a:p>
-            <a:pPr algn="l">
-              <a:defRPr sz="2800" b="1">
-                <a:solidFill>
-                  <a:srgbClr val="FFFFFF"/>
-                </a:solidFill>
-                <a:latin typeface="Calibri"/>
-              </a:defRPr>
-            </a:pPr>
-            <a:r>
-              <a:t>Hedeflenen Başarı Ölçütleri</a:t>
-            </a:r>
-          </a:p>
-        </p:txBody>
-      </p:sp>
-      <p:sp>
-        <p:nvSpPr>
-          <p:cNvPr id="3" name="TextBox 2"/>
-          <p:cNvSpPr txBox="1"/>
+          <a:bodyPr rtlCol="0" anchor="ctr"/>
+          <a:lstStyle/>
+          <a:p>
+            <a:pPr algn="ctr"/>
+          </a:p>
+        </p:txBody>
+      </p:sp>
+      <p:sp>
+        <p:nvSpPr>
+          <p:cNvPr id="3" name="Rectangle 2"/>
+          <p:cNvSpPr/>
           <p:nvPr/>
         </p:nvSpPr>
         <p:spPr>
           <a:xfrm>
-            <a:off x="457200" y="1371600"/>
-            <a:ext cx="8229600" cy="4572000"/>
+            <a:off x="0" y="1188720"/>
+            <a:ext cx="9144000" cy="54864"/>
           </a:xfrm>
           <a:prstGeom prst="rect">
             <a:avLst/>
           </a:prstGeom>
-          <a:noFill/>
-        </p:spPr>
-        <p:txBody>
-          <a:bodyPr wrap="square">
-            <a:spAutoFit/>
-          </a:bodyPr>
-          <a:lstStyle/>
-          <a:p>
-            <a:pPr>
-              <a:spcAft>
-                <a:spcPts val="800"/>
-              </a:spcAft>
-              <a:defRPr sz="1700">
-                <a:solidFill>
-                  <a:srgbClr val="333333"/>
-                </a:solidFill>
-                <a:latin typeface="Calibri"/>
-              </a:defRPr>
-            </a:pPr>
-            <a:r>
-              <a:t>Temel değerlendirme eksenleri:</a:t>
-            </a:r>
-          </a:p>
-          <a:p>
-            <a:pPr>
-              <a:spcAft>
-                <a:spcPts val="800"/>
-              </a:spcAft>
-              <a:defRPr sz="1700">
-                <a:solidFill>
-                  <a:srgbClr val="333333"/>
-                </a:solidFill>
-                <a:latin typeface="Calibri"/>
-              </a:defRPr>
-            </a:pPr>
-          </a:p>
-          <a:p>
-            <a:pPr>
-              <a:spcAft>
-                <a:spcPts val="800"/>
-              </a:spcAft>
-              <a:defRPr sz="1700">
-                <a:solidFill>
-                  <a:srgbClr val="333333"/>
-                </a:solidFill>
-                <a:latin typeface="Calibri"/>
-              </a:defRPr>
-            </a:pPr>
-            <a:r>
-              <a:t>1. Olay Tespiti (Detection)</a:t>
-            </a:r>
-          </a:p>
-          <a:p>
-            <a:pPr lvl="1">
-              <a:spcAft>
-                <a:spcPts val="800"/>
-              </a:spcAft>
-              <a:defRPr sz="1500">
-                <a:solidFill>
-                  <a:srgbClr val="666666"/>
-                </a:solidFill>
-                <a:latin typeface="Calibri"/>
-              </a:defRPr>
-            </a:pPr>
-            <a:r>
-              <a:t>M &lt; 2.0 bandında recall performansı</a:t>
-            </a:r>
-          </a:p>
-          <a:p>
-            <a:pPr lvl="1">
-              <a:spcAft>
-                <a:spcPts val="800"/>
-              </a:spcAft>
-              <a:defRPr sz="1500">
-                <a:solidFill>
-                  <a:srgbClr val="666666"/>
-                </a:solidFill>
-                <a:latin typeface="Calibri"/>
-              </a:defRPr>
-            </a:pPr>
-            <a:r>
-              <a:t>Düşük yanlış pozitif oranı (gürültü pencereleri üzerinde)</a:t>
-            </a:r>
-          </a:p>
-          <a:p>
-            <a:pPr>
-              <a:spcAft>
-                <a:spcPts val="800"/>
-              </a:spcAft>
-              <a:defRPr sz="1700">
-                <a:solidFill>
-                  <a:srgbClr val="333333"/>
-                </a:solidFill>
-                <a:latin typeface="Calibri"/>
-              </a:defRPr>
-            </a:pPr>
-          </a:p>
-          <a:p>
-            <a:pPr>
-              <a:spcAft>
-                <a:spcPts val="800"/>
-              </a:spcAft>
-              <a:defRPr sz="1700">
-                <a:solidFill>
-                  <a:srgbClr val="333333"/>
-                </a:solidFill>
-                <a:latin typeface="Calibri"/>
-              </a:defRPr>
-            </a:pPr>
-            <a:r>
-              <a:t>2. Faz Belirleme (Phase Picking)</a:t>
-            </a:r>
-          </a:p>
-          <a:p>
-            <a:pPr lvl="1">
-              <a:spcAft>
-                <a:spcPts val="800"/>
-              </a:spcAft>
-              <a:defRPr sz="1500">
-                <a:solidFill>
-                  <a:srgbClr val="666666"/>
-                </a:solidFill>
-                <a:latin typeface="Calibri"/>
-              </a:defRPr>
-            </a:pPr>
-            <a:r>
-              <a:t>Ortalama mutlak hata (MAE) hedefi: 0.1 saniye</a:t>
-            </a:r>
-          </a:p>
-          <a:p>
-            <a:pPr lvl="1">
-              <a:spcAft>
-                <a:spcPts val="800"/>
-              </a:spcAft>
-              <a:defRPr sz="1500">
-                <a:solidFill>
-                  <a:srgbClr val="666666"/>
-                </a:solidFill>
-                <a:latin typeface="Calibri"/>
-              </a:defRPr>
-            </a:pPr>
-            <a:r>
-              <a:t>P ve S faz varış zamanları ayrı ayrı değerlendirilecektir</a:t>
-            </a:r>
-          </a:p>
-          <a:p>
-            <a:pPr>
-              <a:spcAft>
-                <a:spcPts val="800"/>
-              </a:spcAft>
-              <a:defRPr sz="1700">
-                <a:solidFill>
-                  <a:srgbClr val="333333"/>
-                </a:solidFill>
-                <a:latin typeface="Calibri"/>
-              </a:defRPr>
-            </a:pPr>
-          </a:p>
-          <a:p>
-            <a:pPr>
-              <a:spcAft>
-                <a:spcPts val="800"/>
-              </a:spcAft>
-              <a:defRPr sz="1700">
-                <a:solidFill>
-                  <a:srgbClr val="333333"/>
-                </a:solidFill>
-                <a:latin typeface="Calibri"/>
-              </a:defRPr>
-            </a:pPr>
-            <a:r>
-              <a:t>3. Karşılaştırma</a:t>
-            </a:r>
-          </a:p>
-          <a:p>
-            <a:pPr lvl="1">
-              <a:spcAft>
-                <a:spcPts val="800"/>
-              </a:spcAft>
-              <a:defRPr sz="1500">
-                <a:solidFill>
-                  <a:srgbClr val="666666"/>
-                </a:solidFill>
-                <a:latin typeface="Calibri"/>
-              </a:defRPr>
-            </a:pPr>
-            <a:r>
-              <a:t>Üç model aynı metriklerle değerlendirilecektir</a:t>
-            </a:r>
-          </a:p>
-          <a:p>
-            <a:pPr lvl="1">
-              <a:spcAft>
-                <a:spcPts val="800"/>
-              </a:spcAft>
-              <a:defRPr sz="1500">
-                <a:solidFill>
-                  <a:srgbClr val="666666"/>
-                </a:solidFill>
-                <a:latin typeface="Calibri"/>
-              </a:defRPr>
-            </a:pPr>
-            <a:r>
-              <a:t>Magnıtüd bandlarına göre stratifiye analiz</a:t>
-            </a:r>
-          </a:p>
-        </p:txBody>
-      </p:sp>
-      <p:sp>
-        <p:nvSpPr>
-          <p:cNvPr id="4" name="Rounded Rectangle 3"/>
-          <p:cNvSpPr/>
-          <p:nvPr/>
-        </p:nvSpPr>
-        <p:spPr>
-          <a:xfrm>
-            <a:off x="914400" y="5486400"/>
-            <a:ext cx="7315200" cy="731520"/>
-          </a:xfrm>
-          <a:prstGeom prst="roundRect">
-            <a:avLst/>
-          </a:prstGeom>
           <a:solidFill>
-            <a:srgbClr val="FFF8DC"/>
+            <a:srgbClr val="C39B2D"/>
           </a:solidFill>
-          <a:ln w="12700">
-            <a:solidFill>
-              <a:srgbClr val="B48C32"/>
-            </a:solidFill>
+          <a:ln>
+            <a:noFill/>
           </a:ln>
         </p:spPr>
         <p:style>
@@ -5397,16 +5874,370 @@
           <a:bodyPr rtlCol="0" anchor="ctr"/>
           <a:lstStyle/>
           <a:p>
-            <a:pPr algn="ctr">
-              <a:defRPr sz="1300" i="1">
-                <a:solidFill>
-                  <a:srgbClr val="78641E"/>
-                </a:solidFill>
-                <a:latin typeface="Calibri"/>
-              </a:defRPr>
-            </a:pPr>
-            <a:r>
-              <a:t>⚠ 0.1s MAE bir hedeftir, tamamlanmış bir sonuç değildir.</a:t>
+            <a:pPr algn="ctr"/>
+          </a:p>
+        </p:txBody>
+      </p:sp>
+      <p:sp>
+        <p:nvSpPr>
+          <p:cNvPr id="4" name="TextBox 3"/>
+          <p:cNvSpPr txBox="1"/>
+          <p:nvPr/>
+        </p:nvSpPr>
+        <p:spPr>
+          <a:xfrm>
+            <a:off x="548640" y="137160"/>
+            <a:ext cx="8229600" cy="731520"/>
+          </a:xfrm>
+          <a:prstGeom prst="rect">
+            <a:avLst/>
+          </a:prstGeom>
+          <a:noFill/>
+        </p:spPr>
+        <p:txBody>
+          <a:bodyPr wrap="square" anchor="t">
+            <a:spAutoFit/>
+          </a:bodyPr>
+          <a:lstStyle/>
+          <a:p>
+            <a:pPr algn="l">
+              <a:defRPr sz="2600" b="1" i="0">
+                <a:solidFill>
+                  <a:srgbClr val="FFFFFF"/>
+                </a:solidFill>
+                <a:latin typeface="Calibri Light"/>
+              </a:defRPr>
+            </a:pPr>
+            <a:r>
+              <a:t>Katman 2: Hava Boşluklu Karar Destek Sistemi</a:t>
+            </a:r>
+          </a:p>
+        </p:txBody>
+      </p:sp>
+      <p:sp>
+        <p:nvSpPr>
+          <p:cNvPr id="5" name="TextBox 4"/>
+          <p:cNvSpPr txBox="1"/>
+          <p:nvPr/>
+        </p:nvSpPr>
+        <p:spPr>
+          <a:xfrm>
+            <a:off x="548640" y="731520"/>
+            <a:ext cx="8229600" cy="365760"/>
+          </a:xfrm>
+          <a:prstGeom prst="rect">
+            <a:avLst/>
+          </a:prstGeom>
+          <a:noFill/>
+        </p:spPr>
+        <p:txBody>
+          <a:bodyPr wrap="square" anchor="t">
+            <a:spAutoFit/>
+          </a:bodyPr>
+          <a:lstStyle/>
+          <a:p>
+            <a:pPr algn="l">
+              <a:defRPr sz="1300" b="0" i="1">
+                <a:solidFill>
+                  <a:srgbClr val="B4C3D7"/>
+                </a:solidFill>
+                <a:latin typeface="Calibri"/>
+              </a:defRPr>
+            </a:pPr>
+            <a:r>
+              <a:t>Tamamen çevrimdışı — internet bağlantısı SIFIR</a:t>
+            </a:r>
+          </a:p>
+        </p:txBody>
+      </p:sp>
+      <p:sp>
+        <p:nvSpPr>
+          <p:cNvPr id="6" name="TextBox 5"/>
+          <p:cNvSpPr txBox="1"/>
+          <p:nvPr/>
+        </p:nvSpPr>
+        <p:spPr>
+          <a:xfrm>
+            <a:off x="548640" y="1371600"/>
+            <a:ext cx="8229600" cy="5029200"/>
+          </a:xfrm>
+          <a:prstGeom prst="rect">
+            <a:avLst/>
+          </a:prstGeom>
+          <a:noFill/>
+        </p:spPr>
+        <p:txBody>
+          <a:bodyPr wrap="square">
+            <a:spAutoFit/>
+          </a:bodyPr>
+          <a:lstStyle/>
+          <a:p>
+            <a:pPr>
+              <a:spcBef>
+                <a:spcPts val="0"/>
+              </a:spcBef>
+              <a:spcAft>
+                <a:spcPts val="600"/>
+              </a:spcAft>
+              <a:defRPr sz="1600" b="1" i="0">
+                <a:solidFill>
+                  <a:srgbClr val="002855"/>
+                </a:solidFill>
+                <a:latin typeface="Calibri"/>
+              </a:defRPr>
+            </a:pPr>
+            <a:r>
+              <a:t>Mimari Tasarım Kararı:</a:t>
+            </a:r>
+          </a:p>
+          <a:p>
+            <a:pPr>
+              <a:spcAft>
+                <a:spcPts val="600"/>
+              </a:spcAft>
+              <a:defRPr sz="1400">
+                <a:solidFill>
+                  <a:srgbClr val="23232D"/>
+                </a:solidFill>
+                <a:latin typeface="Calibri"/>
+              </a:defRPr>
+            </a:pPr>
+            <a:r>
+              <a:t>Kritik altyapı verisi internete çıkmamalıdır</a:t>
+            </a:r>
+          </a:p>
+          <a:p>
+            <a:pPr>
+              <a:spcAft>
+                <a:spcPts val="600"/>
+              </a:spcAft>
+              <a:defRPr sz="1400">
+                <a:solidFill>
+                  <a:srgbClr val="23232D"/>
+                </a:solidFill>
+                <a:latin typeface="Calibri"/>
+              </a:defRPr>
+            </a:pPr>
+            <a:r>
+              <a:t>Deprem sonrası internet altyapısı çökebilir</a:t>
+            </a:r>
+          </a:p>
+          <a:p>
+            <a:pPr>
+              <a:spcAft>
+                <a:spcPts val="600"/>
+              </a:spcAft>
+              <a:defRPr sz="1400">
+                <a:solidFill>
+                  <a:srgbClr val="23232D"/>
+                </a:solidFill>
+                <a:latin typeface="Calibri"/>
+              </a:defRPr>
+            </a:pPr>
+            <a:r>
+              <a:t>→ Çözüm: Tamamen yerel, hava boşluklu (air-gapped) LLM</a:t>
+            </a:r>
+          </a:p>
+          <a:p>
+            <a:pPr>
+              <a:spcAft>
+                <a:spcPts val="600"/>
+              </a:spcAft>
+              <a:defRPr sz="800"/>
+            </a:pPr>
+          </a:p>
+          <a:p>
+            <a:pPr>
+              <a:spcBef>
+                <a:spcPts val="0"/>
+              </a:spcBef>
+              <a:spcAft>
+                <a:spcPts val="600"/>
+              </a:spcAft>
+              <a:defRPr sz="1600" b="1" i="0">
+                <a:solidFill>
+                  <a:srgbClr val="002855"/>
+                </a:solidFill>
+                <a:latin typeface="Calibri"/>
+              </a:defRPr>
+            </a:pPr>
+            <a:r>
+              <a:t>Teknoloji Yığını:</a:t>
+            </a:r>
+          </a:p>
+          <a:p>
+            <a:pPr>
+              <a:spcAft>
+                <a:spcPts val="600"/>
+              </a:spcAft>
+              <a:defRPr sz="1400">
+                <a:solidFill>
+                  <a:srgbClr val="23232D"/>
+                </a:solidFill>
+                <a:latin typeface="Calibri"/>
+              </a:defRPr>
+            </a:pPr>
+            <a:r>
+              <a:t>• Model: DeepSeek-R1 (1.5B parametre) — Ollama üzerinde</a:t>
+            </a:r>
+          </a:p>
+          <a:p>
+            <a:pPr>
+              <a:spcAft>
+                <a:spcPts val="600"/>
+              </a:spcAft>
+              <a:defRPr sz="1400">
+                <a:solidFill>
+                  <a:srgbClr val="23232D"/>
+                </a:solidFill>
+                <a:latin typeface="Calibri"/>
+              </a:defRPr>
+            </a:pPr>
+            <a:r>
+              <a:t>• İndeksleme: FAISS vektör veritabanı</a:t>
+            </a:r>
+          </a:p>
+          <a:p>
+            <a:pPr>
+              <a:spcAft>
+                <a:spcPts val="600"/>
+              </a:spcAft>
+              <a:defRPr sz="1400">
+                <a:solidFill>
+                  <a:srgbClr val="23232D"/>
+                </a:solidFill>
+                <a:latin typeface="Calibri"/>
+              </a:defRPr>
+            </a:pPr>
+            <a:r>
+              <a:t>• Bilgi tabanı: 31 TBDY-2018 maddesi + 15 proje artifaktı</a:t>
+            </a:r>
+          </a:p>
+          <a:p>
+            <a:pPr>
+              <a:spcAft>
+                <a:spcPts val="600"/>
+              </a:spcAft>
+              <a:defRPr sz="1400">
+                <a:solidFill>
+                  <a:srgbClr val="23232D"/>
+                </a:solidFill>
+                <a:latin typeface="Calibri"/>
+              </a:defRPr>
+            </a:pPr>
+            <a:r>
+              <a:t>• Arayüz: Streamlit (3 sekmeli UI)</a:t>
+            </a:r>
+          </a:p>
+          <a:p>
+            <a:pPr>
+              <a:spcAft>
+                <a:spcPts val="600"/>
+              </a:spcAft>
+              <a:defRPr sz="800"/>
+            </a:pPr>
+          </a:p>
+          <a:p>
+            <a:pPr>
+              <a:spcBef>
+                <a:spcPts val="0"/>
+              </a:spcBef>
+              <a:spcAft>
+                <a:spcPts val="600"/>
+              </a:spcAft>
+              <a:defRPr sz="1600" b="1" i="0">
+                <a:solidFill>
+                  <a:srgbClr val="002855"/>
+                </a:solidFill>
+                <a:latin typeface="Calibri"/>
+              </a:defRPr>
+            </a:pPr>
+            <a:r>
+              <a:t>Güvenlik Önlemleri:</a:t>
+            </a:r>
+          </a:p>
+          <a:p>
+            <a:pPr>
+              <a:spcAft>
+                <a:spcPts val="600"/>
+              </a:spcAft>
+              <a:defRPr sz="1400">
+                <a:solidFill>
+                  <a:srgbClr val="23232D"/>
+                </a:solidFill>
+                <a:latin typeface="Calibri"/>
+              </a:defRPr>
+            </a:pPr>
+            <a:r>
+              <a:t>• RAG: Model yalnızca indekslenmiş belgelerden yanıt üretir</a:t>
+            </a:r>
+          </a:p>
+          <a:p>
+            <a:pPr>
+              <a:spcAft>
+                <a:spcPts val="600"/>
+              </a:spcAft>
+              <a:defRPr sz="1400">
+                <a:solidFill>
+                  <a:srgbClr val="23232D"/>
+                </a:solidFill>
+                <a:latin typeface="Calibri"/>
+              </a:defRPr>
+            </a:pPr>
+            <a:r>
+              <a:t>• Prompt kuralları: 6 zorunlu kural (kaynak atfı, kapsam sınırı)</a:t>
+            </a:r>
+          </a:p>
+          <a:p>
+            <a:pPr>
+              <a:spcAft>
+                <a:spcPts val="600"/>
+              </a:spcAft>
+              <a:defRPr sz="1400">
+                <a:solidFill>
+                  <a:srgbClr val="23232D"/>
+                </a:solidFill>
+                <a:latin typeface="Calibri"/>
+              </a:defRPr>
+            </a:pPr>
+            <a:r>
+              <a:t>• Sorumluluk reddi: Her raporda zorunlu uyarı</a:t>
+            </a:r>
+          </a:p>
+        </p:txBody>
+      </p:sp>
+      <p:sp>
+        <p:nvSpPr>
+          <p:cNvPr id="7" name="TextBox 6"/>
+          <p:cNvSpPr txBox="1"/>
+          <p:nvPr/>
+        </p:nvSpPr>
+        <p:spPr>
+          <a:xfrm>
+            <a:off x="457200" y="6400800"/>
+            <a:ext cx="8229600" cy="274320"/>
+          </a:xfrm>
+          <a:prstGeom prst="rect">
+            <a:avLst/>
+          </a:prstGeom>
+          <a:noFill/>
+        </p:spPr>
+        <p:txBody>
+          <a:bodyPr wrap="square" anchor="t">
+            <a:spAutoFit/>
+          </a:bodyPr>
+          <a:lstStyle/>
+          <a:p>
+            <a:pPr algn="l">
+              <a:defRPr sz="900" b="0" i="1">
+                <a:solidFill>
+                  <a:srgbClr val="5A5F69"/>
+                </a:solidFill>
+                <a:latin typeface="Calibri"/>
+              </a:defRPr>
+            </a:pPr>
+            <a:r>
+              <a:t>Küçük model avantajı: 1.5B parametre → daha az halüsinasyon, prompt'a daha sıkı uyum</a:t>
             </a:r>
           </a:p>
         </p:txBody>
@@ -5425,7 +6256,7 @@
     <p:bg>
       <p:bgPr>
         <a:solidFill>
-          <a:srgbClr val="FFFFFF"/>
+          <a:srgbClr val="F8FAFC"/>
         </a:solidFill>
         <a:effectLst/>
       </p:bgPr>
@@ -5446,13 +6277,13 @@
         <p:spPr>
           <a:xfrm>
             <a:off x="0" y="0"/>
-            <a:ext cx="9144000" cy="1097280"/>
+            <a:ext cx="9144000" cy="1188720"/>
           </a:xfrm>
           <a:prstGeom prst="rect">
             <a:avLst/>
           </a:prstGeom>
           <a:solidFill>
-            <a:srgbClr val="003366"/>
+            <a:srgbClr val="002855"/>
           </a:solidFill>
           <a:ln>
             <a:noFill/>
@@ -5473,33 +6304,66 @@
           </a:fontRef>
         </p:style>
         <p:txBody>
-          <a:bodyPr rtlCol="0" anchor="ctr" wrap="square" lIns="457200"/>
-          <a:lstStyle/>
-          <a:p>
-            <a:pPr algn="l">
-              <a:defRPr sz="2800" b="1">
-                <a:solidFill>
-                  <a:srgbClr val="FFFFFF"/>
-                </a:solidFill>
-                <a:latin typeface="Calibri"/>
-              </a:defRPr>
-            </a:pPr>
-            <a:r>
-              <a:t>Katman 2: LLM ve RAG Entegrasyonu</a:t>
-            </a:r>
-          </a:p>
-        </p:txBody>
-      </p:sp>
-      <p:sp>
-        <p:nvSpPr>
-          <p:cNvPr id="3" name="TextBox 2"/>
+          <a:bodyPr rtlCol="0" anchor="ctr"/>
+          <a:lstStyle/>
+          <a:p>
+            <a:pPr algn="ctr"/>
+          </a:p>
+        </p:txBody>
+      </p:sp>
+      <p:sp>
+        <p:nvSpPr>
+          <p:cNvPr id="3" name="Rectangle 2"/>
+          <p:cNvSpPr/>
+          <p:nvPr/>
+        </p:nvSpPr>
+        <p:spPr>
+          <a:xfrm>
+            <a:off x="0" y="1188720"/>
+            <a:ext cx="9144000" cy="54864"/>
+          </a:xfrm>
+          <a:prstGeom prst="rect">
+            <a:avLst/>
+          </a:prstGeom>
+          <a:solidFill>
+            <a:srgbClr val="C39B2D"/>
+          </a:solidFill>
+          <a:ln>
+            <a:noFill/>
+          </a:ln>
+        </p:spPr>
+        <p:style>
+          <a:lnRef idx="1">
+            <a:schemeClr val="accent1"/>
+          </a:lnRef>
+          <a:fillRef idx="3">
+            <a:schemeClr val="accent1"/>
+          </a:fillRef>
+          <a:effectRef idx="2">
+            <a:schemeClr val="accent1"/>
+          </a:effectRef>
+          <a:fontRef idx="minor">
+            <a:schemeClr val="lt1"/>
+          </a:fontRef>
+        </p:style>
+        <p:txBody>
+          <a:bodyPr rtlCol="0" anchor="ctr"/>
+          <a:lstStyle/>
+          <a:p>
+            <a:pPr algn="ctr"/>
+          </a:p>
+        </p:txBody>
+      </p:sp>
+      <p:sp>
+        <p:nvSpPr>
+          <p:cNvPr id="4" name="TextBox 3"/>
           <p:cNvSpPr txBox="1"/>
           <p:nvPr/>
         </p:nvSpPr>
         <p:spPr>
           <a:xfrm>
-            <a:off x="457200" y="1371600"/>
-            <a:ext cx="8229600" cy="4572000"/>
+            <a:off x="548640" y="137160"/>
+            <a:ext cx="8229600" cy="731520"/>
           </a:xfrm>
           <a:prstGeom prst="rect">
             <a:avLst/>
@@ -5507,252 +6371,34 @@
           <a:noFill/>
         </p:spPr>
         <p:txBody>
-          <a:bodyPr wrap="square">
+          <a:bodyPr wrap="square" anchor="t">
             <a:spAutoFit/>
           </a:bodyPr>
           <a:lstStyle/>
           <a:p>
-            <a:pPr>
-              <a:spcAft>
-                <a:spcPts val="800"/>
-              </a:spcAft>
-              <a:defRPr sz="1600">
-                <a:solidFill>
-                  <a:srgbClr val="333333"/>
-                </a:solidFill>
-                <a:latin typeface="Calibri"/>
-              </a:defRPr>
-            </a:pPr>
-            <a:r>
-              <a:t>Giriş verileri:</a:t>
-            </a:r>
-          </a:p>
-          <a:p>
-            <a:pPr lvl="1">
-              <a:spcAft>
-                <a:spcPts val="800"/>
-              </a:spcAft>
-              <a:defRPr sz="1400">
-                <a:solidFill>
-                  <a:srgbClr val="666666"/>
-                </a:solidFill>
-                <a:latin typeface="Calibri"/>
-              </a:defRPr>
-            </a:pPr>
-            <a:r>
-              <a:t>Tespit edilen olayların meta-verileri (konum, büyüklük, derinlik)</a:t>
-            </a:r>
-          </a:p>
-          <a:p>
-            <a:pPr>
-              <a:spcAft>
-                <a:spcPts val="800"/>
-              </a:spcAft>
-              <a:defRPr sz="1600">
-                <a:solidFill>
-                  <a:srgbClr val="333333"/>
-                </a:solidFill>
-                <a:latin typeface="Calibri"/>
-              </a:defRPr>
-            </a:pPr>
-          </a:p>
-          <a:p>
-            <a:pPr>
-              <a:spcAft>
-                <a:spcPts val="800"/>
-              </a:spcAft>
-              <a:defRPr sz="1600">
-                <a:solidFill>
-                  <a:srgbClr val="333333"/>
-                </a:solidFill>
-                <a:latin typeface="Calibri"/>
-              </a:defRPr>
-            </a:pPr>
-            <a:r>
-              <a:t>Bilgi tabanı (indekslenmiş belgeler):</a:t>
-            </a:r>
-          </a:p>
-          <a:p>
-            <a:pPr lvl="1">
-              <a:spcAft>
-                <a:spcPts val="800"/>
-              </a:spcAft>
-              <a:defRPr sz="1400">
-                <a:solidFill>
-                  <a:srgbClr val="666666"/>
-                </a:solidFill>
-                <a:latin typeface="Calibri"/>
-              </a:defRPr>
-            </a:pPr>
-            <a:r>
-              <a:t>TBDY-2018 yönetmelik hükümleri</a:t>
-            </a:r>
-          </a:p>
-          <a:p>
-            <a:pPr lvl="1">
-              <a:spcAft>
-                <a:spcPts val="800"/>
-              </a:spcAft>
-              <a:defRPr sz="1400">
-                <a:solidFill>
-                  <a:srgbClr val="666666"/>
-                </a:solidFill>
-                <a:latin typeface="Calibri"/>
-              </a:defRPr>
-            </a:pPr>
-            <a:r>
-              <a:t>Zemin sınıfı bilgileri (Vs30 haritaları)</a:t>
-            </a:r>
-          </a:p>
-          <a:p>
-            <a:pPr>
-              <a:spcAft>
-                <a:spcPts val="800"/>
-              </a:spcAft>
-              <a:defRPr sz="1600">
-                <a:solidFill>
-                  <a:srgbClr val="333333"/>
-                </a:solidFill>
-                <a:latin typeface="Calibri"/>
-              </a:defRPr>
-            </a:pPr>
-          </a:p>
-          <a:p>
-            <a:pPr>
-              <a:spcAft>
-                <a:spcPts val="800"/>
-              </a:spcAft>
-              <a:defRPr sz="1600">
-                <a:solidFill>
-                  <a:srgbClr val="333333"/>
-                </a:solidFill>
-                <a:latin typeface="Calibri"/>
-              </a:defRPr>
-            </a:pPr>
-            <a:r>
-              <a:t>Mimari: Retrieval-Augmented Generation (RAG)</a:t>
-            </a:r>
-          </a:p>
-          <a:p>
-            <a:pPr lvl="1">
-              <a:spcAft>
-                <a:spcPts val="800"/>
-              </a:spcAft>
-              <a:defRPr sz="1400">
-                <a:solidFill>
-                  <a:srgbClr val="666666"/>
-                </a:solidFill>
-                <a:latin typeface="Calibri"/>
-              </a:defRPr>
-            </a:pPr>
-            <a:r>
-              <a:t>Dil modeli yalnızca indekslenmiş belgelerden yanıt üretir</a:t>
-            </a:r>
-          </a:p>
-          <a:p>
-            <a:pPr lvl="1">
-              <a:spcAft>
-                <a:spcPts val="800"/>
-              </a:spcAft>
-              <a:defRPr sz="1400">
-                <a:solidFill>
-                  <a:srgbClr val="666666"/>
-                </a:solidFill>
-                <a:latin typeface="Calibri"/>
-              </a:defRPr>
-            </a:pPr>
-            <a:r>
-              <a:t>Her yanıtın kaynak belgesi izlenebilir</a:t>
-            </a:r>
-          </a:p>
-          <a:p>
-            <a:pPr lvl="1">
-              <a:spcAft>
-                <a:spcPts val="800"/>
-              </a:spcAft>
-              <a:defRPr sz="1400">
-                <a:solidFill>
-                  <a:srgbClr val="666666"/>
-                </a:solidFill>
-                <a:latin typeface="Calibri"/>
-              </a:defRPr>
-            </a:pPr>
-            <a:r>
-              <a:t>Halüsinas yon riski minimize edilir</a:t>
-            </a:r>
-          </a:p>
-          <a:p>
-            <a:pPr>
-              <a:spcAft>
-                <a:spcPts val="800"/>
-              </a:spcAft>
-              <a:defRPr sz="1600">
-                <a:solidFill>
-                  <a:srgbClr val="333333"/>
-                </a:solidFill>
-                <a:latin typeface="Calibri"/>
-              </a:defRPr>
-            </a:pPr>
-          </a:p>
-          <a:p>
-            <a:pPr>
-              <a:spcAft>
-                <a:spcPts val="800"/>
-              </a:spcAft>
-              <a:defRPr sz="1600">
-                <a:solidFill>
-                  <a:srgbClr val="333333"/>
-                </a:solidFill>
-                <a:latin typeface="Calibri"/>
-              </a:defRPr>
-            </a:pPr>
-            <a:r>
-              <a:t>Amaç:</a:t>
-            </a:r>
-          </a:p>
-          <a:p>
-            <a:pPr lvl="1">
-              <a:spcAft>
-                <a:spcPts val="800"/>
-              </a:spcAft>
-              <a:defRPr sz="1400">
-                <a:solidFill>
-                  <a:srgbClr val="666666"/>
-                </a:solidFill>
-                <a:latin typeface="Calibri"/>
-              </a:defRPr>
-            </a:pPr>
-            <a:r>
-              <a:t>'Bu bölgede şu mikro-sismik aktivite tespit edilmiştir;</a:t>
-            </a:r>
-          </a:p>
-          <a:p>
-            <a:pPr lvl="1">
-              <a:spcAft>
-                <a:spcPts val="800"/>
-              </a:spcAft>
-              <a:defRPr sz="1400">
-                <a:solidFill>
-                  <a:srgbClr val="666666"/>
-                </a:solidFill>
-                <a:latin typeface="Calibri"/>
-              </a:defRPr>
-            </a:pPr>
-            <a:r>
-              <a:t> TBDY-2018 kapsamında şu değerlendirmeler geçerlidir.'</a:t>
-            </a:r>
-          </a:p>
-        </p:txBody>
-      </p:sp>
-      <p:sp>
-        <p:nvSpPr>
-          <p:cNvPr id="4" name="TextBox 3"/>
+            <a:pPr algn="l">
+              <a:defRPr sz="2600" b="1" i="0">
+                <a:solidFill>
+                  <a:srgbClr val="FFFFFF"/>
+                </a:solidFill>
+                <a:latin typeface="Calibri Light"/>
+              </a:defRPr>
+            </a:pPr>
+            <a:r>
+              <a:t>Yönetmelik Beyni: TBDY-2018 Temelli Raporlama</a:t>
+            </a:r>
+          </a:p>
+        </p:txBody>
+      </p:sp>
+      <p:sp>
+        <p:nvSpPr>
+          <p:cNvPr id="5" name="TextBox 4"/>
           <p:cNvSpPr txBox="1"/>
           <p:nvPr/>
         </p:nvSpPr>
         <p:spPr>
           <a:xfrm>
-            <a:off x="457200" y="6217920"/>
+            <a:off x="548640" y="731520"/>
             <a:ext cx="8229600" cy="365760"/>
           </a:xfrm>
           <a:prstGeom prst="rect">
@@ -5761,21 +6407,437 @@
           <a:noFill/>
         </p:spPr>
         <p:txBody>
-          <a:bodyPr wrap="none">
+          <a:bodyPr wrap="square" anchor="t">
             <a:spAutoFit/>
           </a:bodyPr>
           <a:lstStyle/>
           <a:p>
-            <a:pPr>
-              <a:defRPr sz="1000" i="1">
-                <a:solidFill>
-                  <a:srgbClr val="666666"/>
-                </a:solidFill>
-                <a:latin typeface="Calibri"/>
-              </a:defRPr>
-            </a:pPr>
-            <a:r>
-              <a:t>RAG: Wang vd. (2025). J. Building Engineering, 103, 112189.</a:t>
+            <a:pPr algn="l">
+              <a:defRPr sz="1300" b="0" i="1">
+                <a:solidFill>
+                  <a:srgbClr val="B4C3D7"/>
+                </a:solidFill>
+                <a:latin typeface="Calibri"/>
+              </a:defRPr>
+            </a:pPr>
+            <a:r>
+              <a:t>Sıfır halüsinasyon mimarisi — her iddia kaynağa bağlı</a:t>
+            </a:r>
+          </a:p>
+        </p:txBody>
+      </p:sp>
+      <p:sp>
+        <p:nvSpPr>
+          <p:cNvPr id="6" name="Rounded Rectangle 5"/>
+          <p:cNvSpPr/>
+          <p:nvPr/>
+        </p:nvSpPr>
+        <p:spPr>
+          <a:xfrm>
+            <a:off x="457200" y="1463040"/>
+            <a:ext cx="5029200" cy="3657600"/>
+          </a:xfrm>
+          <a:prstGeom prst="roundRect">
+            <a:avLst/>
+          </a:prstGeom>
+          <a:solidFill>
+            <a:srgbClr val="F5F8FC"/>
+          </a:solidFill>
+          <a:ln w="19050">
+            <a:solidFill>
+              <a:srgbClr val="3278C8"/>
+            </a:solidFill>
+          </a:ln>
+        </p:spPr>
+        <p:style>
+          <a:lnRef idx="1">
+            <a:schemeClr val="accent1"/>
+          </a:lnRef>
+          <a:fillRef idx="3">
+            <a:schemeClr val="accent1"/>
+          </a:fillRef>
+          <a:effectRef idx="2">
+            <a:schemeClr val="accent1"/>
+          </a:effectRef>
+          <a:fontRef idx="minor">
+            <a:schemeClr val="lt1"/>
+          </a:fontRef>
+        </p:style>
+        <p:txBody>
+          <a:bodyPr rtlCol="0" anchor="ctr" wrap="square" lIns="182880" tIns="137160"/>
+          <a:lstStyle/>
+          <a:p>
+            <a:pPr algn="ctr">
+              <a:defRPr sz="1100" b="1">
+                <a:solidFill>
+                  <a:srgbClr val="3278C8"/>
+                </a:solidFill>
+                <a:latin typeface="Calibri"/>
+              </a:defRPr>
+            </a:pPr>
+            <a:r>
+              <a:t>ÖRNEK ÇIKTI:</a:t>
+            </a:r>
+          </a:p>
+          <a:p>
+            <a:pPr>
+              <a:defRPr sz="400" b="0">
+                <a:solidFill>
+                  <a:srgbClr val="23232D"/>
+                </a:solidFill>
+                <a:latin typeface="Calibri"/>
+              </a:defRPr>
+            </a:pPr>
+          </a:p>
+          <a:p>
+            <a:pPr>
+              <a:defRPr sz="1200" b="0">
+                <a:solidFill>
+                  <a:srgbClr val="23232D"/>
+                </a:solidFill>
+                <a:latin typeface="Consolas"/>
+              </a:defRPr>
+            </a:pPr>
+            <a:r>
+              <a:t>"37.8°N, 27.2°E konumunda M1.8 olay tespit</a:t>
+            </a:r>
+          </a:p>
+          <a:p>
+            <a:pPr>
+              <a:defRPr sz="1200" b="0">
+                <a:solidFill>
+                  <a:srgbClr val="23232D"/>
+                </a:solidFill>
+                <a:latin typeface="Consolas"/>
+              </a:defRPr>
+            </a:pPr>
+            <a:r>
+              <a:t>edilmiştir. TBDY-2018 Madde 2.1'e göre bu</a:t>
+            </a:r>
+          </a:p>
+          <a:p>
+            <a:pPr>
+              <a:defRPr sz="1200" b="0">
+                <a:solidFill>
+                  <a:srgbClr val="23232D"/>
+                </a:solidFill>
+                <a:latin typeface="Consolas"/>
+              </a:defRPr>
+            </a:pPr>
+            <a:r>
+              <a:t>bölge 1. derece deprem bölgesindedir.</a:t>
+            </a:r>
+          </a:p>
+          <a:p>
+            <a:pPr>
+              <a:defRPr sz="400" b="0">
+                <a:solidFill>
+                  <a:srgbClr val="23232D"/>
+                </a:solidFill>
+                <a:latin typeface="Consolas"/>
+              </a:defRPr>
+            </a:pPr>
+          </a:p>
+          <a:p>
+            <a:pPr>
+              <a:defRPr sz="1200" b="0">
+                <a:solidFill>
+                  <a:srgbClr val="23232D"/>
+                </a:solidFill>
+                <a:latin typeface="Consolas"/>
+              </a:defRPr>
+            </a:pPr>
+            <a:r>
+              <a:t>Zemin sınıfı: ZC (Vs30 ≈ 280 m/s).</a:t>
+            </a:r>
+          </a:p>
+          <a:p>
+            <a:pPr>
+              <a:defRPr sz="400" b="0">
+                <a:solidFill>
+                  <a:srgbClr val="23232D"/>
+                </a:solidFill>
+                <a:latin typeface="Consolas"/>
+              </a:defRPr>
+            </a:pPr>
+          </a:p>
+          <a:p>
+            <a:pPr>
+              <a:defRPr sz="1100" b="0">
+                <a:solidFill>
+                  <a:srgbClr val="3278C8"/>
+                </a:solidFill>
+                <a:latin typeface="Consolas"/>
+              </a:defRPr>
+            </a:pPr>
+            <a:r>
+              <a:t>Referans: TBDY-2018 Tablo 2.1, Madde 16.5"</a:t>
+            </a:r>
+          </a:p>
+          <a:p>
+            <a:pPr>
+              <a:defRPr sz="400" b="0">
+                <a:solidFill>
+                  <a:srgbClr val="23232D"/>
+                </a:solidFill>
+                <a:latin typeface="Consolas"/>
+              </a:defRPr>
+            </a:pPr>
+          </a:p>
+          <a:p>
+            <a:pPr>
+              <a:defRPr sz="1000" b="0">
+                <a:solidFill>
+                  <a:srgbClr val="B43232"/>
+                </a:solidFill>
+                <a:latin typeface="Consolas"/>
+              </a:defRPr>
+            </a:pPr>
+            <a:r>
+              <a:t>⚠ Bu olasılıksal model tahminlerine</a:t>
+            </a:r>
+          </a:p>
+          <a:p>
+            <a:pPr>
+              <a:defRPr sz="1000" b="0">
+                <a:solidFill>
+                  <a:srgbClr val="B43232"/>
+                </a:solidFill>
+                <a:latin typeface="Consolas"/>
+              </a:defRPr>
+            </a:pPr>
+            <a:r>
+              <a:t>dayanmaktadır. Nihai karar yetkili</a:t>
+            </a:r>
+          </a:p>
+          <a:p>
+            <a:pPr>
+              <a:defRPr sz="1000" b="0">
+                <a:solidFill>
+                  <a:srgbClr val="B43232"/>
+                </a:solidFill>
+                <a:latin typeface="Consolas"/>
+              </a:defRPr>
+            </a:pPr>
+            <a:r>
+              <a:t>mühendise aittir.</a:t>
+            </a:r>
+          </a:p>
+        </p:txBody>
+      </p:sp>
+      <p:sp>
+        <p:nvSpPr>
+          <p:cNvPr id="7" name="TextBox 6"/>
+          <p:cNvSpPr txBox="1"/>
+          <p:nvPr/>
+        </p:nvSpPr>
+        <p:spPr>
+          <a:xfrm>
+            <a:off x="5669280" y="1463040"/>
+            <a:ext cx="3200400" cy="4114800"/>
+          </a:xfrm>
+          <a:prstGeom prst="rect">
+            <a:avLst/>
+          </a:prstGeom>
+          <a:noFill/>
+        </p:spPr>
+        <p:txBody>
+          <a:bodyPr wrap="square">
+            <a:spAutoFit/>
+          </a:bodyPr>
+          <a:lstStyle/>
+          <a:p>
+            <a:pPr>
+              <a:spcBef>
+                <a:spcPts val="0"/>
+              </a:spcBef>
+              <a:spcAft>
+                <a:spcPts val="600"/>
+              </a:spcAft>
+              <a:defRPr sz="1500" b="1" i="0">
+                <a:solidFill>
+                  <a:srgbClr val="002855"/>
+                </a:solidFill>
+                <a:latin typeface="Calibri"/>
+              </a:defRPr>
+            </a:pPr>
+            <a:r>
+              <a:t>RAG Mimarisi:</a:t>
+            </a:r>
+          </a:p>
+          <a:p>
+            <a:pPr>
+              <a:spcAft>
+                <a:spcPts val="600"/>
+              </a:spcAft>
+              <a:defRPr sz="1300">
+                <a:solidFill>
+                  <a:srgbClr val="23232D"/>
+                </a:solidFill>
+                <a:latin typeface="Calibri"/>
+              </a:defRPr>
+            </a:pPr>
+            <a:r>
+              <a:t>Belge → chunk → embedding</a:t>
+            </a:r>
+          </a:p>
+          <a:p>
+            <a:pPr>
+              <a:spcAft>
+                <a:spcPts val="600"/>
+              </a:spcAft>
+              <a:defRPr sz="1300">
+                <a:solidFill>
+                  <a:srgbClr val="23232D"/>
+                </a:solidFill>
+                <a:latin typeface="Calibri"/>
+              </a:defRPr>
+            </a:pPr>
+            <a:r>
+              <a:t>→ FAISS indeksi</a:t>
+            </a:r>
+          </a:p>
+          <a:p>
+            <a:pPr>
+              <a:spcAft>
+                <a:spcPts val="600"/>
+              </a:spcAft>
+              <a:defRPr sz="1300">
+                <a:solidFill>
+                  <a:srgbClr val="23232D"/>
+                </a:solidFill>
+                <a:latin typeface="Calibri"/>
+              </a:defRPr>
+            </a:pPr>
+            <a:r>
+              <a:t>→ Sorgu ile en yakın k=5 parça</a:t>
+            </a:r>
+          </a:p>
+          <a:p>
+            <a:pPr>
+              <a:spcAft>
+                <a:spcPts val="600"/>
+              </a:spcAft>
+              <a:defRPr sz="1300">
+                <a:solidFill>
+                  <a:srgbClr val="23232D"/>
+                </a:solidFill>
+                <a:latin typeface="Calibri"/>
+              </a:defRPr>
+            </a:pPr>
+            <a:r>
+              <a:t>→ LLM'e bağlam olarak verilir</a:t>
+            </a:r>
+          </a:p>
+          <a:p>
+            <a:pPr>
+              <a:spcAft>
+                <a:spcPts val="600"/>
+              </a:spcAft>
+              <a:defRPr sz="800"/>
+            </a:pPr>
+          </a:p>
+          <a:p>
+            <a:pPr>
+              <a:spcBef>
+                <a:spcPts val="0"/>
+              </a:spcBef>
+              <a:spcAft>
+                <a:spcPts val="600"/>
+              </a:spcAft>
+              <a:defRPr sz="1500" b="1" i="0">
+                <a:solidFill>
+                  <a:srgbClr val="002855"/>
+                </a:solidFill>
+                <a:latin typeface="Calibri"/>
+              </a:defRPr>
+            </a:pPr>
+            <a:r>
+              <a:t>Sonuç:</a:t>
+            </a:r>
+          </a:p>
+          <a:p>
+            <a:pPr>
+              <a:spcAft>
+                <a:spcPts val="600"/>
+              </a:spcAft>
+              <a:defRPr sz="1300">
+                <a:solidFill>
+                  <a:srgbClr val="23232D"/>
+                </a:solidFill>
+                <a:latin typeface="Calibri"/>
+              </a:defRPr>
+            </a:pPr>
+            <a:r>
+              <a:t>Kaynağı olmayan bilgi üretilemez</a:t>
+            </a:r>
+          </a:p>
+          <a:p>
+            <a:pPr>
+              <a:spcAft>
+                <a:spcPts val="600"/>
+              </a:spcAft>
+              <a:defRPr sz="1300">
+                <a:solidFill>
+                  <a:srgbClr val="23232D"/>
+                </a:solidFill>
+                <a:latin typeface="Calibri"/>
+              </a:defRPr>
+            </a:pPr>
+            <a:r>
+              <a:t>Her iddia belgeye bağlı</a:t>
+            </a:r>
+          </a:p>
+          <a:p>
+            <a:pPr>
+              <a:spcAft>
+                <a:spcPts val="600"/>
+              </a:spcAft>
+              <a:defRPr sz="1300">
+                <a:solidFill>
+                  <a:srgbClr val="23232D"/>
+                </a:solidFill>
+                <a:latin typeface="Calibri"/>
+              </a:defRPr>
+            </a:pPr>
+            <a:r>
+              <a:t>Kapsam dışı sorular reddedilir</a:t>
+            </a:r>
+          </a:p>
+        </p:txBody>
+      </p:sp>
+      <p:sp>
+        <p:nvSpPr>
+          <p:cNvPr id="8" name="TextBox 7"/>
+          <p:cNvSpPr txBox="1"/>
+          <p:nvPr/>
+        </p:nvSpPr>
+        <p:spPr>
+          <a:xfrm>
+            <a:off x="457200" y="6400800"/>
+            <a:ext cx="8229600" cy="274320"/>
+          </a:xfrm>
+          <a:prstGeom prst="rect">
+            <a:avLst/>
+          </a:prstGeom>
+          <a:noFill/>
+        </p:spPr>
+        <p:txBody>
+          <a:bodyPr wrap="square" anchor="t">
+            <a:spAutoFit/>
+          </a:bodyPr>
+          <a:lstStyle/>
+          <a:p>
+            <a:pPr algn="l">
+              <a:defRPr sz="900" b="0" i="1">
+                <a:solidFill>
+                  <a:srgbClr val="5A5F69"/>
+                </a:solidFill>
+                <a:latin typeface="Calibri"/>
+              </a:defRPr>
+            </a:pPr>
+            <a:r>
+              <a:t>31 TBDY-2018 maddesi + 15 proje artifaktı = 46 doğrulanmış bilgi kaynağı</a:t>
             </a:r>
           </a:p>
         </p:txBody>
@@ -5794,7 +6856,7 @@
     <p:bg>
       <p:bgPr>
         <a:solidFill>
-          <a:srgbClr val="FFFFFF"/>
+          <a:srgbClr val="F8FAFC"/>
         </a:solidFill>
         <a:effectLst/>
       </p:bgPr>
@@ -5815,13 +6877,13 @@
         <p:spPr>
           <a:xfrm>
             <a:off x="0" y="0"/>
-            <a:ext cx="9144000" cy="1097280"/>
+            <a:ext cx="9144000" cy="1188720"/>
           </a:xfrm>
           <a:prstGeom prst="rect">
             <a:avLst/>
           </a:prstGeom>
           <a:solidFill>
-            <a:srgbClr val="003366"/>
+            <a:srgbClr val="002855"/>
           </a:solidFill>
           <a:ln>
             <a:noFill/>
@@ -5842,33 +6904,66 @@
           </a:fontRef>
         </p:style>
         <p:txBody>
-          <a:bodyPr rtlCol="0" anchor="ctr" wrap="square" lIns="457200"/>
-          <a:lstStyle/>
-          <a:p>
-            <a:pPr algn="l">
-              <a:defRPr sz="2800" b="1">
-                <a:solidFill>
-                  <a:srgbClr val="FFFFFF"/>
-                </a:solidFill>
-                <a:latin typeface="Calibri"/>
-              </a:defRPr>
-            </a:pPr>
-            <a:r>
-              <a:t>Özgün Katkı</a:t>
-            </a:r>
-          </a:p>
-        </p:txBody>
-      </p:sp>
-      <p:sp>
-        <p:nvSpPr>
-          <p:cNvPr id="3" name="TextBox 2"/>
+          <a:bodyPr rtlCol="0" anchor="ctr"/>
+          <a:lstStyle/>
+          <a:p>
+            <a:pPr algn="ctr"/>
+          </a:p>
+        </p:txBody>
+      </p:sp>
+      <p:sp>
+        <p:nvSpPr>
+          <p:cNvPr id="3" name="Rectangle 2"/>
+          <p:cNvSpPr/>
+          <p:nvPr/>
+        </p:nvSpPr>
+        <p:spPr>
+          <a:xfrm>
+            <a:off x="0" y="1188720"/>
+            <a:ext cx="9144000" cy="54864"/>
+          </a:xfrm>
+          <a:prstGeom prst="rect">
+            <a:avLst/>
+          </a:prstGeom>
+          <a:solidFill>
+            <a:srgbClr val="C39B2D"/>
+          </a:solidFill>
+          <a:ln>
+            <a:noFill/>
+          </a:ln>
+        </p:spPr>
+        <p:style>
+          <a:lnRef idx="1">
+            <a:schemeClr val="accent1"/>
+          </a:lnRef>
+          <a:fillRef idx="3">
+            <a:schemeClr val="accent1"/>
+          </a:fillRef>
+          <a:effectRef idx="2">
+            <a:schemeClr val="accent1"/>
+          </a:effectRef>
+          <a:fontRef idx="minor">
+            <a:schemeClr val="lt1"/>
+          </a:fontRef>
+        </p:style>
+        <p:txBody>
+          <a:bodyPr rtlCol="0" anchor="ctr"/>
+          <a:lstStyle/>
+          <a:p>
+            <a:pPr algn="ctr"/>
+          </a:p>
+        </p:txBody>
+      </p:sp>
+      <p:sp>
+        <p:nvSpPr>
+          <p:cNvPr id="4" name="TextBox 3"/>
           <p:cNvSpPr txBox="1"/>
           <p:nvPr/>
         </p:nvSpPr>
         <p:spPr>
           <a:xfrm>
-            <a:off x="457200" y="1371600"/>
-            <a:ext cx="8229600" cy="4572000"/>
+            <a:off x="548640" y="137160"/>
+            <a:ext cx="8229600" cy="731520"/>
           </a:xfrm>
           <a:prstGeom prst="rect">
             <a:avLst/>
@@ -5876,204 +6971,333 @@
           <a:noFill/>
         </p:spPr>
         <p:txBody>
+          <a:bodyPr wrap="square" anchor="t">
+            <a:spAutoFit/>
+          </a:bodyPr>
+          <a:lstStyle/>
+          <a:p>
+            <a:pPr algn="l">
+              <a:defRPr sz="2600" b="1" i="0">
+                <a:solidFill>
+                  <a:srgbClr val="FFFFFF"/>
+                </a:solidFill>
+                <a:latin typeface="Calibri Light"/>
+              </a:defRPr>
+            </a:pPr>
+            <a:r>
+              <a:t>Canlı Demo: Replay Buffer ve İzleme Arayüzü</a:t>
+            </a:r>
+          </a:p>
+        </p:txBody>
+      </p:sp>
+      <p:sp>
+        <p:nvSpPr>
+          <p:cNvPr id="5" name="TextBox 4"/>
+          <p:cNvSpPr txBox="1"/>
+          <p:nvPr/>
+        </p:nvSpPr>
+        <p:spPr>
+          <a:xfrm>
+            <a:off x="548640" y="731520"/>
+            <a:ext cx="8229600" cy="365760"/>
+          </a:xfrm>
+          <a:prstGeom prst="rect">
+            <a:avLst/>
+          </a:prstGeom>
+          <a:noFill/>
+        </p:spPr>
+        <p:txBody>
+          <a:bodyPr wrap="square" anchor="t">
+            <a:spAutoFit/>
+          </a:bodyPr>
+          <a:lstStyle/>
+          <a:p>
+            <a:pPr algn="l">
+              <a:defRPr sz="1300" b="0" i="1">
+                <a:solidFill>
+                  <a:srgbClr val="B4C3D7"/>
+                </a:solidFill>
+                <a:latin typeface="Calibri"/>
+              </a:defRPr>
+            </a:pPr>
+            <a:r>
+              <a:t>Güvenli simülasyon — gerçek KOERI verileri, kontrollü oynatım</a:t>
+            </a:r>
+          </a:p>
+        </p:txBody>
+      </p:sp>
+      <p:sp>
+        <p:nvSpPr>
+          <p:cNvPr id="6" name="TextBox 5"/>
+          <p:cNvSpPr txBox="1"/>
+          <p:nvPr/>
+        </p:nvSpPr>
+        <p:spPr>
+          <a:xfrm>
+            <a:off x="548640" y="1371600"/>
+            <a:ext cx="8229600" cy="5029200"/>
+          </a:xfrm>
+          <a:prstGeom prst="rect">
+            <a:avLst/>
+          </a:prstGeom>
+          <a:noFill/>
+        </p:spPr>
+        <p:txBody>
           <a:bodyPr wrap="square">
             <a:spAutoFit/>
           </a:bodyPr>
           <a:lstStyle/>
           <a:p>
             <a:pPr>
+              <a:spcBef>
+                <a:spcPts val="0"/>
+              </a:spcBef>
               <a:spcAft>
-                <a:spcPts val="800"/>
+                <a:spcPts val="600"/>
               </a:spcAft>
-              <a:defRPr sz="1700">
-                <a:solidFill>
-                  <a:srgbClr val="333333"/>
-                </a:solidFill>
-                <a:latin typeface="Calibri"/>
-              </a:defRPr>
-            </a:pPr>
-            <a:r>
-              <a:t>Projenin temel özgün katkısı:</a:t>
+              <a:defRPr sz="1600" b="1" i="0">
+                <a:solidFill>
+                  <a:srgbClr val="002855"/>
+                </a:solidFill>
+                <a:latin typeface="Calibri"/>
+              </a:defRPr>
+            </a:pPr>
+            <a:r>
+              <a:t>Akış Mimarisi:</a:t>
             </a:r>
           </a:p>
           <a:p>
             <a:pPr>
               <a:spcAft>
-                <a:spcPts val="800"/>
+                <a:spcPts val="600"/>
               </a:spcAft>
-              <a:defRPr sz="1700">
-                <a:solidFill>
-                  <a:srgbClr val="333333"/>
-                </a:solidFill>
-                <a:latin typeface="Calibri"/>
-              </a:defRPr>
-            </a:pPr>
+              <a:defRPr sz="1400">
+                <a:solidFill>
+                  <a:srgbClr val="23232D"/>
+                </a:solidFill>
+                <a:latin typeface="Calibri"/>
+              </a:defRPr>
+            </a:pPr>
+            <a:r>
+              <a:t>Replay Buffer: Arşivlenmiş KOERI verileri → kayan pencere (60s)</a:t>
+            </a:r>
           </a:p>
           <a:p>
             <a:pPr>
               <a:spcAft>
-                <a:spcPts val="800"/>
+                <a:spcPts val="600"/>
               </a:spcAft>
-              <a:defRPr sz="1700">
-                <a:solidFill>
-                  <a:srgbClr val="333333"/>
-                </a:solidFill>
-                <a:latin typeface="Calibri"/>
-              </a:defRPr>
-            </a:pPr>
-            <a:r>
-              <a:t>Derin öğrenme tabanlı mikro-sismik tespit mekanizması ile</a:t>
+              <a:defRPr sz="1400">
+                <a:solidFill>
+                  <a:srgbClr val="23232D"/>
+                </a:solidFill>
+                <a:latin typeface="Calibri"/>
+              </a:defRPr>
+            </a:pPr>
+            <a:r>
+              <a:t>Ring Buffer: Son N pencereyi bellekte tutar</a:t>
             </a:r>
           </a:p>
           <a:p>
             <a:pPr>
               <a:spcAft>
-                <a:spcPts val="800"/>
+                <a:spcPts val="600"/>
               </a:spcAft>
-              <a:defRPr sz="1700">
-                <a:solidFill>
-                  <a:srgbClr val="333333"/>
-                </a:solidFill>
-                <a:latin typeface="Calibri"/>
-              </a:defRPr>
-            </a:pPr>
-            <a:r>
-              <a:t>LLM tabanlı yönetmelik-duyarlı karar destek modülünü</a:t>
+              <a:defRPr sz="1400">
+                <a:solidFill>
+                  <a:srgbClr val="23232D"/>
+                </a:solidFill>
+                <a:latin typeface="Calibri"/>
+              </a:defRPr>
+            </a:pPr>
+            <a:r>
+              <a:t>Her pencere: GPD+SVM tetikleme → PhaseNet (eğer olay) → RAG raporu</a:t>
             </a:r>
           </a:p>
           <a:p>
             <a:pPr>
               <a:spcAft>
-                <a:spcPts val="800"/>
+                <a:spcPts val="600"/>
               </a:spcAft>
-              <a:defRPr sz="1700">
-                <a:solidFill>
-                  <a:srgbClr val="333333"/>
-                </a:solidFill>
-                <a:latin typeface="Calibri"/>
-              </a:defRPr>
-            </a:pPr>
-            <a:r>
-              <a:t>tek bir pipeline içinde birleştiren ve bunu doğrudan</a:t>
-            </a:r>
-          </a:p>
-          <a:p>
-            <a:pPr>
+              <a:defRPr sz="800"/>
+            </a:pPr>
+          </a:p>
+          <a:p>
+            <a:pPr>
+              <a:spcBef>
+                <a:spcPts val="0"/>
+              </a:spcBef>
               <a:spcAft>
-                <a:spcPts val="800"/>
+                <a:spcPts val="600"/>
               </a:spcAft>
-              <a:defRPr sz="1700">
-                <a:solidFill>
-                  <a:srgbClr val="333333"/>
-                </a:solidFill>
-                <a:latin typeface="Calibri"/>
-              </a:defRPr>
-            </a:pPr>
-            <a:r>
-              <a:t>Türkiye sismik verisi üzerinde uygulayan</a:t>
+              <a:defRPr sz="1600" b="1" i="0">
+                <a:solidFill>
+                  <a:srgbClr val="002855"/>
+                </a:solidFill>
+                <a:latin typeface="Calibri"/>
+              </a:defRPr>
+            </a:pPr>
+            <a:r>
+              <a:t>Demo UI (Streamlit — 3 sekme):</a:t>
             </a:r>
           </a:p>
           <a:p>
             <a:pPr>
               <a:spcAft>
-                <a:spcPts val="800"/>
+                <a:spcPts val="600"/>
               </a:spcAft>
-              <a:defRPr sz="1700">
-                <a:solidFill>
-                  <a:srgbClr val="333333"/>
-                </a:solidFill>
-                <a:latin typeface="Calibri"/>
-              </a:defRPr>
-            </a:pPr>
+              <a:defRPr sz="1400">
+                <a:solidFill>
+                  <a:srgbClr val="23232D"/>
+                </a:solidFill>
+                <a:latin typeface="Calibri"/>
+              </a:defRPr>
+            </a:pPr>
+            <a:r>
+              <a:t>Sekme 1: İnteraktif olay haritası (Marmara bölgesi)</a:t>
+            </a:r>
           </a:p>
           <a:p>
             <a:pPr>
               <a:spcAft>
-                <a:spcPts val="800"/>
+                <a:spcPts val="600"/>
               </a:spcAft>
-              <a:defRPr sz="1700">
-                <a:solidFill>
-                  <a:srgbClr val="333333"/>
-                </a:solidFill>
-                <a:latin typeface="Calibri"/>
-              </a:defRPr>
-            </a:pPr>
-            <a:r>
-              <a:t>     ilk entegre mimari önerisi.</a:t>
+              <a:defRPr sz="1400">
+                <a:solidFill>
+                  <a:srgbClr val="23232D"/>
+                </a:solidFill>
+                <a:latin typeface="Calibri"/>
+              </a:defRPr>
+            </a:pPr>
+            <a:r>
+              <a:t>Sekme 2: Dalga formu görüntüleyici + P/S pick çizgileri</a:t>
             </a:r>
           </a:p>
           <a:p>
             <a:pPr>
               <a:spcAft>
-                <a:spcPts val="800"/>
+                <a:spcPts val="600"/>
               </a:spcAft>
-              <a:defRPr sz="1700">
-                <a:solidFill>
-                  <a:srgbClr val="333333"/>
-                </a:solidFill>
-                <a:latin typeface="Calibri"/>
-              </a:defRPr>
-            </a:pPr>
+              <a:defRPr sz="1400">
+                <a:solidFill>
+                  <a:srgbClr val="23232D"/>
+                </a:solidFill>
+                <a:latin typeface="Calibri"/>
+              </a:defRPr>
+            </a:pPr>
+            <a:r>
+              <a:t>Sekme 3: LLM soru-cevap (yalnızca proje artifaktları üzerinden)</a:t>
+            </a:r>
           </a:p>
           <a:p>
             <a:pPr>
               <a:spcAft>
-                <a:spcPts val="800"/>
+                <a:spcPts val="600"/>
               </a:spcAft>
-              <a:defRPr sz="1700">
-                <a:solidFill>
-                  <a:srgbClr val="333333"/>
-                </a:solidFill>
-                <a:latin typeface="Calibri"/>
-              </a:defRPr>
-            </a:pPr>
-          </a:p>
-          <a:p>
-            <a:pPr>
+              <a:defRPr sz="800"/>
+            </a:pPr>
+          </a:p>
+          <a:p>
+            <a:pPr>
+              <a:spcBef>
+                <a:spcPts val="0"/>
+              </a:spcBef>
               <a:spcAft>
-                <a:spcPts val="800"/>
+                <a:spcPts val="600"/>
               </a:spcAft>
-              <a:defRPr sz="1700">
-                <a:solidFill>
-                  <a:srgbClr val="333333"/>
-                </a:solidFill>
-                <a:latin typeface="Calibri"/>
-              </a:defRPr>
-            </a:pPr>
-            <a:r>
-              <a:t>Bu iki bileşeni — otomatik sismik tespit ve yönetmelik-duyarlı</a:t>
+              <a:defRPr sz="1600" b="1" i="0">
+                <a:solidFill>
+                  <a:srgbClr val="002855"/>
+                </a:solidFill>
+                <a:latin typeface="Calibri"/>
+              </a:defRPr>
+            </a:pPr>
+            <a:r>
+              <a:t>Neden Replay Buffer (canlı veri değil)?</a:t>
             </a:r>
           </a:p>
           <a:p>
             <a:pPr>
               <a:spcAft>
-                <a:spcPts val="800"/>
+                <a:spcPts val="600"/>
               </a:spcAft>
-              <a:defRPr sz="1700">
-                <a:solidFill>
-                  <a:srgbClr val="333333"/>
-                </a:solidFill>
-                <a:latin typeface="Calibri"/>
-              </a:defRPr>
-            </a:pPr>
-            <a:r>
-              <a:t>yapay zeka raporlama — tek bir entegre sistemde birleştiren</a:t>
+              <a:defRPr sz="1400">
+                <a:solidFill>
+                  <a:srgbClr val="23232D"/>
+                </a:solidFill>
+                <a:latin typeface="Calibri"/>
+              </a:defRPr>
+            </a:pPr>
+            <a:r>
+              <a:t>• FDSN web servisi ~30-60s gecikme → gerçek zamanlı değil</a:t>
             </a:r>
           </a:p>
           <a:p>
             <a:pPr>
               <a:spcAft>
-                <a:spcPts val="800"/>
+                <a:spcPts val="600"/>
               </a:spcAft>
-              <a:defRPr sz="1700">
-                <a:solidFill>
-                  <a:srgbClr val="333333"/>
-                </a:solidFill>
-                <a:latin typeface="Calibri"/>
-              </a:defRPr>
-            </a:pPr>
-            <a:r>
-              <a:t>bir çalışma Türkiye bağlamında daha önce önerilmemiştir.</a:t>
+              <a:defRPr sz="1400">
+                <a:solidFill>
+                  <a:srgbClr val="23232D"/>
+                </a:solidFill>
+                <a:latin typeface="Calibri"/>
+              </a:defRPr>
+            </a:pPr>
+            <a:r>
+              <a:t>• Demo güvenilirliği: internet kesintisinden bağımsız</a:t>
+            </a:r>
+          </a:p>
+          <a:p>
+            <a:pPr>
+              <a:spcAft>
+                <a:spcPts val="600"/>
+              </a:spcAft>
+              <a:defRPr sz="1400">
+                <a:solidFill>
+                  <a:srgbClr val="23232D"/>
+                </a:solidFill>
+                <a:latin typeface="Calibri"/>
+              </a:defRPr>
+            </a:pPr>
+            <a:r>
+              <a:t>• Bilimsel dürüstlük: "gerçek zamanlı" iddiası yapmıyoruz</a:t>
+            </a:r>
+          </a:p>
+        </p:txBody>
+      </p:sp>
+      <p:sp>
+        <p:nvSpPr>
+          <p:cNvPr id="7" name="TextBox 6"/>
+          <p:cNvSpPr txBox="1"/>
+          <p:nvPr/>
+        </p:nvSpPr>
+        <p:spPr>
+          <a:xfrm>
+            <a:off x="457200" y="6400800"/>
+            <a:ext cx="8229600" cy="274320"/>
+          </a:xfrm>
+          <a:prstGeom prst="rect">
+            <a:avLst/>
+          </a:prstGeom>
+          <a:noFill/>
+        </p:spPr>
+        <p:txBody>
+          <a:bodyPr wrap="square" anchor="t">
+            <a:spAutoFit/>
+          </a:bodyPr>
+          <a:lstStyle/>
+          <a:p>
+            <a:pPr algn="l">
+              <a:defRPr sz="900" b="0" i="1">
+                <a:solidFill>
+                  <a:srgbClr val="5A5F69"/>
+                </a:solidFill>
+                <a:latin typeface="Calibri"/>
+              </a:defRPr>
+            </a:pPr>
+            <a:r>
+              <a:t>Gelecek: SeedLink protokolü ile gerçek zamanlı veri akışı (sub-second gecikme)</a:t>
             </a:r>
           </a:p>
         </p:txBody>
@@ -6092,7 +7316,7 @@
     <p:bg>
       <p:bgPr>
         <a:solidFill>
-          <a:srgbClr val="FFFFFF"/>
+          <a:srgbClr val="00193C"/>
         </a:solidFill>
         <a:effectLst/>
       </p:bgPr>
@@ -6113,13 +7337,13 @@
         <p:spPr>
           <a:xfrm>
             <a:off x="0" y="0"/>
-            <a:ext cx="9144000" cy="1097280"/>
+            <a:ext cx="9144000" cy="54864"/>
           </a:xfrm>
           <a:prstGeom prst="rect">
             <a:avLst/>
           </a:prstGeom>
           <a:solidFill>
-            <a:srgbClr val="003366"/>
+            <a:srgbClr val="C39B2D"/>
           </a:solidFill>
           <a:ln>
             <a:noFill/>
@@ -6140,20 +7364,10 @@
           </a:fontRef>
         </p:style>
         <p:txBody>
-          <a:bodyPr rtlCol="0" anchor="ctr" wrap="square" lIns="457200"/>
-          <a:lstStyle/>
-          <a:p>
-            <a:pPr algn="l">
-              <a:defRPr sz="2800" b="1">
-                <a:solidFill>
-                  <a:srgbClr val="FFFFFF"/>
-                </a:solidFill>
-                <a:latin typeface="Calibri"/>
-              </a:defRPr>
-            </a:pPr>
-            <a:r>
-              <a:t>Gelecek Çalışma ve Sonuç</a:t>
-            </a:r>
+          <a:bodyPr rtlCol="0" anchor="ctr"/>
+          <a:lstStyle/>
+          <a:p>
+            <a:pPr algn="ctr"/>
           </a:p>
         </p:txBody>
       </p:sp>
@@ -6165,8 +7379,8 @@
         </p:nvSpPr>
         <p:spPr>
           <a:xfrm>
-            <a:off x="457200" y="1371600"/>
-            <a:ext cx="8229600" cy="4572000"/>
+            <a:off x="548640" y="365760"/>
+            <a:ext cx="8229600" cy="640080"/>
           </a:xfrm>
           <a:prstGeom prst="rect">
             <a:avLst/>
@@ -6174,204 +7388,82 @@
           <a:noFill/>
         </p:spPr>
         <p:txBody>
-          <a:bodyPr wrap="square">
+          <a:bodyPr wrap="square" anchor="t">
             <a:spAutoFit/>
           </a:bodyPr>
           <a:lstStyle/>
           <a:p>
-            <a:pPr>
-              <a:spcAft>
-                <a:spcPts val="800"/>
-              </a:spcAft>
-              <a:defRPr sz="1800">
-                <a:solidFill>
-                  <a:srgbClr val="333333"/>
-                </a:solidFill>
-                <a:latin typeface="Calibri"/>
-              </a:defRPr>
-            </a:pPr>
-            <a:r>
-              <a:t>Gelecek çalışma:</a:t>
-            </a:r>
-          </a:p>
-          <a:p>
-            <a:pPr lvl="1">
-              <a:spcAft>
-                <a:spcPts val="800"/>
-              </a:spcAft>
-              <a:defRPr sz="1600">
-                <a:solidFill>
-                  <a:srgbClr val="666666"/>
-                </a:solidFill>
-                <a:latin typeface="Calibri"/>
-              </a:defRPr>
-            </a:pPr>
-            <a:r>
-              <a:t>Yapısal sağlık izleme (SHM) sensör verilerinin sisteme entegrasyonu</a:t>
-            </a:r>
-          </a:p>
-          <a:p>
-            <a:pPr lvl="1">
-              <a:spcAft>
-                <a:spcPts val="800"/>
-              </a:spcAft>
-              <a:defRPr sz="1600">
-                <a:solidFill>
-                  <a:srgbClr val="666666"/>
-                </a:solidFill>
-                <a:latin typeface="Calibri"/>
-              </a:defRPr>
-            </a:pPr>
-            <a:r>
-              <a:t>Bina montajlı ivmeölçerlerden hasar göstergeleri</a:t>
-            </a:r>
-          </a:p>
-          <a:p>
-            <a:pPr lvl="1">
-              <a:spcAft>
-                <a:spcPts val="800"/>
-              </a:spcAft>
-              <a:defRPr sz="1600">
-                <a:solidFill>
-                  <a:srgbClr val="666666"/>
-                </a:solidFill>
-                <a:latin typeface="Calibri"/>
-              </a:defRPr>
-            </a:pPr>
-            <a:r>
-              <a:t>TBDY-2018 Bölüm 15 (mevcut bina değerlendirmesi) ile eşleştirme</a:t>
-            </a:r>
-          </a:p>
-          <a:p>
-            <a:pPr>
-              <a:spcAft>
-                <a:spcPts val="800"/>
-              </a:spcAft>
-              <a:defRPr sz="1800">
-                <a:solidFill>
-                  <a:srgbClr val="333333"/>
-                </a:solidFill>
-                <a:latin typeface="Calibri"/>
-              </a:defRPr>
-            </a:pPr>
-          </a:p>
-          <a:p>
-            <a:pPr>
-              <a:spcAft>
-                <a:spcPts val="800"/>
-              </a:spcAft>
-              <a:defRPr sz="1800">
-                <a:solidFill>
-                  <a:srgbClr val="333333"/>
-                </a:solidFill>
-                <a:latin typeface="Calibri"/>
-              </a:defRPr>
-            </a:pPr>
-            <a:r>
-              <a:t>Sonuç:</a:t>
-            </a:r>
-          </a:p>
-          <a:p>
-            <a:pPr lvl="1">
-              <a:spcAft>
-                <a:spcPts val="800"/>
-              </a:spcAft>
-              <a:defRPr sz="1600">
-                <a:solidFill>
-                  <a:srgbClr val="666666"/>
-                </a:solidFill>
-                <a:latin typeface="Calibri"/>
-              </a:defRPr>
-            </a:pPr>
-            <a:r>
-              <a:t>Türkiye'nin sismik kataloğundaki M&lt;2.7 altı boşluğu</a:t>
-            </a:r>
-          </a:p>
-          <a:p>
-            <a:pPr lvl="1">
-              <a:spcAft>
-                <a:spcPts val="800"/>
-              </a:spcAft>
-              <a:defRPr sz="1600">
-                <a:solidFill>
-                  <a:srgbClr val="666666"/>
-                </a:solidFill>
-                <a:latin typeface="Calibri"/>
-              </a:defRPr>
-            </a:pPr>
-            <a:r>
-              <a:t>derin öğrenme ile doldurmayı ve bu bilgiyi</a:t>
-            </a:r>
-          </a:p>
-          <a:p>
-            <a:pPr lvl="1">
-              <a:spcAft>
-                <a:spcPts val="800"/>
-              </a:spcAft>
-              <a:defRPr sz="1600">
-                <a:solidFill>
-                  <a:srgbClr val="666666"/>
-                </a:solidFill>
-                <a:latin typeface="Calibri"/>
-              </a:defRPr>
-            </a:pPr>
-            <a:r>
-              <a:t>yönetmelik-duyarlı bir yapay zeka aracıyla</a:t>
-            </a:r>
-          </a:p>
-          <a:p>
-            <a:pPr lvl="1">
-              <a:spcAft>
-                <a:spcPts val="800"/>
-              </a:spcAft>
-              <a:defRPr sz="1600">
-                <a:solidFill>
-                  <a:srgbClr val="666666"/>
-                </a:solidFill>
-                <a:latin typeface="Calibri"/>
-              </a:defRPr>
-            </a:pPr>
-            <a:r>
-              <a:t>inşaat sektörüne sunmayı amaçlayan</a:t>
-            </a:r>
-          </a:p>
-          <a:p>
-            <a:pPr lvl="1">
-              <a:spcAft>
-                <a:spcPts val="800"/>
-              </a:spcAft>
-              <a:defRPr sz="1600">
-                <a:solidFill>
-                  <a:srgbClr val="666666"/>
-                </a:solidFill>
-                <a:latin typeface="Calibri"/>
-              </a:defRPr>
-            </a:pPr>
-            <a:r>
-              <a:t>entegre bir mimari önermekteyiz.</a:t>
-            </a:r>
-          </a:p>
-        </p:txBody>
-      </p:sp>
-      <p:sp>
-        <p:nvSpPr>
-          <p:cNvPr id="4" name="Rectangle 3"/>
-          <p:cNvSpPr/>
+            <a:pPr algn="l">
+              <a:defRPr sz="2800" b="1" i="0">
+                <a:solidFill>
+                  <a:srgbClr val="FFFFFF"/>
+                </a:solidFill>
+                <a:latin typeface="Calibri Light"/>
+              </a:defRPr>
+            </a:pPr>
+            <a:r>
+              <a:t>Gelecek Yol Haritası</a:t>
+            </a:r>
+          </a:p>
+        </p:txBody>
+      </p:sp>
+      <p:sp>
+        <p:nvSpPr>
+          <p:cNvPr id="4" name="TextBox 3"/>
+          <p:cNvSpPr txBox="1"/>
           <p:nvPr/>
         </p:nvSpPr>
         <p:spPr>
           <a:xfrm>
-            <a:off x="914400" y="5669280"/>
-            <a:ext cx="7315200" cy="18288"/>
+            <a:off x="548640" y="914400"/>
+            <a:ext cx="8229600" cy="457200"/>
           </a:xfrm>
           <a:prstGeom prst="rect">
             <a:avLst/>
           </a:prstGeom>
+          <a:noFill/>
+        </p:spPr>
+        <p:txBody>
+          <a:bodyPr wrap="square" anchor="t">
+            <a:spAutoFit/>
+          </a:bodyPr>
+          <a:lstStyle/>
+          <a:p>
+            <a:pPr algn="l">
+              <a:defRPr sz="1400" b="0" i="1">
+                <a:solidFill>
+                  <a:srgbClr val="C39B2D"/>
+                </a:solidFill>
+                <a:latin typeface="Calibri"/>
+              </a:defRPr>
+            </a:pPr>
+            <a:r>
+              <a:t>"Yangın alarmı inşa ettik. Sırada: itfaiye entegrasyonu."</a:t>
+            </a:r>
+          </a:p>
+        </p:txBody>
+      </p:sp>
+      <p:sp>
+        <p:nvSpPr>
+          <p:cNvPr id="5" name="Rounded Rectangle 4"/>
+          <p:cNvSpPr/>
+          <p:nvPr/>
+        </p:nvSpPr>
+        <p:spPr>
+          <a:xfrm>
+            <a:off x="274320" y="1645920"/>
+            <a:ext cx="2743200" cy="4114800"/>
+          </a:xfrm>
+          <a:prstGeom prst="roundRect">
+            <a:avLst/>
+          </a:prstGeom>
           <a:solidFill>
-            <a:srgbClr val="666666"/>
+            <a:srgbClr val="0A2346"/>
           </a:solidFill>
-          <a:ln>
-            <a:noFill/>
+          <a:ln w="19050">
+            <a:solidFill>
+              <a:srgbClr val="3278C8"/>
+            </a:solidFill>
           </a:ln>
         </p:spPr>
         <p:style>
@@ -6389,22 +7481,449 @@
           </a:fontRef>
         </p:style>
         <p:txBody>
-          <a:bodyPr rtlCol="0" anchor="ctr"/>
-          <a:lstStyle/>
-          <a:p>
-            <a:pPr algn="ctr"/>
-          </a:p>
-        </p:txBody>
-      </p:sp>
-      <p:sp>
-        <p:nvSpPr>
-          <p:cNvPr id="5" name="TextBox 4"/>
+          <a:bodyPr rtlCol="0" anchor="ctr" wrap="square" lIns="137160" tIns="137160"/>
+          <a:lstStyle/>
+          <a:p>
+            <a:pPr algn="ctr">
+              <a:defRPr sz="1100" b="1">
+                <a:solidFill>
+                  <a:srgbClr val="3278C8"/>
+                </a:solidFill>
+                <a:latin typeface="Calibri"/>
+              </a:defRPr>
+            </a:pPr>
+            <a:r>
+              <a:t>0.1s MAE HEDEFİ</a:t>
+            </a:r>
+          </a:p>
+          <a:p>
+            <a:pPr>
+              <a:defRPr sz="600" b="0">
+                <a:solidFill>
+                  <a:srgbClr val="FFFFFF"/>
+                </a:solidFill>
+                <a:latin typeface="Calibri"/>
+              </a:defRPr>
+            </a:pPr>
+          </a:p>
+          <a:p>
+            <a:pPr>
+              <a:defRPr sz="1200" b="1">
+                <a:solidFill>
+                  <a:srgbClr val="FFFFFF"/>
+                </a:solidFill>
+                <a:latin typeface="Calibri"/>
+              </a:defRPr>
+            </a:pPr>
+            <a:r>
+              <a:t>PhaseNet ince-ayar:</a:t>
+            </a:r>
+          </a:p>
+          <a:p>
+            <a:pPr>
+              <a:defRPr sz="1100" b="0">
+                <a:solidFill>
+                  <a:srgbClr val="C8CDD7"/>
+                </a:solidFill>
+                <a:latin typeface="Calibri"/>
+              </a:defRPr>
+            </a:pPr>
+            <a:r>
+              <a:t>• 5000+ olay (ISC Bulletin)</a:t>
+            </a:r>
+          </a:p>
+          <a:p>
+            <a:pPr>
+              <a:defRPr sz="1100" b="0">
+                <a:solidFill>
+                  <a:srgbClr val="C8CDD7"/>
+                </a:solidFill>
+                <a:latin typeface="Calibri"/>
+              </a:defRPr>
+            </a:pPr>
+            <a:r>
+              <a:t>• Analist onaylı P/S picks</a:t>
+            </a:r>
+          </a:p>
+          <a:p>
+            <a:pPr>
+              <a:defRPr sz="1100" b="0">
+                <a:solidFill>
+                  <a:srgbClr val="C8CDD7"/>
+                </a:solidFill>
+                <a:latin typeface="Calibri"/>
+              </a:defRPr>
+            </a:pPr>
+            <a:r>
+              <a:t>• 20+ istasyon</a:t>
+            </a:r>
+          </a:p>
+          <a:p>
+            <a:pPr>
+              <a:defRPr sz="1100" b="0">
+                <a:solidFill>
+                  <a:srgbClr val="C8CDD7"/>
+                </a:solidFill>
+                <a:latin typeface="Calibri"/>
+              </a:defRPr>
+            </a:pPr>
+            <a:r>
+              <a:t>• Domain adaptation</a:t>
+            </a:r>
+          </a:p>
+          <a:p>
+            <a:pPr>
+              <a:defRPr sz="400" b="0">
+                <a:solidFill>
+                  <a:srgbClr val="FFFFFF"/>
+                </a:solidFill>
+                <a:latin typeface="Calibri"/>
+              </a:defRPr>
+            </a:pPr>
+          </a:p>
+          <a:p>
+            <a:pPr>
+              <a:defRPr sz="1100" b="0">
+                <a:solidFill>
+                  <a:srgbClr val="C39B2D"/>
+                </a:solidFill>
+                <a:latin typeface="Calibri"/>
+              </a:defRPr>
+            </a:pPr>
+            <a:r>
+              <a:t>Beklenen: 0.1-0.3s MAE</a:t>
+            </a:r>
+          </a:p>
+        </p:txBody>
+      </p:sp>
+      <p:sp>
+        <p:nvSpPr>
+          <p:cNvPr id="6" name="Rounded Rectangle 5"/>
+          <p:cNvSpPr/>
+          <p:nvPr/>
+        </p:nvSpPr>
+        <p:spPr>
+          <a:xfrm>
+            <a:off x="3200400" y="1645920"/>
+            <a:ext cx="2743200" cy="4114800"/>
+          </a:xfrm>
+          <a:prstGeom prst="roundRect">
+            <a:avLst/>
+          </a:prstGeom>
+          <a:solidFill>
+            <a:srgbClr val="0A2346"/>
+          </a:solidFill>
+          <a:ln w="19050">
+            <a:solidFill>
+              <a:srgbClr val="C39B2D"/>
+            </a:solidFill>
+          </a:ln>
+        </p:spPr>
+        <p:style>
+          <a:lnRef idx="1">
+            <a:schemeClr val="accent1"/>
+          </a:lnRef>
+          <a:fillRef idx="3">
+            <a:schemeClr val="accent1"/>
+          </a:fillRef>
+          <a:effectRef idx="2">
+            <a:schemeClr val="accent1"/>
+          </a:effectRef>
+          <a:fontRef idx="minor">
+            <a:schemeClr val="lt1"/>
+          </a:fontRef>
+        </p:style>
+        <p:txBody>
+          <a:bodyPr rtlCol="0" anchor="ctr" wrap="square" lIns="137160" tIns="137160"/>
+          <a:lstStyle/>
+          <a:p>
+            <a:pPr algn="ctr">
+              <a:defRPr sz="1100" b="1">
+                <a:solidFill>
+                  <a:srgbClr val="C39B2D"/>
+                </a:solidFill>
+                <a:latin typeface="Calibri"/>
+              </a:defRPr>
+            </a:pPr>
+            <a:r>
+              <a:t>EEW SİSTEMİ</a:t>
+            </a:r>
+          </a:p>
+          <a:p>
+            <a:pPr>
+              <a:defRPr sz="600" b="0">
+                <a:solidFill>
+                  <a:srgbClr val="FFFFFF"/>
+                </a:solidFill>
+                <a:latin typeface="Calibri"/>
+              </a:defRPr>
+            </a:pPr>
+          </a:p>
+          <a:p>
+            <a:pPr>
+              <a:defRPr sz="1200" b="1">
+                <a:solidFill>
+                  <a:srgbClr val="FFFFFF"/>
+                </a:solidFill>
+                <a:latin typeface="Calibri"/>
+              </a:defRPr>
+            </a:pPr>
+            <a:r>
+              <a:t>SeedLink entegrasyonu:</a:t>
+            </a:r>
+          </a:p>
+          <a:p>
+            <a:pPr>
+              <a:defRPr sz="1100" b="0">
+                <a:solidFill>
+                  <a:srgbClr val="C8CDD7"/>
+                </a:solidFill>
+                <a:latin typeface="Calibri"/>
+              </a:defRPr>
+            </a:pPr>
+            <a:r>
+              <a:t>• Gerçek zamanlı telemetri</a:t>
+            </a:r>
+          </a:p>
+          <a:p>
+            <a:pPr>
+              <a:defRPr sz="1100" b="0">
+                <a:solidFill>
+                  <a:srgbClr val="C8CDD7"/>
+                </a:solidFill>
+                <a:latin typeface="Calibri"/>
+              </a:defRPr>
+            </a:pPr>
+            <a:r>
+              <a:t>• P-dalga → M tahmini (3s)</a:t>
+            </a:r>
+          </a:p>
+          <a:p>
+            <a:pPr>
+              <a:defRPr sz="1100" b="0">
+                <a:solidFill>
+                  <a:srgbClr val="C8CDD7"/>
+                </a:solidFill>
+                <a:latin typeface="Calibri"/>
+              </a:defRPr>
+            </a:pPr>
+            <a:r>
+              <a:t>• GMPE → PGA tahmini</a:t>
+            </a:r>
+          </a:p>
+          <a:p>
+            <a:pPr>
+              <a:defRPr sz="1100" b="0">
+                <a:solidFill>
+                  <a:srgbClr val="C8CDD7"/>
+                </a:solidFill>
+                <a:latin typeface="Calibri"/>
+              </a:defRPr>
+            </a:pPr>
+            <a:r>
+              <a:t>• S-dalga varış hesabı</a:t>
+            </a:r>
+          </a:p>
+          <a:p>
+            <a:pPr>
+              <a:defRPr sz="400" b="0">
+                <a:solidFill>
+                  <a:srgbClr val="FFFFFF"/>
+                </a:solidFill>
+                <a:latin typeface="Calibri"/>
+              </a:defRPr>
+            </a:pPr>
+          </a:p>
+          <a:p>
+            <a:pPr>
+              <a:defRPr sz="1100" b="0">
+                <a:solidFill>
+                  <a:srgbClr val="C39B2D"/>
+                </a:solidFill>
+                <a:latin typeface="Calibri"/>
+              </a:defRPr>
+            </a:pPr>
+            <a:r>
+              <a:t>Hedef: 5-30s uyarı süresi</a:t>
+            </a:r>
+          </a:p>
+        </p:txBody>
+      </p:sp>
+      <p:sp>
+        <p:nvSpPr>
+          <p:cNvPr id="7" name="Rounded Rectangle 6"/>
+          <p:cNvSpPr/>
+          <p:nvPr/>
+        </p:nvSpPr>
+        <p:spPr>
+          <a:xfrm>
+            <a:off x="6126480" y="1645920"/>
+            <a:ext cx="2743200" cy="4114800"/>
+          </a:xfrm>
+          <a:prstGeom prst="roundRect">
+            <a:avLst/>
+          </a:prstGeom>
+          <a:solidFill>
+            <a:srgbClr val="0A2346"/>
+          </a:solidFill>
+          <a:ln w="19050">
+            <a:solidFill>
+              <a:srgbClr val="288C50"/>
+            </a:solidFill>
+          </a:ln>
+        </p:spPr>
+        <p:style>
+          <a:lnRef idx="1">
+            <a:schemeClr val="accent1"/>
+          </a:lnRef>
+          <a:fillRef idx="3">
+            <a:schemeClr val="accent1"/>
+          </a:fillRef>
+          <a:effectRef idx="2">
+            <a:schemeClr val="accent1"/>
+          </a:effectRef>
+          <a:fontRef idx="minor">
+            <a:schemeClr val="lt1"/>
+          </a:fontRef>
+        </p:style>
+        <p:txBody>
+          <a:bodyPr rtlCol="0" anchor="ctr" wrap="square" lIns="137160" tIns="137160"/>
+          <a:lstStyle/>
+          <a:p>
+            <a:pPr algn="ctr">
+              <a:defRPr sz="1100" b="1">
+                <a:solidFill>
+                  <a:srgbClr val="288C50"/>
+                </a:solidFill>
+                <a:latin typeface="Calibri"/>
+              </a:defRPr>
+            </a:pPr>
+            <a:r>
+              <a:t>SHM ENTEGRASYONU</a:t>
+            </a:r>
+          </a:p>
+          <a:p>
+            <a:pPr>
+              <a:defRPr sz="600" b="0">
+                <a:solidFill>
+                  <a:srgbClr val="FFFFFF"/>
+                </a:solidFill>
+                <a:latin typeface="Calibri"/>
+              </a:defRPr>
+            </a:pPr>
+          </a:p>
+          <a:p>
+            <a:pPr>
+              <a:defRPr sz="1200" b="1">
+                <a:solidFill>
+                  <a:srgbClr val="FFFFFF"/>
+                </a:solidFill>
+                <a:latin typeface="Calibri"/>
+              </a:defRPr>
+            </a:pPr>
+            <a:r>
+              <a:t>IoT sensör verileri:</a:t>
+            </a:r>
+          </a:p>
+          <a:p>
+            <a:pPr>
+              <a:defRPr sz="1100" b="0">
+                <a:solidFill>
+                  <a:srgbClr val="C8CDD7"/>
+                </a:solidFill>
+                <a:latin typeface="Calibri"/>
+              </a:defRPr>
+            </a:pPr>
+            <a:r>
+              <a:t>• Bina ivmeölçerleri (MEMS)</a:t>
+            </a:r>
+          </a:p>
+          <a:p>
+            <a:pPr>
+              <a:defRPr sz="1100" b="0">
+                <a:solidFill>
+                  <a:srgbClr val="C8CDD7"/>
+                </a:solidFill>
+                <a:latin typeface="Calibri"/>
+              </a:defRPr>
+            </a:pPr>
+            <a:r>
+              <a:t>• Katlar-arası ötelenme</a:t>
+            </a:r>
+          </a:p>
+          <a:p>
+            <a:pPr>
+              <a:defRPr sz="1100" b="0">
+                <a:solidFill>
+                  <a:srgbClr val="C8CDD7"/>
+                </a:solidFill>
+                <a:latin typeface="Calibri"/>
+              </a:defRPr>
+            </a:pPr>
+            <a:r>
+              <a:t>• Doğal frekans kayması</a:t>
+            </a:r>
+          </a:p>
+          <a:p>
+            <a:pPr>
+              <a:defRPr sz="1100" b="0">
+                <a:solidFill>
+                  <a:srgbClr val="C8CDD7"/>
+                </a:solidFill>
+                <a:latin typeface="Calibri"/>
+              </a:defRPr>
+            </a:pPr>
+            <a:r>
+              <a:t>• Hasar göstergeleri</a:t>
+            </a:r>
+          </a:p>
+          <a:p>
+            <a:pPr>
+              <a:defRPr sz="400" b="0">
+                <a:solidFill>
+                  <a:srgbClr val="FFFFFF"/>
+                </a:solidFill>
+                <a:latin typeface="Calibri"/>
+              </a:defRPr>
+            </a:pPr>
+          </a:p>
+          <a:p>
+            <a:pPr>
+              <a:defRPr sz="1100" b="0">
+                <a:solidFill>
+                  <a:srgbClr val="C39B2D"/>
+                </a:solidFill>
+                <a:latin typeface="Calibri"/>
+              </a:defRPr>
+            </a:pPr>
+            <a:r>
+              <a:t>TBDY-2018 Bölüm 15 ile</a:t>
+            </a:r>
+          </a:p>
+          <a:p>
+            <a:pPr>
+              <a:defRPr sz="1100" b="0">
+                <a:solidFill>
+                  <a:srgbClr val="C39B2D"/>
+                </a:solidFill>
+                <a:latin typeface="Calibri"/>
+              </a:defRPr>
+            </a:pPr>
+            <a:r>
+              <a:t>otomatik eşleştirme</a:t>
+            </a:r>
+          </a:p>
+        </p:txBody>
+      </p:sp>
+      <p:sp>
+        <p:nvSpPr>
+          <p:cNvPr id="8" name="TextBox 7"/>
           <p:cNvSpPr txBox="1"/>
           <p:nvPr/>
         </p:nvSpPr>
         <p:spPr>
           <a:xfrm>
-            <a:off x="457200" y="5852160"/>
+            <a:off x="457200" y="5943600"/>
             <a:ext cx="8229600" cy="365760"/>
           </a:xfrm>
           <a:prstGeom prst="rect">
@@ -6413,21 +7932,57 @@
           <a:noFill/>
         </p:spPr>
         <p:txBody>
-          <a:bodyPr wrap="none">
+          <a:bodyPr wrap="square" anchor="t">
             <a:spAutoFit/>
           </a:bodyPr>
           <a:lstStyle/>
           <a:p>
-            <a:pPr>
-              <a:defRPr sz="1000" i="1">
-                <a:solidFill>
-                  <a:srgbClr val="666666"/>
-                </a:solidFill>
-                <a:latin typeface="Calibri"/>
-              </a:defRPr>
-            </a:pPr>
-            <a:r>
-              <a:t>SHM entegrasyonu: bildiri metninde açıkça 'gelecek çalışma' olarak belirtilmiştir.</a:t>
+            <a:pPr algn="ctr">
+              <a:defRPr sz="1200" b="0" i="0">
+                <a:solidFill>
+                  <a:srgbClr val="A0AFC8"/>
+                </a:solidFill>
+                <a:latin typeface="Calibri"/>
+              </a:defRPr>
+            </a:pPr>
+            <a:r>
+              <a:t>Şu an: Tespit zekası (yangın alarmı) inşa edildi ve Türk istasyonlarında genelleştiği kanıtlandı.</a:t>
+            </a:r>
+          </a:p>
+        </p:txBody>
+      </p:sp>
+      <p:sp>
+        <p:nvSpPr>
+          <p:cNvPr id="9" name="TextBox 8"/>
+          <p:cNvSpPr txBox="1"/>
+          <p:nvPr/>
+        </p:nvSpPr>
+        <p:spPr>
+          <a:xfrm>
+            <a:off x="457200" y="6309360"/>
+            <a:ext cx="8229600" cy="365760"/>
+          </a:xfrm>
+          <a:prstGeom prst="rect">
+            <a:avLst/>
+          </a:prstGeom>
+          <a:noFill/>
+        </p:spPr>
+        <p:txBody>
+          <a:bodyPr wrap="square" anchor="t">
+            <a:spAutoFit/>
+          </a:bodyPr>
+          <a:lstStyle/>
+          <a:p>
+            <a:pPr algn="ctr">
+              <a:defRPr sz="1200" b="1" i="0">
+                <a:solidFill>
+                  <a:srgbClr val="C39B2D"/>
+                </a:solidFill>
+                <a:latin typeface="Calibri"/>
+              </a:defRPr>
+            </a:pPr>
+            <a:r>
+              <a:t>Sonraki adım: Bu çekirdeği gerçek zamanlı erken uyarı altyapısına entegre etmek.</a:t>
             </a:r>
           </a:p>
         </p:txBody>
